--- a/docs/RJ2506_Architecture_V3.pptx
+++ b/docs/RJ2506_Architecture_V3.pptx
@@ -3418,12 +3418,12 @@
           <a:p>
             <a:pPr>
               <a:lnSpc>
-                <a:spcPct val="120000"/>
+                <a:spcPct val="110000"/>
               </a:lnSpc>
               <a:spcBef>
-                <a:spcPts val="800"/>
+                <a:spcPts val="500"/>
               </a:spcBef>
-              <a:defRPr sz="2800" b="1">
+              <a:defRPr sz="2200" b="1">
                 <a:solidFill>
                   <a:srgbClr val="0066CC"/>
                 </a:solidFill>
@@ -3437,12 +3437,12 @@
           <a:p>
             <a:pPr lvl="1">
               <a:lnSpc>
-                <a:spcPct val="120000"/>
+                <a:spcPct val="110000"/>
               </a:lnSpc>
               <a:spcBef>
-                <a:spcPts val="800"/>
+                <a:spcPts val="500"/>
               </a:spcBef>
-              <a:defRPr sz="2400" b="1">
+              <a:defRPr sz="1900" b="1">
                 <a:solidFill>
                   <a:srgbClr val="FF6600"/>
                 </a:solidFill>
@@ -3456,12 +3456,12 @@
           <a:p>
             <a:pPr lvl="1">
               <a:lnSpc>
-                <a:spcPct val="120000"/>
+                <a:spcPct val="110000"/>
               </a:lnSpc>
               <a:spcBef>
-                <a:spcPts val="800"/>
+                <a:spcPts val="500"/>
               </a:spcBef>
-              <a:defRPr sz="2400" b="0">
+              <a:defRPr sz="1900" b="1">
                 <a:solidFill>
                   <a:srgbClr val="333333"/>
                 </a:solidFill>
@@ -3469,7 +3469,159 @@
               </a:defRPr>
             </a:pPr>
             <a:r>
-              <a:t>任务: Sim2Real数据采集与训练、模型部署、实车打通与联调</a:t>
+              <a:t>核心任务列表:</a:t>
+            </a:r>
+          </a:p>
+          <a:p>
+            <a:pPr lvl="2">
+              <a:lnSpc>
+                <a:spcPct val="110000"/>
+              </a:lnSpc>
+              <a:spcBef>
+                <a:spcPts val="500"/>
+              </a:spcBef>
+              <a:defRPr sz="1600" b="1">
+                <a:solidFill>
+                  <a:srgbClr val="003366"/>
+                </a:solidFill>
+                <a:latin typeface="Microsoft YaHei"/>
+              </a:defRPr>
+            </a:pPr>
+            <a:r>
+              <a:t>[2.1] 数据采集与 Sim2Real</a:t>
+            </a:r>
+          </a:p>
+          <a:p>
+            <a:pPr lvl="3">
+              <a:lnSpc>
+                <a:spcPct val="110000"/>
+              </a:lnSpc>
+              <a:spcBef>
+                <a:spcPts val="500"/>
+              </a:spcBef>
+              <a:defRPr sz="1300" b="0">
+                <a:solidFill>
+                  <a:srgbClr val="333333"/>
+                </a:solidFill>
+                <a:latin typeface="Microsoft YaHei"/>
+              </a:defRPr>
+            </a:pPr>
+            <a:r>
+              <a:t>• 录制 50 条遥操作真机数据，导入 IsaacLab</a:t>
+            </a:r>
+          </a:p>
+          <a:p>
+            <a:pPr lvl="3">
+              <a:lnSpc>
+                <a:spcPct val="110000"/>
+              </a:lnSpc>
+              <a:spcBef>
+                <a:spcPts val="500"/>
+              </a:spcBef>
+              <a:defRPr sz="1300" b="0">
+                <a:solidFill>
+                  <a:srgbClr val="333333"/>
+                </a:solidFill>
+                <a:latin typeface="Microsoft YaHei"/>
+              </a:defRPr>
+            </a:pPr>
+            <a:r>
+              <a:t>• 生成 10000 条带各种光照变异的合成数据进行扩充</a:t>
+            </a:r>
+          </a:p>
+          <a:p>
+            <a:pPr lvl="2">
+              <a:lnSpc>
+                <a:spcPct val="110000"/>
+              </a:lnSpc>
+              <a:spcBef>
+                <a:spcPts val="500"/>
+              </a:spcBef>
+              <a:defRPr sz="1600" b="1">
+                <a:solidFill>
+                  <a:srgbClr val="003366"/>
+                </a:solidFill>
+                <a:latin typeface="Microsoft YaHei"/>
+              </a:defRPr>
+            </a:pPr>
+            <a:r>
+              <a:t>[2.2] DP 模型训练与 TensorRT 部署</a:t>
+            </a:r>
+          </a:p>
+          <a:p>
+            <a:pPr lvl="3">
+              <a:lnSpc>
+                <a:spcPct val="110000"/>
+              </a:lnSpc>
+              <a:spcBef>
+                <a:spcPts val="500"/>
+              </a:spcBef>
+              <a:defRPr sz="1300" b="0">
+                <a:solidFill>
+                  <a:srgbClr val="333333"/>
+                </a:solidFill>
+                <a:latin typeface="Microsoft YaHei"/>
+              </a:defRPr>
+            </a:pPr>
+            <a:r>
+              <a:t>• 在 H100 集群上完成 Diffusion Policy 训练</a:t>
+            </a:r>
+          </a:p>
+          <a:p>
+            <a:pPr lvl="3">
+              <a:lnSpc>
+                <a:spcPct val="110000"/>
+              </a:lnSpc>
+              <a:spcBef>
+                <a:spcPts val="500"/>
+              </a:spcBef>
+              <a:defRPr sz="1300" b="0">
+                <a:solidFill>
+                  <a:srgbClr val="333333"/>
+                </a:solidFill>
+                <a:latin typeface="Microsoft YaHei"/>
+              </a:defRPr>
+            </a:pPr>
+            <a:r>
+              <a:t>• Orin 边缘端 TensorRT 部署，保证推理延迟 &lt; 30ms</a:t>
+            </a:r>
+          </a:p>
+          <a:p>
+            <a:pPr lvl="2">
+              <a:lnSpc>
+                <a:spcPct val="110000"/>
+              </a:lnSpc>
+              <a:spcBef>
+                <a:spcPts val="500"/>
+              </a:spcBef>
+              <a:defRPr sz="1600" b="1">
+                <a:solidFill>
+                  <a:srgbClr val="003366"/>
+                </a:solidFill>
+                <a:latin typeface="Microsoft YaHei"/>
+              </a:defRPr>
+            </a:pPr>
+            <a:r>
+              <a:t>[2.3] 大脑节点 (Brain Node) 实车串联</a:t>
+            </a:r>
+          </a:p>
+          <a:p>
+            <a:pPr lvl="3">
+              <a:lnSpc>
+                <a:spcPct val="110000"/>
+              </a:lnSpc>
+              <a:spcBef>
+                <a:spcPts val="500"/>
+              </a:spcBef>
+              <a:defRPr sz="1300" b="0">
+                <a:solidFill>
+                  <a:srgbClr val="333333"/>
+                </a:solidFill>
+                <a:latin typeface="Microsoft YaHei"/>
+              </a:defRPr>
+            </a:pPr>
+            <a:r>
+              <a:t>• 将 Nav2 -&gt; ACT -&gt; Feature Memory -&gt; IBVS -&gt; Touch-down 管线在真机完全打通</a:t>
             </a:r>
           </a:p>
         </p:txBody>
@@ -3798,7 +3950,7 @@
           <a:lstStyle/>
           <a:p>
             <a:pPr algn="ctr">
-              <a:defRPr b="1" sz="2200">
+              <a:defRPr b="1" sz="2000">
                 <a:solidFill>
                   <a:srgbClr val="0066CC"/>
                 </a:solidFill>
@@ -3810,7 +3962,7 @@
           </a:p>
           <a:p>
             <a:pPr>
-              <a:defRPr sz="1600">
+              <a:defRPr sz="1400">
                 <a:solidFill>
                   <a:srgbClr val="333333"/>
                 </a:solidFill>
@@ -3868,7 +4020,7 @@
           <a:lstStyle/>
           <a:p>
             <a:pPr algn="ctr">
-              <a:defRPr b="1" sz="2200">
+              <a:defRPr b="1" sz="2000">
                 <a:solidFill>
                   <a:srgbClr val="FF6600"/>
                 </a:solidFill>
@@ -3880,7 +4032,7 @@
           </a:p>
           <a:p>
             <a:pPr>
-              <a:defRPr sz="1600">
+              <a:defRPr sz="1400">
                 <a:solidFill>
                   <a:srgbClr val="333333"/>
                 </a:solidFill>
@@ -4055,12 +4207,12 @@
           <a:p>
             <a:pPr>
               <a:lnSpc>
-                <a:spcPct val="120000"/>
+                <a:spcPct val="110000"/>
               </a:lnSpc>
               <a:spcBef>
-                <a:spcPts val="800"/>
+                <a:spcPts val="500"/>
               </a:spcBef>
-              <a:defRPr sz="2800" b="1">
+              <a:defRPr sz="2200" b="1">
                 <a:solidFill>
                   <a:srgbClr val="003366"/>
                 </a:solidFill>
@@ -4074,12 +4226,12 @@
           <a:p>
             <a:pPr lvl="1">
               <a:lnSpc>
-                <a:spcPct val="120000"/>
+                <a:spcPct val="110000"/>
               </a:lnSpc>
               <a:spcBef>
-                <a:spcPts val="800"/>
+                <a:spcPts val="500"/>
               </a:spcBef>
-              <a:defRPr sz="2400" b="0">
+              <a:defRPr sz="1900" b="0">
                 <a:solidFill>
                   <a:srgbClr val="333333"/>
                 </a:solidFill>
@@ -4093,12 +4245,12 @@
           <a:p>
             <a:pPr lvl="1">
               <a:lnSpc>
-                <a:spcPct val="120000"/>
+                <a:spcPct val="110000"/>
               </a:lnSpc>
               <a:spcBef>
-                <a:spcPts val="800"/>
+                <a:spcPts val="500"/>
               </a:spcBef>
-              <a:defRPr sz="2400" b="0">
+              <a:defRPr sz="1900" b="0">
                 <a:solidFill>
                   <a:srgbClr val="333333"/>
                 </a:solidFill>
@@ -4112,12 +4264,12 @@
           <a:p>
             <a:pPr lvl="1">
               <a:lnSpc>
-                <a:spcPct val="120000"/>
+                <a:spcPct val="110000"/>
               </a:lnSpc>
               <a:spcBef>
-                <a:spcPts val="800"/>
+                <a:spcPts val="500"/>
               </a:spcBef>
-              <a:defRPr sz="2400" b="0">
+              <a:defRPr sz="1900" b="0">
                 <a:solidFill>
                   <a:srgbClr val="333333"/>
                 </a:solidFill>
@@ -4131,12 +4283,12 @@
           <a:p>
             <a:pPr lvl="1">
               <a:lnSpc>
-                <a:spcPct val="120000"/>
+                <a:spcPct val="110000"/>
               </a:lnSpc>
               <a:spcBef>
-                <a:spcPts val="800"/>
+                <a:spcPts val="500"/>
               </a:spcBef>
-              <a:defRPr sz="2400" b="0">
+              <a:defRPr sz="1900" b="0">
                 <a:solidFill>
                   <a:srgbClr val="333333"/>
                 </a:solidFill>
@@ -4150,12 +4302,12 @@
           <a:p>
             <a:pPr>
               <a:lnSpc>
-                <a:spcPct val="120000"/>
+                <a:spcPct val="110000"/>
               </a:lnSpc>
               <a:spcBef>
-                <a:spcPts val="800"/>
+                <a:spcPts val="500"/>
               </a:spcBef>
-              <a:defRPr sz="2800" b="1">
+              <a:defRPr sz="2200" b="1">
                 <a:solidFill>
                   <a:srgbClr val="003366"/>
                 </a:solidFill>
@@ -4169,12 +4321,12 @@
           <a:p>
             <a:pPr lvl="1">
               <a:lnSpc>
-                <a:spcPct val="120000"/>
+                <a:spcPct val="110000"/>
               </a:lnSpc>
               <a:spcBef>
-                <a:spcPts val="800"/>
+                <a:spcPts val="500"/>
               </a:spcBef>
-              <a:defRPr sz="2400" b="0">
+              <a:defRPr sz="1900" b="0">
                 <a:solidFill>
                   <a:srgbClr val="333333"/>
                 </a:solidFill>
@@ -4188,12 +4340,12 @@
           <a:p>
             <a:pPr lvl="1">
               <a:lnSpc>
-                <a:spcPct val="120000"/>
+                <a:spcPct val="110000"/>
               </a:lnSpc>
               <a:spcBef>
-                <a:spcPts val="800"/>
+                <a:spcPts val="500"/>
               </a:spcBef>
-              <a:defRPr sz="2400" b="0">
+              <a:defRPr sz="1900" b="0">
                 <a:solidFill>
                   <a:srgbClr val="333333"/>
                 </a:solidFill>
@@ -4207,12 +4359,12 @@
           <a:p>
             <a:pPr>
               <a:lnSpc>
-                <a:spcPct val="120000"/>
+                <a:spcPct val="110000"/>
               </a:lnSpc>
               <a:spcBef>
-                <a:spcPts val="800"/>
+                <a:spcPts val="500"/>
               </a:spcBef>
-              <a:defRPr sz="2800" b="1">
+              <a:defRPr sz="2200" b="1">
                 <a:solidFill>
                   <a:srgbClr val="FF6600"/>
                 </a:solidFill>
@@ -4226,12 +4378,12 @@
           <a:p>
             <a:pPr lvl="1">
               <a:lnSpc>
-                <a:spcPct val="120000"/>
+                <a:spcPct val="110000"/>
               </a:lnSpc>
               <a:spcBef>
-                <a:spcPts val="800"/>
+                <a:spcPts val="500"/>
               </a:spcBef>
-              <a:defRPr sz="2400" b="0">
+              <a:defRPr sz="1900" b="0">
                 <a:solidFill>
                   <a:srgbClr val="333333"/>
                 </a:solidFill>
@@ -4245,12 +4397,12 @@
           <a:p>
             <a:pPr lvl="1">
               <a:lnSpc>
-                <a:spcPct val="120000"/>
+                <a:spcPct val="110000"/>
               </a:lnSpc>
               <a:spcBef>
-                <a:spcPts val="800"/>
+                <a:spcPts val="500"/>
               </a:spcBef>
-              <a:defRPr sz="2400" b="0">
+              <a:defRPr sz="1900" b="0">
                 <a:solidFill>
                   <a:srgbClr val="333333"/>
                 </a:solidFill>
@@ -5265,12 +5417,12 @@
           <a:p>
             <a:pPr>
               <a:lnSpc>
-                <a:spcPct val="120000"/>
+                <a:spcPct val="110000"/>
               </a:lnSpc>
               <a:spcBef>
-                <a:spcPts val="800"/>
+                <a:spcPts val="500"/>
               </a:spcBef>
-              <a:defRPr sz="2800" b="0">
+              <a:defRPr sz="2200" b="0">
                 <a:solidFill>
                   <a:srgbClr val="333333"/>
                 </a:solidFill>
@@ -5281,12 +5433,12 @@
           <a:p>
             <a:pPr lvl="1">
               <a:lnSpc>
-                <a:spcPct val="120000"/>
+                <a:spcPct val="110000"/>
               </a:lnSpc>
               <a:spcBef>
-                <a:spcPts val="800"/>
+                <a:spcPts val="500"/>
               </a:spcBef>
-              <a:defRPr sz="2400" b="1">
+              <a:defRPr sz="1900" b="1">
                 <a:solidFill>
                   <a:srgbClr val="333333"/>
                 </a:solidFill>
@@ -5300,12 +5452,12 @@
           <a:p>
             <a:pPr lvl="2">
               <a:lnSpc>
-                <a:spcPct val="120000"/>
+                <a:spcPct val="110000"/>
               </a:lnSpc>
               <a:spcBef>
-                <a:spcPts val="800"/>
+                <a:spcPts val="500"/>
               </a:spcBef>
-              <a:defRPr sz="2000" b="0">
+              <a:defRPr sz="1600" b="0">
                 <a:solidFill>
                   <a:srgbClr val="333333"/>
                 </a:solidFill>
@@ -5319,12 +5471,12 @@
           <a:p>
             <a:pPr lvl="1">
               <a:lnSpc>
-                <a:spcPct val="120000"/>
+                <a:spcPct val="110000"/>
               </a:lnSpc>
               <a:spcBef>
-                <a:spcPts val="800"/>
+                <a:spcPts val="500"/>
               </a:spcBef>
-              <a:defRPr sz="2400" b="1">
+              <a:defRPr sz="1900" b="1">
                 <a:solidFill>
                   <a:srgbClr val="333333"/>
                 </a:solidFill>
@@ -5338,12 +5490,12 @@
           <a:p>
             <a:pPr lvl="2">
               <a:lnSpc>
-                <a:spcPct val="120000"/>
+                <a:spcPct val="110000"/>
               </a:lnSpc>
               <a:spcBef>
-                <a:spcPts val="800"/>
+                <a:spcPts val="500"/>
               </a:spcBef>
-              <a:defRPr sz="2000" b="0">
+              <a:defRPr sz="1600" b="0">
                 <a:solidFill>
                   <a:srgbClr val="333333"/>
                 </a:solidFill>
@@ -5357,12 +5509,12 @@
           <a:p>
             <a:pPr lvl="1">
               <a:lnSpc>
-                <a:spcPct val="120000"/>
+                <a:spcPct val="110000"/>
               </a:lnSpc>
               <a:spcBef>
-                <a:spcPts val="800"/>
+                <a:spcPts val="500"/>
               </a:spcBef>
-              <a:defRPr sz="2400" b="1">
+              <a:defRPr sz="1900" b="1">
                 <a:solidFill>
                   <a:srgbClr val="333333"/>
                 </a:solidFill>
@@ -5376,12 +5528,12 @@
           <a:p>
             <a:pPr lvl="2">
               <a:lnSpc>
-                <a:spcPct val="120000"/>
+                <a:spcPct val="110000"/>
               </a:lnSpc>
               <a:spcBef>
-                <a:spcPts val="800"/>
+                <a:spcPts val="500"/>
               </a:spcBef>
-              <a:defRPr sz="2000" b="0">
+              <a:defRPr sz="1600" b="0">
                 <a:solidFill>
                   <a:srgbClr val="333333"/>
                 </a:solidFill>
@@ -5487,12 +5639,12 @@
           <a:p>
             <a:pPr>
               <a:lnSpc>
-                <a:spcPct val="120000"/>
+                <a:spcPct val="110000"/>
               </a:lnSpc>
               <a:spcBef>
-                <a:spcPts val="800"/>
+                <a:spcPts val="500"/>
               </a:spcBef>
-              <a:defRPr sz="2800" b="0">
+              <a:defRPr sz="2200" b="0">
                 <a:solidFill>
                   <a:srgbClr val="333333"/>
                 </a:solidFill>
@@ -5503,12 +5655,12 @@
           <a:p>
             <a:pPr lvl="1">
               <a:lnSpc>
-                <a:spcPct val="120000"/>
+                <a:spcPct val="110000"/>
               </a:lnSpc>
               <a:spcBef>
-                <a:spcPts val="800"/>
+                <a:spcPts val="500"/>
               </a:spcBef>
-              <a:defRPr sz="2400" b="1">
+              <a:defRPr sz="1900" b="1">
                 <a:solidFill>
                   <a:srgbClr val="333333"/>
                 </a:solidFill>
@@ -5522,12 +5674,12 @@
           <a:p>
             <a:pPr lvl="2">
               <a:lnSpc>
-                <a:spcPct val="120000"/>
+                <a:spcPct val="110000"/>
               </a:lnSpc>
               <a:spcBef>
-                <a:spcPts val="800"/>
+                <a:spcPts val="500"/>
               </a:spcBef>
-              <a:defRPr sz="2000" b="0">
+              <a:defRPr sz="1600" b="0">
                 <a:solidFill>
                   <a:srgbClr val="333333"/>
                 </a:solidFill>
@@ -5541,12 +5693,12 @@
           <a:p>
             <a:pPr lvl="1">
               <a:lnSpc>
-                <a:spcPct val="120000"/>
+                <a:spcPct val="110000"/>
               </a:lnSpc>
               <a:spcBef>
-                <a:spcPts val="800"/>
+                <a:spcPts val="500"/>
               </a:spcBef>
-              <a:defRPr sz="2400" b="1">
+              <a:defRPr sz="1900" b="1">
                 <a:solidFill>
                   <a:srgbClr val="333333"/>
                 </a:solidFill>
@@ -5560,12 +5712,12 @@
           <a:p>
             <a:pPr lvl="2">
               <a:lnSpc>
-                <a:spcPct val="120000"/>
+                <a:spcPct val="110000"/>
               </a:lnSpc>
               <a:spcBef>
-                <a:spcPts val="800"/>
+                <a:spcPts val="500"/>
               </a:spcBef>
-              <a:defRPr sz="2000" b="0">
+              <a:defRPr sz="1600" b="0">
                 <a:solidFill>
                   <a:srgbClr val="333333"/>
                 </a:solidFill>
@@ -5579,12 +5731,12 @@
           <a:p>
             <a:pPr lvl="1">
               <a:lnSpc>
-                <a:spcPct val="120000"/>
+                <a:spcPct val="110000"/>
               </a:lnSpc>
               <a:spcBef>
-                <a:spcPts val="800"/>
+                <a:spcPts val="500"/>
               </a:spcBef>
-              <a:defRPr sz="2400" b="1">
+              <a:defRPr sz="1900" b="1">
                 <a:solidFill>
                   <a:srgbClr val="333333"/>
                 </a:solidFill>
@@ -5598,12 +5750,12 @@
           <a:p>
             <a:pPr lvl="2">
               <a:lnSpc>
-                <a:spcPct val="120000"/>
+                <a:spcPct val="110000"/>
               </a:lnSpc>
               <a:spcBef>
-                <a:spcPts val="800"/>
+                <a:spcPts val="500"/>
               </a:spcBef>
-              <a:defRPr sz="2000" b="0">
+              <a:defRPr sz="1600" b="0">
                 <a:solidFill>
                   <a:srgbClr val="333333"/>
                 </a:solidFill>
@@ -5775,12 +5927,12 @@
           <a:p>
             <a:pPr>
               <a:lnSpc>
-                <a:spcPct val="120000"/>
+                <a:spcPct val="110000"/>
               </a:lnSpc>
               <a:spcBef>
-                <a:spcPts val="800"/>
+                <a:spcPts val="500"/>
               </a:spcBef>
-              <a:defRPr sz="2800" b="1">
+              <a:defRPr sz="2200" b="1">
                 <a:solidFill>
                   <a:srgbClr val="0066CC"/>
                 </a:solidFill>
@@ -5794,12 +5946,12 @@
           <a:p>
             <a:pPr lvl="1">
               <a:lnSpc>
-                <a:spcPct val="120000"/>
+                <a:spcPct val="110000"/>
               </a:lnSpc>
               <a:spcBef>
-                <a:spcPts val="800"/>
+                <a:spcPts val="500"/>
               </a:spcBef>
-              <a:defRPr sz="2400" b="0">
+              <a:defRPr sz="1900" b="0">
                 <a:solidFill>
                   <a:srgbClr val="333333"/>
                 </a:solidFill>
@@ -5813,12 +5965,12 @@
           <a:p>
             <a:pPr lvl="1">
               <a:lnSpc>
-                <a:spcPct val="120000"/>
+                <a:spcPct val="110000"/>
               </a:lnSpc>
               <a:spcBef>
-                <a:spcPts val="800"/>
+                <a:spcPts val="500"/>
               </a:spcBef>
-              <a:defRPr sz="2400" b="0">
+              <a:defRPr sz="1900" b="0">
                 <a:solidFill>
                   <a:srgbClr val="333333"/>
                 </a:solidFill>
@@ -5832,12 +5984,12 @@
           <a:p>
             <a:pPr lvl="1">
               <a:lnSpc>
-                <a:spcPct val="120000"/>
+                <a:spcPct val="110000"/>
               </a:lnSpc>
               <a:spcBef>
-                <a:spcPts val="800"/>
+                <a:spcPts val="500"/>
               </a:spcBef>
-              <a:defRPr sz="2400" b="0">
+              <a:defRPr sz="1900" b="0">
                 <a:solidFill>
                   <a:srgbClr val="333333"/>
                 </a:solidFill>
@@ -5851,12 +6003,12 @@
           <a:p>
             <a:pPr>
               <a:lnSpc>
-                <a:spcPct val="120000"/>
+                <a:spcPct val="110000"/>
               </a:lnSpc>
               <a:spcBef>
-                <a:spcPts val="800"/>
+                <a:spcPts val="500"/>
               </a:spcBef>
-              <a:defRPr sz="2800" b="0">
+              <a:defRPr sz="2200" b="0">
                 <a:solidFill>
                   <a:srgbClr val="333333"/>
                 </a:solidFill>
@@ -5867,12 +6019,12 @@
           <a:p>
             <a:pPr>
               <a:lnSpc>
-                <a:spcPct val="120000"/>
+                <a:spcPct val="110000"/>
               </a:lnSpc>
               <a:spcBef>
-                <a:spcPts val="800"/>
+                <a:spcPts val="500"/>
               </a:spcBef>
-              <a:defRPr sz="2800" b="1">
+              <a:defRPr sz="2200" b="1">
                 <a:solidFill>
                   <a:srgbClr val="0066CC"/>
                 </a:solidFill>
@@ -5886,12 +6038,12 @@
           <a:p>
             <a:pPr lvl="1">
               <a:lnSpc>
-                <a:spcPct val="120000"/>
+                <a:spcPct val="110000"/>
               </a:lnSpc>
               <a:spcBef>
-                <a:spcPts val="800"/>
+                <a:spcPts val="500"/>
               </a:spcBef>
-              <a:defRPr sz="2400" b="0">
+              <a:defRPr sz="1900" b="0">
                 <a:solidFill>
                   <a:srgbClr val="333333"/>
                 </a:solidFill>
@@ -5905,12 +6057,12 @@
           <a:p>
             <a:pPr lvl="1">
               <a:lnSpc>
-                <a:spcPct val="120000"/>
+                <a:spcPct val="110000"/>
               </a:lnSpc>
               <a:spcBef>
-                <a:spcPts val="800"/>
+                <a:spcPts val="500"/>
               </a:spcBef>
-              <a:defRPr sz="2400" b="0">
+              <a:defRPr sz="1900" b="0">
                 <a:solidFill>
                   <a:srgbClr val="333333"/>
                 </a:solidFill>
@@ -5924,12 +6076,12 @@
           <a:p>
             <a:pPr lvl="1">
               <a:lnSpc>
-                <a:spcPct val="120000"/>
+                <a:spcPct val="110000"/>
               </a:lnSpc>
               <a:spcBef>
-                <a:spcPts val="800"/>
+                <a:spcPts val="500"/>
               </a:spcBef>
-              <a:defRPr sz="2400" b="0">
+              <a:defRPr sz="1900" b="0">
                 <a:solidFill>
                   <a:srgbClr val="333333"/>
                 </a:solidFill>
@@ -5943,12 +6095,12 @@
           <a:p>
             <a:pPr>
               <a:lnSpc>
-                <a:spcPct val="120000"/>
+                <a:spcPct val="110000"/>
               </a:lnSpc>
               <a:spcBef>
-                <a:spcPts val="800"/>
+                <a:spcPts val="500"/>
               </a:spcBef>
-              <a:defRPr sz="2800" b="0">
+              <a:defRPr sz="2200" b="0">
                 <a:solidFill>
                   <a:srgbClr val="333333"/>
                 </a:solidFill>
@@ -5959,12 +6111,12 @@
           <a:p>
             <a:pPr>
               <a:lnSpc>
-                <a:spcPct val="120000"/>
+                <a:spcPct val="110000"/>
               </a:lnSpc>
               <a:spcBef>
-                <a:spcPts val="800"/>
+                <a:spcPts val="500"/>
               </a:spcBef>
-              <a:defRPr sz="2800" b="1">
+              <a:defRPr sz="2200" b="1">
                 <a:solidFill>
                   <a:srgbClr val="0066CC"/>
                 </a:solidFill>
@@ -5978,12 +6130,12 @@
           <a:p>
             <a:pPr lvl="1">
               <a:lnSpc>
-                <a:spcPct val="120000"/>
+                <a:spcPct val="110000"/>
               </a:lnSpc>
               <a:spcBef>
-                <a:spcPts val="800"/>
+                <a:spcPts val="500"/>
               </a:spcBef>
-              <a:defRPr sz="2400" b="0">
+              <a:defRPr sz="1900" b="0">
                 <a:solidFill>
                   <a:srgbClr val="333333"/>
                 </a:solidFill>
@@ -5997,12 +6149,12 @@
           <a:p>
             <a:pPr lvl="1">
               <a:lnSpc>
-                <a:spcPct val="120000"/>
+                <a:spcPct val="110000"/>
               </a:lnSpc>
               <a:spcBef>
-                <a:spcPts val="800"/>
+                <a:spcPts val="500"/>
               </a:spcBef>
-              <a:defRPr sz="2400" b="0">
+              <a:defRPr sz="1900" b="0">
                 <a:solidFill>
                   <a:srgbClr val="333333"/>
                 </a:solidFill>
@@ -6174,12 +6326,12 @@
           <a:p>
             <a:pPr>
               <a:lnSpc>
-                <a:spcPct val="120000"/>
+                <a:spcPct val="110000"/>
               </a:lnSpc>
               <a:spcBef>
-                <a:spcPts val="800"/>
+                <a:spcPts val="500"/>
               </a:spcBef>
-              <a:defRPr sz="2800" b="1">
+              <a:defRPr sz="2200" b="1">
                 <a:solidFill>
                   <a:srgbClr val="0066CC"/>
                 </a:solidFill>
@@ -6193,12 +6345,12 @@
           <a:p>
             <a:pPr lvl="1">
               <a:lnSpc>
-                <a:spcPct val="120000"/>
+                <a:spcPct val="110000"/>
               </a:lnSpc>
               <a:spcBef>
-                <a:spcPts val="800"/>
+                <a:spcPts val="500"/>
               </a:spcBef>
-              <a:defRPr sz="2400" b="0">
+              <a:defRPr sz="1900" b="0">
                 <a:solidFill>
                   <a:srgbClr val="333333"/>
                 </a:solidFill>
@@ -6212,12 +6364,12 @@
           <a:p>
             <a:pPr lvl="1">
               <a:lnSpc>
-                <a:spcPct val="120000"/>
+                <a:spcPct val="110000"/>
               </a:lnSpc>
               <a:spcBef>
-                <a:spcPts val="800"/>
+                <a:spcPts val="500"/>
               </a:spcBef>
-              <a:defRPr sz="2400" b="0">
+              <a:defRPr sz="1900" b="0">
                 <a:solidFill>
                   <a:srgbClr val="333333"/>
                 </a:solidFill>
@@ -6231,12 +6383,12 @@
           <a:p>
             <a:pPr lvl="1">
               <a:lnSpc>
-                <a:spcPct val="120000"/>
+                <a:spcPct val="110000"/>
               </a:lnSpc>
               <a:spcBef>
-                <a:spcPts val="800"/>
+                <a:spcPts val="500"/>
               </a:spcBef>
-              <a:defRPr sz="2400" b="0">
+              <a:defRPr sz="1900" b="0">
                 <a:solidFill>
                   <a:srgbClr val="333333"/>
                 </a:solidFill>
@@ -6250,12 +6402,12 @@
           <a:p>
             <a:pPr>
               <a:lnSpc>
-                <a:spcPct val="120000"/>
+                <a:spcPct val="110000"/>
               </a:lnSpc>
               <a:spcBef>
-                <a:spcPts val="800"/>
+                <a:spcPts val="500"/>
               </a:spcBef>
-              <a:defRPr sz="2800" b="0">
+              <a:defRPr sz="2200" b="0">
                 <a:solidFill>
                   <a:srgbClr val="333333"/>
                 </a:solidFill>
@@ -6266,12 +6418,12 @@
           <a:p>
             <a:pPr>
               <a:lnSpc>
-                <a:spcPct val="120000"/>
+                <a:spcPct val="110000"/>
               </a:lnSpc>
               <a:spcBef>
-                <a:spcPts val="800"/>
+                <a:spcPts val="500"/>
               </a:spcBef>
-              <a:defRPr sz="2800" b="1">
+              <a:defRPr sz="2200" b="1">
                 <a:solidFill>
                   <a:srgbClr val="0066CC"/>
                 </a:solidFill>
@@ -6285,12 +6437,12 @@
           <a:p>
             <a:pPr lvl="1">
               <a:lnSpc>
-                <a:spcPct val="120000"/>
+                <a:spcPct val="110000"/>
               </a:lnSpc>
               <a:spcBef>
-                <a:spcPts val="800"/>
+                <a:spcPts val="500"/>
               </a:spcBef>
-              <a:defRPr sz="2400" b="0">
+              <a:defRPr sz="1900" b="0">
                 <a:solidFill>
                   <a:srgbClr val="333333"/>
                 </a:solidFill>
@@ -6304,12 +6456,12 @@
           <a:p>
             <a:pPr lvl="1">
               <a:lnSpc>
-                <a:spcPct val="120000"/>
+                <a:spcPct val="110000"/>
               </a:lnSpc>
               <a:spcBef>
-                <a:spcPts val="800"/>
+                <a:spcPts val="500"/>
               </a:spcBef>
-              <a:defRPr sz="2400" b="0">
+              <a:defRPr sz="1900" b="0">
                 <a:solidFill>
                   <a:srgbClr val="333333"/>
                 </a:solidFill>
@@ -6323,12 +6475,12 @@
           <a:p>
             <a:pPr lvl="1">
               <a:lnSpc>
-                <a:spcPct val="120000"/>
+                <a:spcPct val="110000"/>
               </a:lnSpc>
               <a:spcBef>
-                <a:spcPts val="800"/>
+                <a:spcPts val="500"/>
               </a:spcBef>
-              <a:defRPr sz="2400" b="0">
+              <a:defRPr sz="1900" b="0">
                 <a:solidFill>
                   <a:srgbClr val="333333"/>
                 </a:solidFill>
@@ -6342,12 +6494,12 @@
           <a:p>
             <a:pPr>
               <a:lnSpc>
-                <a:spcPct val="120000"/>
+                <a:spcPct val="110000"/>
               </a:lnSpc>
               <a:spcBef>
-                <a:spcPts val="800"/>
+                <a:spcPts val="500"/>
               </a:spcBef>
-              <a:defRPr sz="2800" b="0">
+              <a:defRPr sz="2200" b="0">
                 <a:solidFill>
                   <a:srgbClr val="333333"/>
                 </a:solidFill>
@@ -6358,12 +6510,12 @@
           <a:p>
             <a:pPr>
               <a:lnSpc>
-                <a:spcPct val="120000"/>
+                <a:spcPct val="110000"/>
               </a:lnSpc>
               <a:spcBef>
-                <a:spcPts val="800"/>
+                <a:spcPts val="500"/>
               </a:spcBef>
-              <a:defRPr sz="2800" b="1">
+              <a:defRPr sz="2200" b="1">
                 <a:solidFill>
                   <a:srgbClr val="0066CC"/>
                 </a:solidFill>
@@ -6377,12 +6529,12 @@
           <a:p>
             <a:pPr lvl="1">
               <a:lnSpc>
-                <a:spcPct val="120000"/>
+                <a:spcPct val="110000"/>
               </a:lnSpc>
               <a:spcBef>
-                <a:spcPts val="800"/>
+                <a:spcPts val="500"/>
               </a:spcBef>
-              <a:defRPr sz="2400" b="0">
+              <a:defRPr sz="1900" b="0">
                 <a:solidFill>
                   <a:srgbClr val="333333"/>
                 </a:solidFill>
@@ -6396,12 +6548,12 @@
           <a:p>
             <a:pPr lvl="1">
               <a:lnSpc>
-                <a:spcPct val="120000"/>
+                <a:spcPct val="110000"/>
               </a:lnSpc>
               <a:spcBef>
-                <a:spcPts val="800"/>
+                <a:spcPts val="500"/>
               </a:spcBef>
-              <a:defRPr sz="2400" b="0">
+              <a:defRPr sz="1900" b="0">
                 <a:solidFill>
                   <a:srgbClr val="333333"/>
                 </a:solidFill>
@@ -6573,12 +6725,12 @@
           <a:p>
             <a:pPr>
               <a:lnSpc>
-                <a:spcPct val="120000"/>
+                <a:spcPct val="110000"/>
               </a:lnSpc>
               <a:spcBef>
-                <a:spcPts val="800"/>
+                <a:spcPts val="500"/>
               </a:spcBef>
-              <a:defRPr sz="2800" b="1">
+              <a:defRPr sz="2200" b="1">
                 <a:solidFill>
                   <a:srgbClr val="0066CC"/>
                 </a:solidFill>
@@ -6592,12 +6744,12 @@
           <a:p>
             <a:pPr lvl="1">
               <a:lnSpc>
-                <a:spcPct val="120000"/>
+                <a:spcPct val="110000"/>
               </a:lnSpc>
               <a:spcBef>
-                <a:spcPts val="800"/>
+                <a:spcPts val="500"/>
               </a:spcBef>
-              <a:defRPr sz="2400" b="1">
+              <a:defRPr sz="1900" b="1">
                 <a:solidFill>
                   <a:srgbClr val="FF6600"/>
                 </a:solidFill>
@@ -6611,12 +6763,12 @@
           <a:p>
             <a:pPr lvl="1">
               <a:lnSpc>
-                <a:spcPct val="120000"/>
+                <a:spcPct val="110000"/>
               </a:lnSpc>
               <a:spcBef>
-                <a:spcPts val="800"/>
+                <a:spcPts val="500"/>
               </a:spcBef>
-              <a:defRPr sz="2400" b="0">
+              <a:defRPr sz="1900" b="0">
                 <a:solidFill>
                   <a:srgbClr val="333333"/>
                 </a:solidFill>
@@ -6630,12 +6782,12 @@
           <a:p>
             <a:pPr lvl="1">
               <a:lnSpc>
-                <a:spcPct val="120000"/>
+                <a:spcPct val="110000"/>
               </a:lnSpc>
               <a:spcBef>
-                <a:spcPts val="800"/>
+                <a:spcPts val="500"/>
               </a:spcBef>
-              <a:defRPr sz="2400" b="0">
+              <a:defRPr sz="1900" b="0">
                 <a:solidFill>
                   <a:srgbClr val="333333"/>
                 </a:solidFill>
@@ -6807,12 +6959,12 @@
           <a:p>
             <a:pPr>
               <a:lnSpc>
-                <a:spcPct val="120000"/>
+                <a:spcPct val="110000"/>
               </a:lnSpc>
               <a:spcBef>
-                <a:spcPts val="800"/>
+                <a:spcPts val="500"/>
               </a:spcBef>
-              <a:defRPr sz="2800" b="1">
+              <a:defRPr sz="2200" b="1">
                 <a:solidFill>
                   <a:srgbClr val="0066CC"/>
                 </a:solidFill>
@@ -6826,12 +6978,12 @@
           <a:p>
             <a:pPr lvl="1">
               <a:lnSpc>
-                <a:spcPct val="120000"/>
+                <a:spcPct val="110000"/>
               </a:lnSpc>
               <a:spcBef>
-                <a:spcPts val="800"/>
+                <a:spcPts val="500"/>
               </a:spcBef>
-              <a:defRPr sz="2400" b="1">
+              <a:defRPr sz="1900" b="1">
                 <a:solidFill>
                   <a:srgbClr val="FF6600"/>
                 </a:solidFill>
@@ -6845,12 +6997,12 @@
           <a:p>
             <a:pPr lvl="1">
               <a:lnSpc>
-                <a:spcPct val="120000"/>
+                <a:spcPct val="110000"/>
               </a:lnSpc>
               <a:spcBef>
-                <a:spcPts val="800"/>
+                <a:spcPts val="500"/>
               </a:spcBef>
-              <a:defRPr sz="2400" b="0">
+              <a:defRPr sz="1900" b="0">
                 <a:solidFill>
                   <a:srgbClr val="333333"/>
                 </a:solidFill>
@@ -6864,12 +7016,12 @@
           <a:p>
             <a:pPr lvl="2">
               <a:lnSpc>
-                <a:spcPct val="120000"/>
+                <a:spcPct val="110000"/>
               </a:lnSpc>
               <a:spcBef>
-                <a:spcPts val="800"/>
+                <a:spcPts val="500"/>
               </a:spcBef>
-              <a:defRPr sz="2000" b="0">
+              <a:defRPr sz="1600" b="0">
                 <a:solidFill>
                   <a:srgbClr val="333333"/>
                 </a:solidFill>
@@ -6883,12 +7035,12 @@
           <a:p>
             <a:pPr lvl="2">
               <a:lnSpc>
-                <a:spcPct val="120000"/>
+                <a:spcPct val="110000"/>
               </a:lnSpc>
               <a:spcBef>
-                <a:spcPts val="800"/>
+                <a:spcPts val="500"/>
               </a:spcBef>
-              <a:defRPr sz="2000" b="0">
+              <a:defRPr sz="1600" b="0">
                 <a:solidFill>
                   <a:srgbClr val="333333"/>
                 </a:solidFill>
@@ -6902,12 +7054,12 @@
           <a:p>
             <a:pPr lvl="2">
               <a:lnSpc>
-                <a:spcPct val="120000"/>
+                <a:spcPct val="110000"/>
               </a:lnSpc>
               <a:spcBef>
-                <a:spcPts val="800"/>
+                <a:spcPts val="500"/>
               </a:spcBef>
-              <a:defRPr sz="2000" b="0">
+              <a:defRPr sz="1600" b="0">
                 <a:solidFill>
                   <a:srgbClr val="333333"/>
                 </a:solidFill>
@@ -6921,12 +7073,12 @@
           <a:p>
             <a:pPr lvl="2">
               <a:lnSpc>
-                <a:spcPct val="120000"/>
+                <a:spcPct val="110000"/>
               </a:lnSpc>
               <a:spcBef>
-                <a:spcPts val="800"/>
+                <a:spcPts val="500"/>
               </a:spcBef>
-              <a:defRPr sz="2000" b="0">
+              <a:defRPr sz="1600" b="0">
                 <a:solidFill>
                   <a:srgbClr val="333333"/>
                 </a:solidFill>
@@ -6940,12 +7092,12 @@
           <a:p>
             <a:pPr lvl="2">
               <a:lnSpc>
-                <a:spcPct val="120000"/>
+                <a:spcPct val="110000"/>
               </a:lnSpc>
               <a:spcBef>
-                <a:spcPts val="800"/>
+                <a:spcPts val="500"/>
               </a:spcBef>
-              <a:defRPr sz="2000" b="0">
+              <a:defRPr sz="1600" b="0">
                 <a:solidFill>
                   <a:srgbClr val="333333"/>
                 </a:solidFill>

--- a/docs/RJ2506_Architecture_V3.pptx
+++ b/docs/RJ2506_Architecture_V3.pptx
@@ -5,17 +5,19 @@
     <p:sldMasterId id="2147483648" r:id="rId1"/>
   </p:sldMasterIdLst>
   <p:sldIdLst>
-    <p:sldId id="256" r:id="rId7"/>
-    <p:sldId id="257" r:id="rId8"/>
-    <p:sldId id="258" r:id="rId9"/>
-    <p:sldId id="259" r:id="rId10"/>
-    <p:sldId id="260" r:id="rId11"/>
-    <p:sldId id="261" r:id="rId12"/>
-    <p:sldId id="262" r:id="rId13"/>
-    <p:sldId id="263" r:id="rId14"/>
-    <p:sldId id="264" r:id="rId15"/>
-    <p:sldId id="265" r:id="rId16"/>
-    <p:sldId id="266" r:id="rId17"/>
+    <p:sldId id="256" r:id="rId2"/>
+    <p:sldId id="257" r:id="rId3"/>
+    <p:sldId id="268" r:id="rId4"/>
+    <p:sldId id="267" r:id="rId5"/>
+    <p:sldId id="258" r:id="rId6"/>
+    <p:sldId id="259" r:id="rId7"/>
+    <p:sldId id="260" r:id="rId8"/>
+    <p:sldId id="261" r:id="rId9"/>
+    <p:sldId id="262" r:id="rId10"/>
+    <p:sldId id="263" r:id="rId11"/>
+    <p:sldId id="264" r:id="rId12"/>
+    <p:sldId id="265" r:id="rId13"/>
+    <p:sldId id="266" r:id="rId14"/>
   </p:sldIdLst>
   <p:sldSz cx="9144000" cy="6858000" type="screen4x3"/>
   <p:notesSz cx="6858000" cy="9144000"/>
@@ -114,6 +116,22 @@
       </a:defRPr>
     </a:lvl9pPr>
   </p:defaultTextStyle>
+  <p:extLst>
+    <p:ext uri="{EFAFB233-063F-42B5-8137-9DF3F51BA10A}">
+      <p15:sldGuideLst xmlns:p15="http://schemas.microsoft.com/office/powerpoint/2012/main">
+        <p15:guide id="1" orient="horz" pos="2160">
+          <p15:clr>
+            <a:srgbClr val="A4A3A4"/>
+          </p15:clr>
+        </p15:guide>
+        <p15:guide id="2" pos="2880">
+          <p15:clr>
+            <a:srgbClr val="A4A3A4"/>
+          </p15:clr>
+        </p15:guide>
+      </p15:sldGuideLst>
+    </p:ext>
+  </p:extLst>
 </p:presentation>
 </file>
 
@@ -155,10 +173,9 @@
           <a:lstStyle/>
           <a:p>
             <a:r>
-              <a:rPr lang="en-US" smtClean="0"/>
+              <a:rPr lang="en-US"/>
               <a:t>Click to edit Master title style</a:t>
             </a:r>
-            <a:endParaRPr lang="en-US"/>
           </a:p>
         </p:txBody>
       </p:sp>
@@ -274,10 +291,9 @@
           </a:lstStyle>
           <a:p>
             <a:r>
-              <a:rPr lang="en-US" smtClean="0"/>
+              <a:rPr lang="en-US"/>
               <a:t>Click to edit Master subtitle style</a:t>
             </a:r>
-            <a:endParaRPr lang="en-US"/>
           </a:p>
         </p:txBody>
       </p:sp>
@@ -298,7 +314,7 @@
           <a:p>
             <a:fld id="{5BCAD085-E8A6-8845-BD4E-CB4CCA059FC4}" type="datetimeFigureOut">
               <a:rPr lang="en-US" smtClean="0"/>
-              <a:t>1/27/13</a:t>
+              <a:t>3/24/26</a:t>
             </a:fld>
             <a:endParaRPr lang="en-US"/>
           </a:p>
@@ -392,10 +408,9 @@
           <a:lstStyle/>
           <a:p>
             <a:r>
-              <a:rPr lang="en-US" smtClean="0"/>
+              <a:rPr lang="en-US"/>
               <a:t>Click to edit Master title style</a:t>
             </a:r>
-            <a:endParaRPr lang="en-US"/>
           </a:p>
         </p:txBody>
       </p:sp>
@@ -416,38 +431,37 @@
           <a:p>
             <a:pPr lvl="0"/>
             <a:r>
-              <a:rPr lang="en-US" smtClean="0"/>
+              <a:rPr lang="en-US"/>
               <a:t>Click to edit Master text styles</a:t>
             </a:r>
           </a:p>
           <a:p>
             <a:pPr lvl="1"/>
             <a:r>
-              <a:rPr lang="en-US" smtClean="0"/>
+              <a:rPr lang="en-US"/>
               <a:t>Second level</a:t>
             </a:r>
           </a:p>
           <a:p>
             <a:pPr lvl="2"/>
             <a:r>
-              <a:rPr lang="en-US" smtClean="0"/>
+              <a:rPr lang="en-US"/>
               <a:t>Third level</a:t>
             </a:r>
           </a:p>
           <a:p>
             <a:pPr lvl="3"/>
             <a:r>
-              <a:rPr lang="en-US" smtClean="0"/>
+              <a:rPr lang="en-US"/>
               <a:t>Fourth level</a:t>
             </a:r>
           </a:p>
           <a:p>
             <a:pPr lvl="4"/>
             <a:r>
-              <a:rPr lang="en-US" smtClean="0"/>
+              <a:rPr lang="en-US"/>
               <a:t>Fifth level</a:t>
             </a:r>
-            <a:endParaRPr lang="en-US"/>
           </a:p>
         </p:txBody>
       </p:sp>
@@ -468,7 +482,7 @@
           <a:p>
             <a:fld id="{5BCAD085-E8A6-8845-BD4E-CB4CCA059FC4}" type="datetimeFigureOut">
               <a:rPr lang="en-US" smtClean="0"/>
-              <a:t>1/27/13</a:t>
+              <a:t>3/24/26</a:t>
             </a:fld>
             <a:endParaRPr lang="en-US"/>
           </a:p>
@@ -567,10 +581,9 @@
           <a:lstStyle/>
           <a:p>
             <a:r>
-              <a:rPr lang="en-US" smtClean="0"/>
+              <a:rPr lang="en-US"/>
               <a:t>Click to edit Master title style</a:t>
             </a:r>
-            <a:endParaRPr lang="en-US"/>
           </a:p>
         </p:txBody>
       </p:sp>
@@ -596,38 +609,37 @@
           <a:p>
             <a:pPr lvl="0"/>
             <a:r>
-              <a:rPr lang="en-US" smtClean="0"/>
+              <a:rPr lang="en-US"/>
               <a:t>Click to edit Master text styles</a:t>
             </a:r>
           </a:p>
           <a:p>
             <a:pPr lvl="1"/>
             <a:r>
-              <a:rPr lang="en-US" smtClean="0"/>
+              <a:rPr lang="en-US"/>
               <a:t>Second level</a:t>
             </a:r>
           </a:p>
           <a:p>
             <a:pPr lvl="2"/>
             <a:r>
-              <a:rPr lang="en-US" smtClean="0"/>
+              <a:rPr lang="en-US"/>
               <a:t>Third level</a:t>
             </a:r>
           </a:p>
           <a:p>
             <a:pPr lvl="3"/>
             <a:r>
-              <a:rPr lang="en-US" smtClean="0"/>
+              <a:rPr lang="en-US"/>
               <a:t>Fourth level</a:t>
             </a:r>
           </a:p>
           <a:p>
             <a:pPr lvl="4"/>
             <a:r>
-              <a:rPr lang="en-US" smtClean="0"/>
+              <a:rPr lang="en-US"/>
               <a:t>Fifth level</a:t>
             </a:r>
-            <a:endParaRPr lang="en-US"/>
           </a:p>
         </p:txBody>
       </p:sp>
@@ -648,7 +660,7 @@
           <a:p>
             <a:fld id="{5BCAD085-E8A6-8845-BD4E-CB4CCA059FC4}" type="datetimeFigureOut">
               <a:rPr lang="en-US" smtClean="0"/>
-              <a:t>1/27/13</a:t>
+              <a:t>3/24/26</a:t>
             </a:fld>
             <a:endParaRPr lang="en-US"/>
           </a:p>
@@ -742,10 +754,9 @@
           <a:lstStyle/>
           <a:p>
             <a:r>
-              <a:rPr lang="en-US" smtClean="0"/>
+              <a:rPr lang="en-US"/>
               <a:t>Click to edit Master title style</a:t>
             </a:r>
-            <a:endParaRPr lang="en-US"/>
           </a:p>
         </p:txBody>
       </p:sp>
@@ -766,38 +777,37 @@
           <a:p>
             <a:pPr lvl="0"/>
             <a:r>
-              <a:rPr lang="en-US" smtClean="0"/>
+              <a:rPr lang="en-US"/>
               <a:t>Click to edit Master text styles</a:t>
             </a:r>
           </a:p>
           <a:p>
             <a:pPr lvl="1"/>
             <a:r>
-              <a:rPr lang="en-US" smtClean="0"/>
+              <a:rPr lang="en-US"/>
               <a:t>Second level</a:t>
             </a:r>
           </a:p>
           <a:p>
             <a:pPr lvl="2"/>
             <a:r>
-              <a:rPr lang="en-US" smtClean="0"/>
+              <a:rPr lang="en-US"/>
               <a:t>Third level</a:t>
             </a:r>
           </a:p>
           <a:p>
             <a:pPr lvl="3"/>
             <a:r>
-              <a:rPr lang="en-US" smtClean="0"/>
+              <a:rPr lang="en-US"/>
               <a:t>Fourth level</a:t>
             </a:r>
           </a:p>
           <a:p>
             <a:pPr lvl="4"/>
             <a:r>
-              <a:rPr lang="en-US" smtClean="0"/>
+              <a:rPr lang="en-US"/>
               <a:t>Fifth level</a:t>
             </a:r>
-            <a:endParaRPr lang="en-US"/>
           </a:p>
         </p:txBody>
       </p:sp>
@@ -818,7 +828,7 @@
           <a:p>
             <a:fld id="{5BCAD085-E8A6-8845-BD4E-CB4CCA059FC4}" type="datetimeFigureOut">
               <a:rPr lang="en-US" smtClean="0"/>
-              <a:t>1/27/13</a:t>
+              <a:t>3/24/26</a:t>
             </a:fld>
             <a:endParaRPr lang="en-US"/>
           </a:p>
@@ -921,10 +931,9 @@
           </a:lstStyle>
           <a:p>
             <a:r>
-              <a:rPr lang="en-US" smtClean="0"/>
+              <a:rPr lang="en-US"/>
               <a:t>Click to edit Master title style</a:t>
             </a:r>
-            <a:endParaRPr lang="en-US"/>
           </a:p>
         </p:txBody>
       </p:sp>
@@ -1041,7 +1050,7 @@
           <a:p>
             <a:pPr lvl="0"/>
             <a:r>
-              <a:rPr lang="en-US" smtClean="0"/>
+              <a:rPr lang="en-US"/>
               <a:t>Click to edit Master text styles</a:t>
             </a:r>
           </a:p>
@@ -1064,7 +1073,7 @@
           <a:p>
             <a:fld id="{5BCAD085-E8A6-8845-BD4E-CB4CCA059FC4}" type="datetimeFigureOut">
               <a:rPr lang="en-US" smtClean="0"/>
-              <a:t>1/27/13</a:t>
+              <a:t>3/24/26</a:t>
             </a:fld>
             <a:endParaRPr lang="en-US"/>
           </a:p>
@@ -1158,10 +1167,9 @@
           <a:lstStyle/>
           <a:p>
             <a:r>
-              <a:rPr lang="en-US" smtClean="0"/>
+              <a:rPr lang="en-US"/>
               <a:t>Click to edit Master title style</a:t>
             </a:r>
-            <a:endParaRPr lang="en-US"/>
           </a:p>
         </p:txBody>
       </p:sp>
@@ -1215,38 +1223,37 @@
           <a:p>
             <a:pPr lvl="0"/>
             <a:r>
-              <a:rPr lang="en-US" smtClean="0"/>
+              <a:rPr lang="en-US"/>
               <a:t>Click to edit Master text styles</a:t>
             </a:r>
           </a:p>
           <a:p>
             <a:pPr lvl="1"/>
             <a:r>
-              <a:rPr lang="en-US" smtClean="0"/>
+              <a:rPr lang="en-US"/>
               <a:t>Second level</a:t>
             </a:r>
           </a:p>
           <a:p>
             <a:pPr lvl="2"/>
             <a:r>
-              <a:rPr lang="en-US" smtClean="0"/>
+              <a:rPr lang="en-US"/>
               <a:t>Third level</a:t>
             </a:r>
           </a:p>
           <a:p>
             <a:pPr lvl="3"/>
             <a:r>
-              <a:rPr lang="en-US" smtClean="0"/>
+              <a:rPr lang="en-US"/>
               <a:t>Fourth level</a:t>
             </a:r>
           </a:p>
           <a:p>
             <a:pPr lvl="4"/>
             <a:r>
-              <a:rPr lang="en-US" smtClean="0"/>
+              <a:rPr lang="en-US"/>
               <a:t>Fifth level</a:t>
             </a:r>
-            <a:endParaRPr lang="en-US"/>
           </a:p>
         </p:txBody>
       </p:sp>
@@ -1300,38 +1307,37 @@
           <a:p>
             <a:pPr lvl="0"/>
             <a:r>
-              <a:rPr lang="en-US" smtClean="0"/>
+              <a:rPr lang="en-US"/>
               <a:t>Click to edit Master text styles</a:t>
             </a:r>
           </a:p>
           <a:p>
             <a:pPr lvl="1"/>
             <a:r>
-              <a:rPr lang="en-US" smtClean="0"/>
+              <a:rPr lang="en-US"/>
               <a:t>Second level</a:t>
             </a:r>
           </a:p>
           <a:p>
             <a:pPr lvl="2"/>
             <a:r>
-              <a:rPr lang="en-US" smtClean="0"/>
+              <a:rPr lang="en-US"/>
               <a:t>Third level</a:t>
             </a:r>
           </a:p>
           <a:p>
             <a:pPr lvl="3"/>
             <a:r>
-              <a:rPr lang="en-US" smtClean="0"/>
+              <a:rPr lang="en-US"/>
               <a:t>Fourth level</a:t>
             </a:r>
           </a:p>
           <a:p>
             <a:pPr lvl="4"/>
             <a:r>
-              <a:rPr lang="en-US" smtClean="0"/>
+              <a:rPr lang="en-US"/>
               <a:t>Fifth level</a:t>
             </a:r>
-            <a:endParaRPr lang="en-US"/>
           </a:p>
         </p:txBody>
       </p:sp>
@@ -1352,7 +1358,7 @@
           <a:p>
             <a:fld id="{5BCAD085-E8A6-8845-BD4E-CB4CCA059FC4}" type="datetimeFigureOut">
               <a:rPr lang="en-US" smtClean="0"/>
-              <a:t>1/27/13</a:t>
+              <a:t>3/24/26</a:t>
             </a:fld>
             <a:endParaRPr lang="en-US"/>
           </a:p>
@@ -1450,10 +1456,9 @@
           </a:lstStyle>
           <a:p>
             <a:r>
-              <a:rPr lang="en-US" smtClean="0"/>
+              <a:rPr lang="en-US"/>
               <a:t>Click to edit Master title style</a:t>
             </a:r>
-            <a:endParaRPr lang="en-US"/>
           </a:p>
         </p:txBody>
       </p:sp>
@@ -1516,7 +1521,7 @@
           <a:p>
             <a:pPr lvl="0"/>
             <a:r>
-              <a:rPr lang="en-US" smtClean="0"/>
+              <a:rPr lang="en-US"/>
               <a:t>Click to edit Master text styles</a:t>
             </a:r>
           </a:p>
@@ -1572,38 +1577,37 @@
           <a:p>
             <a:pPr lvl="0"/>
             <a:r>
-              <a:rPr lang="en-US" smtClean="0"/>
+              <a:rPr lang="en-US"/>
               <a:t>Click to edit Master text styles</a:t>
             </a:r>
           </a:p>
           <a:p>
             <a:pPr lvl="1"/>
             <a:r>
-              <a:rPr lang="en-US" smtClean="0"/>
+              <a:rPr lang="en-US"/>
               <a:t>Second level</a:t>
             </a:r>
           </a:p>
           <a:p>
             <a:pPr lvl="2"/>
             <a:r>
-              <a:rPr lang="en-US" smtClean="0"/>
+              <a:rPr lang="en-US"/>
               <a:t>Third level</a:t>
             </a:r>
           </a:p>
           <a:p>
             <a:pPr lvl="3"/>
             <a:r>
-              <a:rPr lang="en-US" smtClean="0"/>
+              <a:rPr lang="en-US"/>
               <a:t>Fourth level</a:t>
             </a:r>
           </a:p>
           <a:p>
             <a:pPr lvl="4"/>
             <a:r>
-              <a:rPr lang="en-US" smtClean="0"/>
+              <a:rPr lang="en-US"/>
               <a:t>Fifth level</a:t>
             </a:r>
-            <a:endParaRPr lang="en-US"/>
           </a:p>
         </p:txBody>
       </p:sp>
@@ -1666,7 +1670,7 @@
           <a:p>
             <a:pPr lvl="0"/>
             <a:r>
-              <a:rPr lang="en-US" smtClean="0"/>
+              <a:rPr lang="en-US"/>
               <a:t>Click to edit Master text styles</a:t>
             </a:r>
           </a:p>
@@ -1722,38 +1726,37 @@
           <a:p>
             <a:pPr lvl="0"/>
             <a:r>
-              <a:rPr lang="en-US" smtClean="0"/>
+              <a:rPr lang="en-US"/>
               <a:t>Click to edit Master text styles</a:t>
             </a:r>
           </a:p>
           <a:p>
             <a:pPr lvl="1"/>
             <a:r>
-              <a:rPr lang="en-US" smtClean="0"/>
+              <a:rPr lang="en-US"/>
               <a:t>Second level</a:t>
             </a:r>
           </a:p>
           <a:p>
             <a:pPr lvl="2"/>
             <a:r>
-              <a:rPr lang="en-US" smtClean="0"/>
+              <a:rPr lang="en-US"/>
               <a:t>Third level</a:t>
             </a:r>
           </a:p>
           <a:p>
             <a:pPr lvl="3"/>
             <a:r>
-              <a:rPr lang="en-US" smtClean="0"/>
+              <a:rPr lang="en-US"/>
               <a:t>Fourth level</a:t>
             </a:r>
           </a:p>
           <a:p>
             <a:pPr lvl="4"/>
             <a:r>
-              <a:rPr lang="en-US" smtClean="0"/>
+              <a:rPr lang="en-US"/>
               <a:t>Fifth level</a:t>
             </a:r>
-            <a:endParaRPr lang="en-US"/>
           </a:p>
         </p:txBody>
       </p:sp>
@@ -1774,7 +1777,7 @@
           <a:p>
             <a:fld id="{5BCAD085-E8A6-8845-BD4E-CB4CCA059FC4}" type="datetimeFigureOut">
               <a:rPr lang="en-US" smtClean="0"/>
-              <a:t>1/27/13</a:t>
+              <a:t>3/24/26</a:t>
             </a:fld>
             <a:endParaRPr lang="en-US"/>
           </a:p>
@@ -1868,10 +1871,9 @@
           <a:lstStyle/>
           <a:p>
             <a:r>
-              <a:rPr lang="en-US" smtClean="0"/>
+              <a:rPr lang="en-US"/>
               <a:t>Click to edit Master title style</a:t>
             </a:r>
-            <a:endParaRPr lang="en-US"/>
           </a:p>
         </p:txBody>
       </p:sp>
@@ -1892,7 +1894,7 @@
           <a:p>
             <a:fld id="{5BCAD085-E8A6-8845-BD4E-CB4CCA059FC4}" type="datetimeFigureOut">
               <a:rPr lang="en-US" smtClean="0"/>
-              <a:t>1/27/13</a:t>
+              <a:t>3/24/26</a:t>
             </a:fld>
             <a:endParaRPr lang="en-US"/>
           </a:p>
@@ -1987,7 +1989,7 @@
           <a:p>
             <a:fld id="{5BCAD085-E8A6-8845-BD4E-CB4CCA059FC4}" type="datetimeFigureOut">
               <a:rPr lang="en-US" smtClean="0"/>
-              <a:t>1/27/13</a:t>
+              <a:t>3/24/26</a:t>
             </a:fld>
             <a:endParaRPr lang="en-US"/>
           </a:p>
@@ -2090,10 +2092,9 @@
           </a:lstStyle>
           <a:p>
             <a:r>
-              <a:rPr lang="en-US" smtClean="0"/>
+              <a:rPr lang="en-US"/>
               <a:t>Click to edit Master title style</a:t>
             </a:r>
-            <a:endParaRPr lang="en-US"/>
           </a:p>
         </p:txBody>
       </p:sp>
@@ -2147,38 +2148,37 @@
           <a:p>
             <a:pPr lvl="0"/>
             <a:r>
-              <a:rPr lang="en-US" smtClean="0"/>
+              <a:rPr lang="en-US"/>
               <a:t>Click to edit Master text styles</a:t>
             </a:r>
           </a:p>
           <a:p>
             <a:pPr lvl="1"/>
             <a:r>
-              <a:rPr lang="en-US" smtClean="0"/>
+              <a:rPr lang="en-US"/>
               <a:t>Second level</a:t>
             </a:r>
           </a:p>
           <a:p>
             <a:pPr lvl="2"/>
             <a:r>
-              <a:rPr lang="en-US" smtClean="0"/>
+              <a:rPr lang="en-US"/>
               <a:t>Third level</a:t>
             </a:r>
           </a:p>
           <a:p>
             <a:pPr lvl="3"/>
             <a:r>
-              <a:rPr lang="en-US" smtClean="0"/>
+              <a:rPr lang="en-US"/>
               <a:t>Fourth level</a:t>
             </a:r>
           </a:p>
           <a:p>
             <a:pPr lvl="4"/>
             <a:r>
-              <a:rPr lang="en-US" smtClean="0"/>
+              <a:rPr lang="en-US"/>
               <a:t>Fifth level</a:t>
             </a:r>
-            <a:endParaRPr lang="en-US"/>
           </a:p>
         </p:txBody>
       </p:sp>
@@ -2241,7 +2241,7 @@
           <a:p>
             <a:pPr lvl="0"/>
             <a:r>
-              <a:rPr lang="en-US" smtClean="0"/>
+              <a:rPr lang="en-US"/>
               <a:t>Click to edit Master text styles</a:t>
             </a:r>
           </a:p>
@@ -2264,7 +2264,7 @@
           <a:p>
             <a:fld id="{5BCAD085-E8A6-8845-BD4E-CB4CCA059FC4}" type="datetimeFigureOut">
               <a:rPr lang="en-US" smtClean="0"/>
-              <a:t>1/27/13</a:t>
+              <a:t>3/24/26</a:t>
             </a:fld>
             <a:endParaRPr lang="en-US"/>
           </a:p>
@@ -2367,10 +2367,9 @@
           </a:lstStyle>
           <a:p>
             <a:r>
-              <a:rPr lang="en-US" smtClean="0"/>
+              <a:rPr lang="en-US"/>
               <a:t>Click to edit Master title style</a:t>
             </a:r>
-            <a:endParaRPr lang="en-US"/>
           </a:p>
         </p:txBody>
       </p:sp>
@@ -2494,7 +2493,7 @@
           <a:p>
             <a:pPr lvl="0"/>
             <a:r>
-              <a:rPr lang="en-US" smtClean="0"/>
+              <a:rPr lang="en-US"/>
               <a:t>Click to edit Master text styles</a:t>
             </a:r>
           </a:p>
@@ -2517,7 +2516,7 @@
           <a:p>
             <a:fld id="{5BCAD085-E8A6-8845-BD4E-CB4CCA059FC4}" type="datetimeFigureOut">
               <a:rPr lang="en-US" smtClean="0"/>
-              <a:t>1/27/13</a:t>
+              <a:t>3/24/26</a:t>
             </a:fld>
             <a:endParaRPr lang="en-US"/>
           </a:p>
@@ -2626,10 +2625,9 @@
           <a:lstStyle/>
           <a:p>
             <a:r>
-              <a:rPr lang="en-US" smtClean="0"/>
+              <a:rPr lang="en-US"/>
               <a:t>Click to edit Master title style</a:t>
             </a:r>
-            <a:endParaRPr lang="en-US"/>
           </a:p>
         </p:txBody>
       </p:sp>
@@ -2660,38 +2658,37 @@
           <a:p>
             <a:pPr lvl="0"/>
             <a:r>
-              <a:rPr lang="en-US" smtClean="0"/>
+              <a:rPr lang="en-US"/>
               <a:t>Click to edit Master text styles</a:t>
             </a:r>
           </a:p>
           <a:p>
             <a:pPr lvl="1"/>
             <a:r>
-              <a:rPr lang="en-US" smtClean="0"/>
+              <a:rPr lang="en-US"/>
               <a:t>Second level</a:t>
             </a:r>
           </a:p>
           <a:p>
             <a:pPr lvl="2"/>
             <a:r>
-              <a:rPr lang="en-US" smtClean="0"/>
+              <a:rPr lang="en-US"/>
               <a:t>Third level</a:t>
             </a:r>
           </a:p>
           <a:p>
             <a:pPr lvl="3"/>
             <a:r>
-              <a:rPr lang="en-US" smtClean="0"/>
+              <a:rPr lang="en-US"/>
               <a:t>Fourth level</a:t>
             </a:r>
           </a:p>
           <a:p>
             <a:pPr lvl="4"/>
             <a:r>
-              <a:rPr lang="en-US" smtClean="0"/>
+              <a:rPr lang="en-US"/>
               <a:t>Fifth level</a:t>
             </a:r>
-            <a:endParaRPr lang="en-US"/>
           </a:p>
         </p:txBody>
       </p:sp>
@@ -2730,7 +2727,7 @@
           <a:p>
             <a:fld id="{5BCAD085-E8A6-8845-BD4E-CB4CCA059FC4}" type="datetimeFigureOut">
               <a:rPr lang="en-US" smtClean="0"/>
-              <a:t>1/27/13</a:t>
+              <a:t>3/24/26</a:t>
             </a:fld>
             <a:endParaRPr lang="en-US"/>
           </a:p>
@@ -3089,7 +3086,7 @@
 </file>
 
 <file path=ppt/slides/slide1.xml><?xml version="1.0" encoding="utf-8"?>
-<p:sld xmlns:a="http://schemas.openxmlformats.org/drawingml/2006/main" xmlns:p="http://schemas.openxmlformats.org/presentationml/2006/main" xmlns:r="http://schemas.openxmlformats.org/officeDocument/2006/relationships">
+<p:sld xmlns:a="http://schemas.openxmlformats.org/drawingml/2006/main" xmlns:r="http://schemas.openxmlformats.org/officeDocument/2006/relationships" xmlns:p="http://schemas.openxmlformats.org/presentationml/2006/main">
   <p:cSld>
     <p:bg>
       <p:bgPr>
@@ -3105,7 +3102,14 @@
         <p:cNvGrpSpPr/>
         <p:nvPr/>
       </p:nvGrpSpPr>
-      <p:grpSpPr/>
+      <p:grpSpPr>
+        <a:xfrm>
+          <a:off x="0" y="0"/>
+          <a:ext cx="0" cy="0"/>
+          <a:chOff x="0" y="0"/>
+          <a:chExt cx="0" cy="0"/>
+        </a:xfrm>
+      </p:grpSpPr>
       <p:sp>
         <p:nvSpPr>
           <p:cNvPr id="2" name="Rectangle 1"/>
@@ -3146,6 +3150,7 @@
           <a:lstStyle/>
           <a:p>
             <a:pPr algn="ctr"/>
+            <a:endParaRPr/>
           </a:p>
         </p:txBody>
       </p:sp>
@@ -3157,8 +3162,8 @@
         </p:nvSpPr>
         <p:spPr>
           <a:xfrm>
-            <a:off x="457200" y="2560320"/>
-            <a:ext cx="8229600" cy="1097280"/>
+            <a:off x="518650" y="3108960"/>
+            <a:ext cx="8106706" cy="769441"/>
           </a:xfrm>
           <a:prstGeom prst="rect">
             <a:avLst/>
@@ -3179,21 +3184,36 @@
               </a:defRPr>
             </a:pPr>
             <a:r>
-              <a:t>RJ2506 全局架构与任务拆解</a:t>
-            </a:r>
-          </a:p>
-        </p:txBody>
-      </p:sp>
-      <p:sp>
-        <p:nvSpPr>
-          <p:cNvPr id="4" name="TextBox 3"/>
+              <a:rPr lang="zh-CN" altLang="en-US" sz="4400" dirty="0">
+                <a:latin typeface="SimHei" panose="02010609060101010101" pitchFamily="49" charset="-122"/>
+                <a:ea typeface="SimHei" panose="02010609060101010101" pitchFamily="49" charset="-122"/>
+              </a:rPr>
+              <a:t>搬运机器人</a:t>
+            </a:r>
+            <a:r>
+              <a:rPr sz="4400" dirty="0" err="1">
+                <a:latin typeface="SimHei" panose="02010609060101010101" pitchFamily="49" charset="-122"/>
+                <a:ea typeface="SimHei" panose="02010609060101010101" pitchFamily="49" charset="-122"/>
+              </a:rPr>
+              <a:t>全局架构与任务拆解</a:t>
+            </a:r>
+            <a:endParaRPr sz="4400" dirty="0">
+              <a:latin typeface="SimHei" panose="02010609060101010101" pitchFamily="49" charset="-122"/>
+              <a:ea typeface="SimHei" panose="02010609060101010101" pitchFamily="49" charset="-122"/>
+            </a:endParaRPr>
+          </a:p>
+        </p:txBody>
+      </p:sp>
+      <p:sp>
+        <p:nvSpPr>
+          <p:cNvPr id="5" name="TextBox 4"/>
           <p:cNvSpPr txBox="1"/>
           <p:nvPr/>
         </p:nvSpPr>
         <p:spPr>
           <a:xfrm>
-            <a:off x="914400" y="3840480"/>
-            <a:ext cx="7315200" cy="914400"/>
+            <a:off x="4070099" y="5943600"/>
+            <a:ext cx="1003801" cy="338554"/>
           </a:xfrm>
           <a:prstGeom prst="rect">
             <a:avLst/>
@@ -3207,45 +3227,6 @@
           <a:lstStyle/>
           <a:p>
             <a:pPr algn="ctr">
-              <a:defRPr sz="2600">
-                <a:solidFill>
-                  <a:srgbClr val="C8DCFF"/>
-                </a:solidFill>
-              </a:defRPr>
-            </a:pPr>
-            <a:r>
-              <a:t>双臂轮式复合机器人系统方案 V3.0</a:t>
-            </a:r>
-            <a:br/>
-            <a:r>
-              <a:t>(新增顶层大脑节点与完整 8 段式管线)</a:t>
-            </a:r>
-          </a:p>
-        </p:txBody>
-      </p:sp>
-      <p:sp>
-        <p:nvSpPr>
-          <p:cNvPr id="5" name="TextBox 4"/>
-          <p:cNvSpPr txBox="1"/>
-          <p:nvPr/>
-        </p:nvSpPr>
-        <p:spPr>
-          <a:xfrm>
-            <a:off x="914400" y="5943600"/>
-            <a:ext cx="7315200" cy="457200"/>
-          </a:xfrm>
-          <a:prstGeom prst="rect">
-            <a:avLst/>
-          </a:prstGeom>
-          <a:noFill/>
-        </p:spPr>
-        <p:txBody>
-          <a:bodyPr wrap="none">
-            <a:spAutoFit/>
-          </a:bodyPr>
-          <a:lstStyle/>
-          <a:p>
-            <a:pPr algn="ctr">
               <a:defRPr sz="1600" b="1">
                 <a:solidFill>
                   <a:srgbClr val="333333"/>
@@ -3254,7 +3235,8 @@
               </a:defRPr>
             </a:pPr>
             <a:r>
-              <a:t>Project: Aloha / Date: 2026.03</a:t>
+              <a:rPr dirty="0"/>
+              <a:t>2026.03</a:t>
             </a:r>
           </a:p>
         </p:txBody>
@@ -3268,7 +3250,7 @@
 </file>
 
 <file path=ppt/slides/slide10.xml><?xml version="1.0" encoding="utf-8"?>
-<p:sld xmlns:a="http://schemas.openxmlformats.org/drawingml/2006/main" xmlns:p="http://schemas.openxmlformats.org/presentationml/2006/main" xmlns:r="http://schemas.openxmlformats.org/officeDocument/2006/relationships">
+<p:sld xmlns:a="http://schemas.openxmlformats.org/drawingml/2006/main" xmlns:r="http://schemas.openxmlformats.org/officeDocument/2006/relationships" xmlns:p="http://schemas.openxmlformats.org/presentationml/2006/main">
   <p:cSld>
     <p:bg>
       <p:bgPr>
@@ -3284,7 +3266,14 @@
         <p:cNvGrpSpPr/>
         <p:nvPr/>
       </p:nvGrpSpPr>
-      <p:grpSpPr/>
+      <p:grpSpPr>
+        <a:xfrm>
+          <a:off x="0" y="0"/>
+          <a:ext cx="0" cy="0"/>
+          <a:chOff x="0" y="0"/>
+          <a:chExt cx="0" cy="0"/>
+        </a:xfrm>
+      </p:grpSpPr>
       <p:sp>
         <p:nvSpPr>
           <p:cNvPr id="2" name="Title 1"/>
@@ -3297,7 +3286,9 @@
         </p:nvSpPr>
         <p:spPr/>
         <p:txBody>
-          <a:bodyPr/>
+          <a:bodyPr>
+            <a:normAutofit/>
+          </a:bodyPr>
           <a:lstStyle/>
           <a:p>
             <a:pPr>
@@ -3309,7 +3300,12 @@
               </a:defRPr>
             </a:pPr>
             <a:r>
-              <a:t>系统开发与任务拆解: Phase 2</a:t>
+              <a:rPr sz="4000" dirty="0" err="1"/>
+              <a:t>系统开发与任务拆解</a:t>
+            </a:r>
+            <a:r>
+              <a:rPr sz="4000" dirty="0"/>
+              <a:t>: Phase 0</a:t>
             </a:r>
           </a:p>
         </p:txBody>
@@ -3354,6 +3350,7 @@
           <a:lstStyle/>
           <a:p>
             <a:pPr algn="ctr"/>
+            <a:endParaRPr/>
           </a:p>
         </p:txBody>
       </p:sp>
@@ -3414,7 +3411,9 @@
             <a:spAutoFit/>
           </a:bodyPr>
           <a:lstStyle/>
-          <a:p/>
+          <a:p>
+            <a:endParaRPr/>
+          </a:p>
           <a:p>
             <a:pPr>
               <a:lnSpc>
@@ -3431,7 +3430,7 @@
               </a:defRPr>
             </a:pPr>
             <a:r>
-              <a:t>Phase 2: AI 训练与全链路联调</a:t>
+              <a:t>Phase 0: 基础设施与物理真值采集</a:t>
             </a:r>
           </a:p>
           <a:p>
@@ -3450,7 +3449,7 @@
               </a:defRPr>
             </a:pPr>
             <a:r>
-              <a:t>时间: 4周</a:t>
+              <a:t>时间: 2周</a:t>
             </a:r>
           </a:p>
           <a:p>
@@ -3461,7 +3460,7 @@
               <a:spcBef>
                 <a:spcPts val="500"/>
               </a:spcBef>
-              <a:defRPr sz="1900" b="1">
+              <a:defRPr sz="1900" b="0">
                 <a:solidFill>
                   <a:srgbClr val="333333"/>
                 </a:solidFill>
@@ -3469,37 +3468,18 @@
               </a:defRPr>
             </a:pPr>
             <a:r>
-              <a:t>核心任务列表:</a:t>
-            </a:r>
-          </a:p>
-          <a:p>
-            <a:pPr lvl="2">
+              <a:t>任务: ROS 2环境安装、相机外参标定、探针制作与Ground Truth采集、特征图金标准采集</a:t>
+            </a:r>
+          </a:p>
+          <a:p>
+            <a:pPr lvl="1">
               <a:lnSpc>
                 <a:spcPct val="110000"/>
               </a:lnSpc>
               <a:spcBef>
                 <a:spcPts val="500"/>
               </a:spcBef>
-              <a:defRPr sz="1600" b="1">
-                <a:solidFill>
-                  <a:srgbClr val="003366"/>
-                </a:solidFill>
-                <a:latin typeface="Microsoft YaHei"/>
-              </a:defRPr>
-            </a:pPr>
-            <a:r>
-              <a:t>[2.1] 数据采集与 Sim2Real</a:t>
-            </a:r>
-          </a:p>
-          <a:p>
-            <a:pPr lvl="3">
-              <a:lnSpc>
-                <a:spcPct val="110000"/>
-              </a:lnSpc>
-              <a:spcBef>
-                <a:spcPts val="500"/>
-              </a:spcBef>
-              <a:defRPr sz="1300" b="0">
+              <a:defRPr sz="1900" b="0">
                 <a:solidFill>
                   <a:srgbClr val="333333"/>
                 </a:solidFill>
@@ -3507,121 +3487,7 @@
               </a:defRPr>
             </a:pPr>
             <a:r>
-              <a:t>• 录制 50 条遥操作真机数据，导入 IsaacLab</a:t>
-            </a:r>
-          </a:p>
-          <a:p>
-            <a:pPr lvl="3">
-              <a:lnSpc>
-                <a:spcPct val="110000"/>
-              </a:lnSpc>
-              <a:spcBef>
-                <a:spcPts val="500"/>
-              </a:spcBef>
-              <a:defRPr sz="1300" b="0">
-                <a:solidFill>
-                  <a:srgbClr val="333333"/>
-                </a:solidFill>
-                <a:latin typeface="Microsoft YaHei"/>
-              </a:defRPr>
-            </a:pPr>
-            <a:r>
-              <a:t>• 生成 10000 条带各种光照变异的合成数据进行扩充</a:t>
-            </a:r>
-          </a:p>
-          <a:p>
-            <a:pPr lvl="2">
-              <a:lnSpc>
-                <a:spcPct val="110000"/>
-              </a:lnSpc>
-              <a:spcBef>
-                <a:spcPts val="500"/>
-              </a:spcBef>
-              <a:defRPr sz="1600" b="1">
-                <a:solidFill>
-                  <a:srgbClr val="003366"/>
-                </a:solidFill>
-                <a:latin typeface="Microsoft YaHei"/>
-              </a:defRPr>
-            </a:pPr>
-            <a:r>
-              <a:t>[2.2] DP 模型训练与 TensorRT 部署</a:t>
-            </a:r>
-          </a:p>
-          <a:p>
-            <a:pPr lvl="3">
-              <a:lnSpc>
-                <a:spcPct val="110000"/>
-              </a:lnSpc>
-              <a:spcBef>
-                <a:spcPts val="500"/>
-              </a:spcBef>
-              <a:defRPr sz="1300" b="0">
-                <a:solidFill>
-                  <a:srgbClr val="333333"/>
-                </a:solidFill>
-                <a:latin typeface="Microsoft YaHei"/>
-              </a:defRPr>
-            </a:pPr>
-            <a:r>
-              <a:t>• 在 H100 集群上完成 Diffusion Policy 训练</a:t>
-            </a:r>
-          </a:p>
-          <a:p>
-            <a:pPr lvl="3">
-              <a:lnSpc>
-                <a:spcPct val="110000"/>
-              </a:lnSpc>
-              <a:spcBef>
-                <a:spcPts val="500"/>
-              </a:spcBef>
-              <a:defRPr sz="1300" b="0">
-                <a:solidFill>
-                  <a:srgbClr val="333333"/>
-                </a:solidFill>
-                <a:latin typeface="Microsoft YaHei"/>
-              </a:defRPr>
-            </a:pPr>
-            <a:r>
-              <a:t>• Orin 边缘端 TensorRT 部署，保证推理延迟 &lt; 30ms</a:t>
-            </a:r>
-          </a:p>
-          <a:p>
-            <a:pPr lvl="2">
-              <a:lnSpc>
-                <a:spcPct val="110000"/>
-              </a:lnSpc>
-              <a:spcBef>
-                <a:spcPts val="500"/>
-              </a:spcBef>
-              <a:defRPr sz="1600" b="1">
-                <a:solidFill>
-                  <a:srgbClr val="003366"/>
-                </a:solidFill>
-                <a:latin typeface="Microsoft YaHei"/>
-              </a:defRPr>
-            </a:pPr>
-            <a:r>
-              <a:t>[2.3] 大脑节点 (Brain Node) 实车串联</a:t>
-            </a:r>
-          </a:p>
-          <a:p>
-            <a:pPr lvl="3">
-              <a:lnSpc>
-                <a:spcPct val="110000"/>
-              </a:lnSpc>
-              <a:spcBef>
-                <a:spcPts val="500"/>
-              </a:spcBef>
-              <a:defRPr sz="1300" b="0">
-                <a:solidFill>
-                  <a:srgbClr val="333333"/>
-                </a:solidFill>
-                <a:latin typeface="Microsoft YaHei"/>
-              </a:defRPr>
-            </a:pPr>
-            <a:r>
-              <a:t>• 将 Nav2 -&gt; ACT -&gt; Feature Memory -&gt; IBVS -&gt; Touch-down 管线在真机完全打通</a:t>
+              <a:t>指标: 软时间插值抖动 &lt; 10ms, 重投影误差 RMSE &lt; 1.5像素</a:t>
             </a:r>
           </a:p>
         </p:txBody>
@@ -3635,7 +3501,7 @@
 </file>
 
 <file path=ppt/slides/slide11.xml><?xml version="1.0" encoding="utf-8"?>
-<p:sld xmlns:a="http://schemas.openxmlformats.org/drawingml/2006/main" xmlns:p="http://schemas.openxmlformats.org/presentationml/2006/main" xmlns:r="http://schemas.openxmlformats.org/officeDocument/2006/relationships">
+<p:sld xmlns:a="http://schemas.openxmlformats.org/drawingml/2006/main" xmlns:r="http://schemas.openxmlformats.org/officeDocument/2006/relationships" xmlns:p="http://schemas.openxmlformats.org/presentationml/2006/main">
   <p:cSld>
     <p:bg>
       <p:bgPr>
@@ -3651,120 +3517,14 @@
         <p:cNvGrpSpPr/>
         <p:nvPr/>
       </p:nvGrpSpPr>
-      <p:grpSpPr/>
-      <p:sp>
-        <p:nvSpPr>
-          <p:cNvPr id="2" name="Rectangle 1"/>
-          <p:cNvSpPr/>
-          <p:nvPr/>
-        </p:nvSpPr>
-        <p:spPr>
-          <a:xfrm>
-            <a:off x="0" y="0"/>
-            <a:ext cx="9144000" cy="6858000"/>
-          </a:xfrm>
-          <a:prstGeom prst="rect">
-            <a:avLst/>
-          </a:prstGeom>
-          <a:solidFill>
-            <a:srgbClr val="003366"/>
-          </a:solidFill>
-        </p:spPr>
-        <p:style>
-          <a:lnRef idx="1">
-            <a:schemeClr val="accent1"/>
-          </a:lnRef>
-          <a:fillRef idx="3">
-            <a:schemeClr val="accent1"/>
-          </a:fillRef>
-          <a:effectRef idx="2">
-            <a:schemeClr val="accent1"/>
-          </a:effectRef>
-          <a:fontRef idx="minor">
-            <a:schemeClr val="lt1"/>
-          </a:fontRef>
-        </p:style>
-        <p:txBody>
-          <a:bodyPr rtlCol="0" anchor="ctr"/>
-          <a:lstStyle/>
-          <a:p>
-            <a:pPr algn="ctr"/>
-          </a:p>
-        </p:txBody>
-      </p:sp>
-      <p:sp>
-        <p:nvSpPr>
-          <p:cNvPr id="3" name="TextBox 2"/>
-          <p:cNvSpPr txBox="1"/>
-          <p:nvPr/>
-        </p:nvSpPr>
-        <p:spPr>
-          <a:xfrm>
-            <a:off x="914400" y="2743200"/>
-            <a:ext cx="7315200" cy="1828800"/>
-          </a:xfrm>
-          <a:prstGeom prst="rect">
-            <a:avLst/>
-          </a:prstGeom>
-          <a:noFill/>
-        </p:spPr>
-        <p:txBody>
-          <a:bodyPr wrap="none">
-            <a:spAutoFit/>
-          </a:bodyPr>
-          <a:lstStyle/>
-          <a:p>
-            <a:pPr algn="ctr">
-              <a:defRPr sz="6400" b="1">
-                <a:solidFill>
-                  <a:srgbClr val="FFFFFF"/>
-                </a:solidFill>
-              </a:defRPr>
-            </a:pPr>
-            <a:r>
-              <a:t>THANKS</a:t>
-            </a:r>
-          </a:p>
-          <a:p>
-            <a:pPr algn="ctr">
-              <a:defRPr sz="2600">
-                <a:solidFill>
-                  <a:srgbClr val="C8DCFF"/>
-                </a:solidFill>
-              </a:defRPr>
-            </a:pPr>
-            <a:r>
-              <a:t>只有底层基石 100% 夯实，AI 端到端才有意义。</a:t>
-            </a:r>
-          </a:p>
-        </p:txBody>
-      </p:sp>
-    </p:spTree>
-  </p:cSld>
-  <p:clrMapOvr>
-    <a:masterClrMapping/>
-  </p:clrMapOvr>
-</p:sld>
-</file>
-
-<file path=ppt/slides/slide2.xml><?xml version="1.0" encoding="utf-8"?>
-<p:sld xmlns:a="http://schemas.openxmlformats.org/drawingml/2006/main" xmlns:p="http://schemas.openxmlformats.org/presentationml/2006/main" xmlns:r="http://schemas.openxmlformats.org/officeDocument/2006/relationships">
-  <p:cSld>
-    <p:bg>
-      <p:bgPr>
-        <a:solidFill>
-          <a:srgbClr val="F5F7FA"/>
-        </a:solidFill>
-        <a:effectLst/>
-      </p:bgPr>
-    </p:bg>
-    <p:spTree>
-      <p:nvGrpSpPr>
-        <p:cNvPr id="1" name=""/>
-        <p:cNvGrpSpPr/>
-        <p:nvPr/>
-      </p:nvGrpSpPr>
-      <p:grpSpPr/>
+      <p:grpSpPr>
+        <a:xfrm>
+          <a:off x="0" y="0"/>
+          <a:ext cx="0" cy="0"/>
+          <a:chOff x="0" y="0"/>
+          <a:chExt cx="0" cy="0"/>
+        </a:xfrm>
+      </p:grpSpPr>
       <p:sp>
         <p:nvSpPr>
           <p:cNvPr id="2" name="Title 1"/>
@@ -3777,7 +3537,9 @@
         </p:nvSpPr>
         <p:spPr/>
         <p:txBody>
-          <a:bodyPr/>
+          <a:bodyPr>
+            <a:normAutofit/>
+          </a:bodyPr>
           <a:lstStyle/>
           <a:p>
             <a:pPr>
@@ -3789,7 +3551,12 @@
               </a:defRPr>
             </a:pPr>
             <a:r>
-              <a:t>整体任务描述 (The Mission)</a:t>
+              <a:rPr sz="4000" dirty="0" err="1"/>
+              <a:t>系统开发与任务拆解</a:t>
+            </a:r>
+            <a:r>
+              <a:rPr sz="4000" dirty="0"/>
+              <a:t>: Phase 1</a:t>
             </a:r>
           </a:p>
         </p:txBody>
@@ -3834,6 +3601,7 @@
           <a:lstStyle/>
           <a:p>
             <a:pPr algn="ctr"/>
+            <a:endParaRPr/>
           </a:p>
         </p:txBody>
       </p:sp>
@@ -3882,7 +3650,7 @@
         <p:spPr>
           <a:xfrm>
             <a:off x="457200" y="1371600"/>
-            <a:ext cx="8229600" cy="1097280"/>
+            <a:ext cx="8229600" cy="3568221"/>
           </a:xfrm>
           <a:prstGeom prst="rect">
             <a:avLst/>
@@ -3890,161 +3658,262 @@
           <a:noFill/>
         </p:spPr>
         <p:txBody>
-          <a:bodyPr wrap="none">
+          <a:bodyPr wrap="square">
             <a:spAutoFit/>
           </a:bodyPr>
           <a:lstStyle/>
           <a:p>
+            <a:endParaRPr dirty="0"/>
+          </a:p>
+          <a:p>
             <a:pPr>
-              <a:defRPr sz="2200">
+              <a:lnSpc>
+                <a:spcPct val="110000"/>
+              </a:lnSpc>
+              <a:spcBef>
+                <a:spcPts val="500"/>
+              </a:spcBef>
+              <a:defRPr sz="2200" b="1">
+                <a:solidFill>
+                  <a:srgbClr val="0066CC"/>
+                </a:solidFill>
+                <a:latin typeface="Microsoft YaHei"/>
+              </a:defRPr>
+            </a:pPr>
+            <a:r>
+              <a:rPr dirty="0"/>
+              <a:t>Phase 1: </a:t>
+            </a:r>
+            <a:r>
+              <a:rPr dirty="0" err="1"/>
+              <a:t>核心硬骨头算法模块攻坚</a:t>
+            </a:r>
+            <a:r>
+              <a:rPr dirty="0"/>
+              <a:t> (</a:t>
+            </a:r>
+            <a:r>
+              <a:rPr dirty="0" err="1"/>
+              <a:t>研发重点</a:t>
+            </a:r>
+            <a:r>
+              <a:rPr dirty="0"/>
+              <a:t>)</a:t>
+            </a:r>
+          </a:p>
+          <a:p>
+            <a:pPr lvl="1">
+              <a:lnSpc>
+                <a:spcPct val="110000"/>
+              </a:lnSpc>
+              <a:spcBef>
+                <a:spcPts val="500"/>
+              </a:spcBef>
+              <a:defRPr sz="1900" b="1">
+                <a:solidFill>
+                  <a:srgbClr val="FF6600"/>
+                </a:solidFill>
+                <a:latin typeface="Microsoft YaHei"/>
+              </a:defRPr>
+            </a:pPr>
+            <a:r>
+              <a:rPr dirty="0" err="1"/>
+              <a:t>时间</a:t>
+            </a:r>
+            <a:r>
+              <a:rPr dirty="0"/>
+              <a:t>: </a:t>
+            </a:r>
+            <a:r>
+              <a:rPr lang="en-US" altLang="zh-CN" dirty="0"/>
+              <a:t>5</a:t>
+            </a:r>
+            <a:r>
+              <a:rPr dirty="0"/>
+              <a:t>周</a:t>
+            </a:r>
+          </a:p>
+          <a:p>
+            <a:pPr lvl="1">
+              <a:lnSpc>
+                <a:spcPct val="110000"/>
+              </a:lnSpc>
+              <a:spcBef>
+                <a:spcPts val="500"/>
+              </a:spcBef>
+              <a:defRPr sz="1900" b="0">
                 <a:solidFill>
                   <a:srgbClr val="333333"/>
                 </a:solidFill>
-              </a:defRPr>
-            </a:pPr>
-            <a:r>
-              <a:t>RJ2506 是一款双臂轮式复合机器人，旨在解决工厂半结构化环境下的高精度柔性装配、堆垛与搬运问题。</a:t>
-            </a:r>
-          </a:p>
-        </p:txBody>
-      </p:sp>
-      <p:sp>
-        <p:nvSpPr>
-          <p:cNvPr id="6" name="Rounded Rectangle 5"/>
-          <p:cNvSpPr/>
-          <p:nvPr/>
-        </p:nvSpPr>
-        <p:spPr>
-          <a:xfrm>
-            <a:off x="457200" y="2560320"/>
-            <a:ext cx="3840480" cy="3474720"/>
-          </a:xfrm>
-          <a:prstGeom prst="roundRect">
-            <a:avLst/>
-          </a:prstGeom>
-          <a:solidFill>
-            <a:srgbClr val="FFFFFF"/>
-          </a:solidFill>
-          <a:ln>
-            <a:solidFill>
-              <a:srgbClr val="0066CC"/>
-            </a:solidFill>
-          </a:ln>
-        </p:spPr>
-        <p:style>
-          <a:lnRef idx="1">
-            <a:schemeClr val="accent1"/>
-          </a:lnRef>
-          <a:fillRef idx="3">
-            <a:schemeClr val="accent1"/>
-          </a:fillRef>
-          <a:effectRef idx="2">
-            <a:schemeClr val="accent1"/>
-          </a:effectRef>
-          <a:fontRef idx="minor">
-            <a:schemeClr val="lt1"/>
-          </a:fontRef>
-        </p:style>
-        <p:txBody>
-          <a:bodyPr rtlCol="0" anchor="ctr" wrap="square"/>
-          <a:lstStyle/>
-          <a:p>
-            <a:pPr algn="ctr">
-              <a:defRPr b="1" sz="2000">
-                <a:solidFill>
-                  <a:srgbClr val="0066CC"/>
-                </a:solidFill>
-              </a:defRPr>
-            </a:pPr>
-            <a:r>
-              <a:t>场景 1：大框码料</a:t>
-            </a:r>
-          </a:p>
-          <a:p>
-            <a:pPr>
-              <a:defRPr sz="1400">
+                <a:latin typeface="Microsoft YaHei"/>
+              </a:defRPr>
+            </a:pPr>
+            <a:r>
+              <a:rPr dirty="0" err="1"/>
+              <a:t>任务</a:t>
+            </a:r>
+            <a:r>
+              <a:rPr dirty="0"/>
+              <a:t>:</a:t>
+            </a:r>
+          </a:p>
+          <a:p>
+            <a:pPr lvl="2">
+              <a:lnSpc>
+                <a:spcPct val="110000"/>
+              </a:lnSpc>
+              <a:spcBef>
+                <a:spcPts val="500"/>
+              </a:spcBef>
+              <a:defRPr sz="1600" b="0">
                 <a:solidFill>
                   <a:srgbClr val="333333"/>
                 </a:solidFill>
-              </a:defRPr>
-            </a:pPr>
-            <a:r>
-              <a:t>• 目标: 双手从下料平台同时抓取大料片，搬运并精准码放到大框中</a:t>
-            </a:r>
-            <a:br/>
-            <a:r>
-              <a:t>• 难点: 大框边缘限制，放置必须极度平稳精准，杜绝磕碰</a:t>
-            </a:r>
-          </a:p>
-        </p:txBody>
-      </p:sp>
-      <p:sp>
-        <p:nvSpPr>
-          <p:cNvPr id="7" name="Rounded Rectangle 6"/>
-          <p:cNvSpPr/>
-          <p:nvPr/>
-        </p:nvSpPr>
-        <p:spPr>
-          <a:xfrm>
-            <a:off x="4846320" y="2560320"/>
-            <a:ext cx="3840480" cy="3474720"/>
-          </a:xfrm>
-          <a:prstGeom prst="roundRect">
-            <a:avLst/>
-          </a:prstGeom>
-          <a:solidFill>
-            <a:srgbClr val="FFFFFF"/>
-          </a:solidFill>
-          <a:ln>
-            <a:solidFill>
-              <a:srgbClr val="FF6600"/>
-            </a:solidFill>
-          </a:ln>
-        </p:spPr>
-        <p:style>
-          <a:lnRef idx="1">
-            <a:schemeClr val="accent1"/>
-          </a:lnRef>
-          <a:fillRef idx="3">
-            <a:schemeClr val="accent1"/>
-          </a:fillRef>
-          <a:effectRef idx="2">
-            <a:schemeClr val="accent1"/>
-          </a:effectRef>
-          <a:fontRef idx="minor">
-            <a:schemeClr val="lt1"/>
-          </a:fontRef>
-        </p:style>
-        <p:txBody>
-          <a:bodyPr rtlCol="0" anchor="ctr" wrap="square"/>
-          <a:lstStyle/>
-          <a:p>
-            <a:pPr algn="ctr">
-              <a:defRPr b="1" sz="2000">
-                <a:solidFill>
-                  <a:srgbClr val="FF6600"/>
-                </a:solidFill>
-              </a:defRPr>
-            </a:pPr>
-            <a:r>
-              <a:t>场景 2：小框换框与码垛</a:t>
-            </a:r>
-          </a:p>
-          <a:p>
-            <a:pPr>
-              <a:defRPr sz="1400">
+                <a:latin typeface="Microsoft YaHei"/>
+              </a:defRPr>
+            </a:pPr>
+            <a:r>
+              <a:rPr dirty="0"/>
+              <a:t>• </a:t>
+            </a:r>
+            <a:r>
+              <a:rPr dirty="0" err="1"/>
+              <a:t>双臂全身协调控制</a:t>
+            </a:r>
+            <a:r>
+              <a:rPr dirty="0"/>
+              <a:t>(WBC)</a:t>
+            </a:r>
+          </a:p>
+          <a:p>
+            <a:pPr lvl="2">
+              <a:lnSpc>
+                <a:spcPct val="110000"/>
+              </a:lnSpc>
+              <a:spcBef>
+                <a:spcPts val="500"/>
+              </a:spcBef>
+              <a:defRPr sz="1600" b="0">
                 <a:solidFill>
                   <a:srgbClr val="333333"/>
                 </a:solidFill>
-              </a:defRPr>
-            </a:pPr>
-            <a:r>
-              <a:t>• 目标: 推动空框替换满框，并将满框双手搬运至中转站进行高精度码垛</a:t>
-            </a:r>
-            <a:br/>
-            <a:r>
-              <a:t>• 难点: 视线完全遮挡，码垛极易重心偏移倒塌，需抗盲插和倾斜修正</a:t>
-            </a:r>
+                <a:latin typeface="Microsoft YaHei"/>
+              </a:defRPr>
+            </a:pPr>
+            <a:r>
+              <a:rPr dirty="0"/>
+              <a:t>• </a:t>
+            </a:r>
+            <a:r>
+              <a:rPr dirty="0" err="1"/>
+              <a:t>顶层状态机</a:t>
+            </a:r>
+            <a:endParaRPr dirty="0"/>
+          </a:p>
+          <a:p>
+            <a:pPr lvl="2">
+              <a:lnSpc>
+                <a:spcPct val="110000"/>
+              </a:lnSpc>
+              <a:spcBef>
+                <a:spcPts val="500"/>
+              </a:spcBef>
+              <a:defRPr sz="1600" b="0">
+                <a:solidFill>
+                  <a:srgbClr val="333333"/>
+                </a:solidFill>
+                <a:latin typeface="Microsoft YaHei"/>
+              </a:defRPr>
+            </a:pPr>
+            <a:r>
+              <a:rPr dirty="0"/>
+              <a:t>• </a:t>
+            </a:r>
+            <a:r>
+              <a:rPr dirty="0" err="1"/>
+              <a:t>双目特征提取</a:t>
+            </a:r>
+            <a:endParaRPr dirty="0"/>
+          </a:p>
+          <a:p>
+            <a:pPr lvl="2">
+              <a:lnSpc>
+                <a:spcPct val="110000"/>
+              </a:lnSpc>
+              <a:spcBef>
+                <a:spcPts val="500"/>
+              </a:spcBef>
+              <a:defRPr sz="1600" b="0">
+                <a:solidFill>
+                  <a:srgbClr val="333333"/>
+                </a:solidFill>
+                <a:latin typeface="Microsoft YaHei"/>
+              </a:defRPr>
+            </a:pPr>
+            <a:r>
+              <a:rPr dirty="0"/>
+              <a:t>• </a:t>
+            </a:r>
+            <a:r>
+              <a:rPr dirty="0" err="1"/>
+              <a:t>虚拟IBVS视觉伺服</a:t>
+            </a:r>
+            <a:endParaRPr lang="en-US" dirty="0"/>
+          </a:p>
+          <a:p>
+            <a:pPr lvl="2">
+              <a:lnSpc>
+                <a:spcPct val="110000"/>
+              </a:lnSpc>
+              <a:spcBef>
+                <a:spcPts val="500"/>
+              </a:spcBef>
+              <a:defRPr sz="1600" b="0">
+                <a:solidFill>
+                  <a:srgbClr val="333333"/>
+                </a:solidFill>
+                <a:latin typeface="Microsoft YaHei"/>
+              </a:defRPr>
+            </a:pPr>
+            <a:r>
+              <a:rPr lang="en-US" altLang="zh-CN" dirty="0">
+                <a:latin typeface="Microsoft YaHei" panose="020B0503020204020204" pitchFamily="34" charset="-122"/>
+                <a:ea typeface="Microsoft YaHei" panose="020B0503020204020204" pitchFamily="34" charset="-122"/>
+              </a:rPr>
+              <a:t>• ACT</a:t>
+            </a:r>
+            <a:r>
+              <a:rPr lang="zh-CN" altLang="en-US" dirty="0">
+                <a:latin typeface="Microsoft YaHei" panose="020B0503020204020204" pitchFamily="34" charset="-122"/>
+                <a:ea typeface="Microsoft YaHei" panose="020B0503020204020204" pitchFamily="34" charset="-122"/>
+              </a:rPr>
+              <a:t>物品抓取放置算法</a:t>
+            </a:r>
+          </a:p>
+          <a:p>
+            <a:pPr lvl="2">
+              <a:lnSpc>
+                <a:spcPct val="110000"/>
+              </a:lnSpc>
+              <a:spcBef>
+                <a:spcPts val="500"/>
+              </a:spcBef>
+              <a:defRPr sz="1600" b="0">
+                <a:solidFill>
+                  <a:srgbClr val="333333"/>
+                </a:solidFill>
+                <a:latin typeface="Microsoft YaHei"/>
+              </a:defRPr>
+            </a:pPr>
+            <a:r>
+              <a:rPr dirty="0"/>
+              <a:t>• C++</a:t>
+            </a:r>
+            <a:r>
+              <a:rPr dirty="0" err="1"/>
+              <a:t>守护进程、阻抗控制</a:t>
+            </a:r>
+            <a:endParaRPr dirty="0"/>
           </a:p>
         </p:txBody>
       </p:sp>
@@ -4056,8 +3925,8 @@
 </p:sld>
 </file>
 
-<file path=ppt/slides/slide3.xml><?xml version="1.0" encoding="utf-8"?>
-<p:sld xmlns:a="http://schemas.openxmlformats.org/drawingml/2006/main" xmlns:p="http://schemas.openxmlformats.org/presentationml/2006/main" xmlns:r="http://schemas.openxmlformats.org/officeDocument/2006/relationships">
+<file path=ppt/slides/slide12.xml><?xml version="1.0" encoding="utf-8"?>
+<p:sld xmlns:a="http://schemas.openxmlformats.org/drawingml/2006/main" xmlns:r="http://schemas.openxmlformats.org/officeDocument/2006/relationships" xmlns:p="http://schemas.openxmlformats.org/presentationml/2006/main">
   <p:cSld>
     <p:bg>
       <p:bgPr>
@@ -4073,7 +3942,14 @@
         <p:cNvGrpSpPr/>
         <p:nvPr/>
       </p:nvGrpSpPr>
-      <p:grpSpPr/>
+      <p:grpSpPr>
+        <a:xfrm>
+          <a:off x="0" y="0"/>
+          <a:ext cx="0" cy="0"/>
+          <a:chOff x="0" y="0"/>
+          <a:chExt cx="0" cy="0"/>
+        </a:xfrm>
+      </p:grpSpPr>
       <p:sp>
         <p:nvSpPr>
           <p:cNvPr id="2" name="Title 1"/>
@@ -4086,7 +3962,9 @@
         </p:nvSpPr>
         <p:spPr/>
         <p:txBody>
-          <a:bodyPr/>
+          <a:bodyPr>
+            <a:normAutofit/>
+          </a:bodyPr>
           <a:lstStyle/>
           <a:p>
             <a:pPr>
@@ -4098,7 +3976,12 @@
               </a:defRPr>
             </a:pPr>
             <a:r>
-              <a:t>硬件载体与底层通信</a:t>
+              <a:rPr sz="4000" dirty="0" err="1"/>
+              <a:t>系统开发与任务拆解</a:t>
+            </a:r>
+            <a:r>
+              <a:rPr sz="4000" dirty="0"/>
+              <a:t>: Phase 2</a:t>
             </a:r>
           </a:p>
         </p:txBody>
@@ -4143,6 +4026,7 @@
           <a:lstStyle/>
           <a:p>
             <a:pPr algn="ctr"/>
+            <a:endParaRPr/>
           </a:p>
         </p:txBody>
       </p:sp>
@@ -4190,8 +4074,8 @@
         </p:nvSpPr>
         <p:spPr>
           <a:xfrm>
-            <a:off x="914400" y="1828800"/>
-            <a:ext cx="7315200" cy="3657600"/>
+            <a:off x="457200" y="1371600"/>
+            <a:ext cx="8229600" cy="3987758"/>
           </a:xfrm>
           <a:prstGeom prst="rect">
             <a:avLst/>
@@ -4203,7 +4087,9 @@
             <a:spAutoFit/>
           </a:bodyPr>
           <a:lstStyle/>
-          <a:p/>
+          <a:p>
+            <a:endParaRPr dirty="0"/>
+          </a:p>
           <a:p>
             <a:pPr>
               <a:lnSpc>
@@ -4214,14 +4100,20 @@
               </a:spcBef>
               <a:defRPr sz="2200" b="1">
                 <a:solidFill>
-                  <a:srgbClr val="003366"/>
-                </a:solidFill>
-                <a:latin typeface="Microsoft YaHei"/>
-              </a:defRPr>
-            </a:pPr>
-            <a:r>
-              <a:t>核心硬件平台</a:t>
-            </a:r>
+                  <a:srgbClr val="0066CC"/>
+                </a:solidFill>
+                <a:latin typeface="Microsoft YaHei"/>
+              </a:defRPr>
+            </a:pPr>
+            <a:r>
+              <a:rPr dirty="0"/>
+              <a:t>Phase 2: AI </a:t>
+            </a:r>
+            <a:r>
+              <a:rPr dirty="0" err="1"/>
+              <a:t>训练与全链路联调</a:t>
+            </a:r>
+            <a:endParaRPr dirty="0"/>
           </a:p>
           <a:p>
             <a:pPr lvl="1">
@@ -4231,15 +4123,28 @@
               <a:spcBef>
                 <a:spcPts val="500"/>
               </a:spcBef>
-              <a:defRPr sz="1900" b="0">
-                <a:solidFill>
-                  <a:srgbClr val="333333"/>
-                </a:solidFill>
-                <a:latin typeface="Microsoft YaHei"/>
-              </a:defRPr>
-            </a:pPr>
-            <a:r>
-              <a:t>RJ2506 差速底盘 + 躯干控制器</a:t>
+              <a:defRPr sz="1900" b="1">
+                <a:solidFill>
+                  <a:srgbClr val="FF6600"/>
+                </a:solidFill>
+                <a:latin typeface="Microsoft YaHei"/>
+              </a:defRPr>
+            </a:pPr>
+            <a:r>
+              <a:rPr dirty="0" err="1"/>
+              <a:t>时间</a:t>
+            </a:r>
+            <a:r>
+              <a:rPr dirty="0"/>
+              <a:t>: </a:t>
+            </a:r>
+            <a:r>
+              <a:rPr lang="en-US" altLang="zh-CN" dirty="0"/>
+              <a:t>3</a:t>
+            </a:r>
+            <a:r>
+              <a:rPr dirty="0"/>
+              <a:t>周</a:t>
             </a:r>
           </a:p>
           <a:p>
@@ -4250,7 +4155,7 @@
               <a:spcBef>
                 <a:spcPts val="500"/>
               </a:spcBef>
-              <a:defRPr sz="1900" b="0">
+              <a:defRPr sz="1900" b="1">
                 <a:solidFill>
                   <a:srgbClr val="333333"/>
                 </a:solidFill>
@@ -4258,37 +4163,51 @@
               </a:defRPr>
             </a:pPr>
             <a:r>
-              <a:t>双机械臂 (单臂负载 15kg，协同 30kg)</a:t>
-            </a:r>
-          </a:p>
-          <a:p>
-            <a:pPr lvl="1">
+              <a:rPr dirty="0" err="1"/>
+              <a:t>核心任务列表</a:t>
+            </a:r>
+            <a:r>
+              <a:rPr dirty="0"/>
+              <a:t>:</a:t>
+            </a:r>
+          </a:p>
+          <a:p>
+            <a:pPr lvl="2">
               <a:lnSpc>
                 <a:spcPct val="110000"/>
               </a:lnSpc>
               <a:spcBef>
                 <a:spcPts val="500"/>
               </a:spcBef>
-              <a:defRPr sz="1900" b="0">
-                <a:solidFill>
-                  <a:srgbClr val="333333"/>
-                </a:solidFill>
-                <a:latin typeface="Microsoft YaHei"/>
-              </a:defRPr>
-            </a:pPr>
-            <a:r>
-              <a:t>左右平行夹爪</a:t>
-            </a:r>
-          </a:p>
-          <a:p>
-            <a:pPr lvl="1">
+              <a:defRPr sz="1600" b="1">
+                <a:solidFill>
+                  <a:srgbClr val="003366"/>
+                </a:solidFill>
+                <a:latin typeface="Microsoft YaHei"/>
+              </a:defRPr>
+            </a:pPr>
+            <a:r>
+              <a:rPr dirty="0"/>
+              <a:t>[2.1] </a:t>
+            </a:r>
+            <a:r>
+              <a:rPr dirty="0" err="1"/>
+              <a:t>数据采集与</a:t>
+            </a:r>
+            <a:r>
+              <a:rPr dirty="0"/>
+              <a:t> Sim2Real</a:t>
+            </a:r>
+          </a:p>
+          <a:p>
+            <a:pPr lvl="3">
               <a:lnSpc>
                 <a:spcPct val="110000"/>
               </a:lnSpc>
               <a:spcBef>
                 <a:spcPts val="500"/>
               </a:spcBef>
-              <a:defRPr sz="1900" b="0">
+              <a:defRPr sz="1300" b="0">
                 <a:solidFill>
                   <a:srgbClr val="333333"/>
                 </a:solidFill>
@@ -4296,56 +4215,114 @@
               </a:defRPr>
             </a:pPr>
             <a:r>
-              <a:t>头部全局相机(OAK-D) + 手腕局部相机</a:t>
-            </a:r>
-          </a:p>
-          <a:p>
-            <a:pPr>
+              <a:rPr dirty="0"/>
+              <a:t>• </a:t>
+            </a:r>
+            <a:r>
+              <a:rPr dirty="0" err="1"/>
+              <a:t>录制</a:t>
+            </a:r>
+            <a:r>
+              <a:rPr dirty="0"/>
+              <a:t> 50 </a:t>
+            </a:r>
+            <a:r>
+              <a:rPr dirty="0" err="1"/>
+              <a:t>条遥操作真机数据，导入</a:t>
+            </a:r>
+            <a:r>
+              <a:rPr dirty="0"/>
+              <a:t> </a:t>
+            </a:r>
+            <a:r>
+              <a:rPr dirty="0" err="1"/>
+              <a:t>IsaacLab</a:t>
+            </a:r>
+            <a:endParaRPr dirty="0"/>
+          </a:p>
+          <a:p>
+            <a:pPr lvl="3">
               <a:lnSpc>
                 <a:spcPct val="110000"/>
               </a:lnSpc>
               <a:spcBef>
                 <a:spcPts val="500"/>
               </a:spcBef>
-              <a:defRPr sz="2200" b="1">
-                <a:solidFill>
-                  <a:srgbClr val="003366"/>
-                </a:solidFill>
-                <a:latin typeface="Microsoft YaHei"/>
-              </a:defRPr>
-            </a:pPr>
-            <a:r>
-              <a:t>计算平台与系统</a:t>
-            </a:r>
-          </a:p>
-          <a:p>
-            <a:pPr lvl="1">
+              <a:defRPr sz="1300" b="0">
+                <a:solidFill>
+                  <a:srgbClr val="333333"/>
+                </a:solidFill>
+                <a:latin typeface="Microsoft YaHei"/>
+              </a:defRPr>
+            </a:pPr>
+            <a:r>
+              <a:rPr dirty="0"/>
+              <a:t>• </a:t>
+            </a:r>
+            <a:r>
+              <a:rPr dirty="0" err="1"/>
+              <a:t>生成</a:t>
+            </a:r>
+            <a:r>
+              <a:rPr dirty="0"/>
+              <a:t> 10000 </a:t>
+            </a:r>
+            <a:r>
+              <a:rPr dirty="0" err="1"/>
+              <a:t>条带各种光照变异的合成数据进行扩充</a:t>
+            </a:r>
+            <a:endParaRPr dirty="0"/>
+          </a:p>
+          <a:p>
+            <a:pPr lvl="2">
               <a:lnSpc>
                 <a:spcPct val="110000"/>
               </a:lnSpc>
               <a:spcBef>
                 <a:spcPts val="500"/>
               </a:spcBef>
-              <a:defRPr sz="1900" b="0">
-                <a:solidFill>
-                  <a:srgbClr val="333333"/>
-                </a:solidFill>
-                <a:latin typeface="Microsoft YaHei"/>
-              </a:defRPr>
-            </a:pPr>
-            <a:r>
-              <a:t>NVIDIA Jetson Orin</a:t>
-            </a:r>
-          </a:p>
-          <a:p>
-            <a:pPr lvl="1">
+              <a:defRPr sz="1600" b="1">
+                <a:solidFill>
+                  <a:srgbClr val="003366"/>
+                </a:solidFill>
+                <a:latin typeface="Microsoft YaHei"/>
+              </a:defRPr>
+            </a:pPr>
+            <a:r>
+              <a:rPr dirty="0"/>
+              <a:t>[2.2] DP </a:t>
+            </a:r>
+            <a:r>
+              <a:rPr dirty="0" err="1"/>
+              <a:t>模型训练与</a:t>
+            </a:r>
+            <a:r>
+              <a:rPr dirty="0"/>
+              <a:t> </a:t>
+            </a:r>
+            <a:r>
+              <a:rPr dirty="0" err="1"/>
+              <a:t>TensorRT</a:t>
+            </a:r>
+            <a:r>
+              <a:rPr dirty="0"/>
+              <a:t> </a:t>
+            </a:r>
+            <a:r>
+              <a:rPr dirty="0" err="1"/>
+              <a:t>部署</a:t>
+            </a:r>
+            <a:endParaRPr dirty="0"/>
+          </a:p>
+          <a:p>
+            <a:pPr lvl="3">
               <a:lnSpc>
                 <a:spcPct val="110000"/>
               </a:lnSpc>
               <a:spcBef>
                 <a:spcPts val="500"/>
               </a:spcBef>
-              <a:defRPr sz="1900" b="0">
+              <a:defRPr sz="1300" b="0">
                 <a:solidFill>
                   <a:srgbClr val="333333"/>
                 </a:solidFill>
@@ -4353,56 +4330,117 @@
               </a:defRPr>
             </a:pPr>
             <a:r>
-              <a:t>Phase 0/1 阶段暂不刷入 PREEMPT_RT 实时内核 (避开现有任务冲突)</a:t>
-            </a:r>
-          </a:p>
-          <a:p>
-            <a:pPr>
+              <a:rPr dirty="0"/>
+              <a:t>• </a:t>
+            </a:r>
+            <a:r>
+              <a:rPr dirty="0" err="1"/>
+              <a:t>在</a:t>
+            </a:r>
+            <a:r>
+              <a:rPr dirty="0"/>
+              <a:t> H100 </a:t>
+            </a:r>
+            <a:r>
+              <a:rPr dirty="0" err="1"/>
+              <a:t>集群上完成</a:t>
+            </a:r>
+            <a:r>
+              <a:rPr dirty="0"/>
+              <a:t> Diffusion Policy </a:t>
+            </a:r>
+            <a:r>
+              <a:rPr dirty="0" err="1"/>
+              <a:t>训练</a:t>
+            </a:r>
+            <a:endParaRPr dirty="0"/>
+          </a:p>
+          <a:p>
+            <a:pPr lvl="3">
               <a:lnSpc>
                 <a:spcPct val="110000"/>
               </a:lnSpc>
               <a:spcBef>
                 <a:spcPts val="500"/>
               </a:spcBef>
-              <a:defRPr sz="2200" b="1">
-                <a:solidFill>
-                  <a:srgbClr val="FF6600"/>
-                </a:solidFill>
-                <a:latin typeface="Microsoft YaHei"/>
-              </a:defRPr>
-            </a:pPr>
-            <a:r>
-              <a:t>底层通信总线</a:t>
-            </a:r>
-          </a:p>
-          <a:p>
-            <a:pPr lvl="1">
+              <a:defRPr sz="1300" b="0">
+                <a:solidFill>
+                  <a:srgbClr val="333333"/>
+                </a:solidFill>
+                <a:latin typeface="Microsoft YaHei"/>
+              </a:defRPr>
+            </a:pPr>
+            <a:r>
+              <a:rPr dirty="0"/>
+              <a:t>• Orin </a:t>
+            </a:r>
+            <a:r>
+              <a:rPr dirty="0" err="1"/>
+              <a:t>边缘端</a:t>
+            </a:r>
+            <a:r>
+              <a:rPr dirty="0"/>
+              <a:t> </a:t>
+            </a:r>
+            <a:r>
+              <a:rPr dirty="0" err="1"/>
+              <a:t>TensorRT</a:t>
+            </a:r>
+            <a:r>
+              <a:rPr dirty="0"/>
+              <a:t> </a:t>
+            </a:r>
+            <a:r>
+              <a:rPr dirty="0" err="1"/>
+              <a:t>部署，保证推理延迟</a:t>
+            </a:r>
+            <a:r>
+              <a:rPr dirty="0"/>
+              <a:t> &lt; 30ms</a:t>
+            </a:r>
+          </a:p>
+          <a:p>
+            <a:pPr lvl="2">
               <a:lnSpc>
                 <a:spcPct val="110000"/>
               </a:lnSpc>
               <a:spcBef>
                 <a:spcPts val="500"/>
               </a:spcBef>
-              <a:defRPr sz="1900" b="0">
-                <a:solidFill>
-                  <a:srgbClr val="333333"/>
-                </a:solidFill>
-                <a:latin typeface="Microsoft YaHei"/>
-              </a:defRPr>
-            </a:pPr>
-            <a:r>
-              <a:t>CANopen (1000Hz) - 控制 14 轴电机</a:t>
-            </a:r>
-          </a:p>
-          <a:p>
-            <a:pPr lvl="1">
+              <a:defRPr sz="1600" b="1">
+                <a:solidFill>
+                  <a:srgbClr val="003366"/>
+                </a:solidFill>
+                <a:latin typeface="Microsoft YaHei"/>
+              </a:defRPr>
+            </a:pPr>
+            <a:r>
+              <a:rPr dirty="0"/>
+              <a:t>[2.3] </a:t>
+            </a:r>
+            <a:r>
+              <a:rPr dirty="0" err="1"/>
+              <a:t>大脑节点</a:t>
+            </a:r>
+            <a:r>
+              <a:rPr dirty="0"/>
+              <a:t> (Brain Node) </a:t>
+            </a:r>
+            <a:r>
+              <a:rPr dirty="0" err="1"/>
+              <a:t>实车串联</a:t>
+            </a:r>
+            <a:endParaRPr dirty="0"/>
+          </a:p>
+          <a:p>
+            <a:pPr lvl="3">
               <a:lnSpc>
                 <a:spcPct val="110000"/>
               </a:lnSpc>
               <a:spcBef>
                 <a:spcPts val="500"/>
               </a:spcBef>
-              <a:defRPr sz="1900" b="0">
+              <a:defRPr sz="1300" b="0">
                 <a:solidFill>
                   <a:srgbClr val="333333"/>
                 </a:solidFill>
@@ -4410,8 +4448,22 @@
               </a:defRPr>
             </a:pPr>
             <a:r>
-              <a:t>RS-485 (50Hz) - 控制双侧夹爪</a:t>
-            </a:r>
+              <a:rPr dirty="0"/>
+              <a:t>• </a:t>
+            </a:r>
+            <a:r>
+              <a:rPr dirty="0" err="1"/>
+              <a:t>将</a:t>
+            </a:r>
+            <a:r>
+              <a:rPr dirty="0"/>
+              <a:t> Nav2 -&gt; ACT -&gt; Feature Memory -&gt; IBVS -&gt; Touch-down </a:t>
+            </a:r>
+            <a:r>
+              <a:rPr dirty="0" err="1"/>
+              <a:t>管线在真机完全打通</a:t>
+            </a:r>
+            <a:endParaRPr dirty="0"/>
           </a:p>
         </p:txBody>
       </p:sp>
@@ -4423,8 +4475,8 @@
 </p:sld>
 </file>
 
-<file path=ppt/slides/slide4.xml><?xml version="1.0" encoding="utf-8"?>
-<p:sld xmlns:a="http://schemas.openxmlformats.org/drawingml/2006/main" xmlns:p="http://schemas.openxmlformats.org/presentationml/2006/main" xmlns:r="http://schemas.openxmlformats.org/officeDocument/2006/relationships">
+<file path=ppt/slides/slide13.xml><?xml version="1.0" encoding="utf-8"?>
+<p:sld xmlns:a="http://schemas.openxmlformats.org/drawingml/2006/main" xmlns:r="http://schemas.openxmlformats.org/officeDocument/2006/relationships" xmlns:p="http://schemas.openxmlformats.org/presentationml/2006/main">
   <p:cSld>
     <p:bg>
       <p:bgPr>
@@ -4440,7 +4492,124 @@
         <p:cNvGrpSpPr/>
         <p:nvPr/>
       </p:nvGrpSpPr>
-      <p:grpSpPr/>
+      <p:grpSpPr>
+        <a:xfrm>
+          <a:off x="0" y="0"/>
+          <a:ext cx="0" cy="0"/>
+          <a:chOff x="0" y="0"/>
+          <a:chExt cx="0" cy="0"/>
+        </a:xfrm>
+      </p:grpSpPr>
+      <p:sp>
+        <p:nvSpPr>
+          <p:cNvPr id="2" name="Rectangle 1"/>
+          <p:cNvSpPr/>
+          <p:nvPr/>
+        </p:nvSpPr>
+        <p:spPr>
+          <a:xfrm>
+            <a:off x="0" y="0"/>
+            <a:ext cx="9144000" cy="6858000"/>
+          </a:xfrm>
+          <a:prstGeom prst="rect">
+            <a:avLst/>
+          </a:prstGeom>
+          <a:solidFill>
+            <a:srgbClr val="003366"/>
+          </a:solidFill>
+        </p:spPr>
+        <p:style>
+          <a:lnRef idx="1">
+            <a:schemeClr val="accent1"/>
+          </a:lnRef>
+          <a:fillRef idx="3">
+            <a:schemeClr val="accent1"/>
+          </a:fillRef>
+          <a:effectRef idx="2">
+            <a:schemeClr val="accent1"/>
+          </a:effectRef>
+          <a:fontRef idx="minor">
+            <a:schemeClr val="lt1"/>
+          </a:fontRef>
+        </p:style>
+        <p:txBody>
+          <a:bodyPr rtlCol="0" anchor="ctr"/>
+          <a:lstStyle/>
+          <a:p>
+            <a:pPr algn="ctr"/>
+            <a:endParaRPr/>
+          </a:p>
+        </p:txBody>
+      </p:sp>
+      <p:sp>
+        <p:nvSpPr>
+          <p:cNvPr id="3" name="TextBox 2"/>
+          <p:cNvSpPr txBox="1"/>
+          <p:nvPr/>
+        </p:nvSpPr>
+        <p:spPr>
+          <a:xfrm>
+            <a:off x="3083259" y="2743200"/>
+            <a:ext cx="2977482" cy="1077218"/>
+          </a:xfrm>
+          <a:prstGeom prst="rect">
+            <a:avLst/>
+          </a:prstGeom>
+          <a:noFill/>
+        </p:spPr>
+        <p:txBody>
+          <a:bodyPr wrap="none">
+            <a:spAutoFit/>
+          </a:bodyPr>
+          <a:lstStyle/>
+          <a:p>
+            <a:pPr algn="ctr">
+              <a:defRPr sz="6400" b="1">
+                <a:solidFill>
+                  <a:srgbClr val="FFFFFF"/>
+                </a:solidFill>
+              </a:defRPr>
+            </a:pPr>
+            <a:r>
+              <a:rPr dirty="0"/>
+              <a:t>THANKS</a:t>
+            </a:r>
+          </a:p>
+        </p:txBody>
+      </p:sp>
+    </p:spTree>
+  </p:cSld>
+  <p:clrMapOvr>
+    <a:masterClrMapping/>
+  </p:clrMapOvr>
+</p:sld>
+</file>
+
+<file path=ppt/slides/slide2.xml><?xml version="1.0" encoding="utf-8"?>
+<p:sld xmlns:a="http://schemas.openxmlformats.org/drawingml/2006/main" xmlns:r="http://schemas.openxmlformats.org/officeDocument/2006/relationships" xmlns:p="http://schemas.openxmlformats.org/presentationml/2006/main">
+  <p:cSld>
+    <p:bg>
+      <p:bgPr>
+        <a:solidFill>
+          <a:srgbClr val="F5F7FA"/>
+        </a:solidFill>
+        <a:effectLst/>
+      </p:bgPr>
+    </p:bg>
+    <p:spTree>
+      <p:nvGrpSpPr>
+        <p:cNvPr id="1" name=""/>
+        <p:cNvGrpSpPr/>
+        <p:nvPr/>
+      </p:nvGrpSpPr>
+      <p:grpSpPr>
+        <a:xfrm>
+          <a:off x="0" y="0"/>
+          <a:ext cx="0" cy="0"/>
+          <a:chOff x="0" y="0"/>
+          <a:chExt cx="0" cy="0"/>
+        </a:xfrm>
+      </p:grpSpPr>
       <p:sp>
         <p:nvSpPr>
           <p:cNvPr id="2" name="Title 1"/>
@@ -4465,7 +4634,7 @@
               </a:defRPr>
             </a:pPr>
             <a:r>
-              <a:t>全局软件架构：八段式控制管线</a:t>
+              <a:t>整体任务描述 (The Mission)</a:t>
             </a:r>
           </a:p>
         </p:txBody>
@@ -4510,6 +4679,1318 @@
           <a:lstStyle/>
           <a:p>
             <a:pPr algn="ctr"/>
+            <a:endParaRPr/>
+          </a:p>
+        </p:txBody>
+      </p:sp>
+      <p:sp>
+        <p:nvSpPr>
+          <p:cNvPr id="4" name="TextBox 3"/>
+          <p:cNvSpPr txBox="1"/>
+          <p:nvPr/>
+        </p:nvSpPr>
+        <p:spPr>
+          <a:xfrm>
+            <a:off x="457200" y="6492240"/>
+            <a:ext cx="8229600" cy="365760"/>
+          </a:xfrm>
+          <a:prstGeom prst="rect">
+            <a:avLst/>
+          </a:prstGeom>
+          <a:noFill/>
+        </p:spPr>
+        <p:txBody>
+          <a:bodyPr wrap="none">
+            <a:spAutoFit/>
+          </a:bodyPr>
+          <a:lstStyle/>
+          <a:p>
+            <a:pPr>
+              <a:defRPr sz="1200" b="1">
+                <a:solidFill>
+                  <a:srgbClr val="787878"/>
+                </a:solidFill>
+                <a:latin typeface="Microsoft YaHei"/>
+              </a:defRPr>
+            </a:pPr>
+            <a:r>
+              <a:t>RJ2506 双臂轮式复合机器人 | 核心技术攻坚与系统架构</a:t>
+            </a:r>
+          </a:p>
+        </p:txBody>
+      </p:sp>
+      <p:sp>
+        <p:nvSpPr>
+          <p:cNvPr id="5" name="TextBox 4"/>
+          <p:cNvSpPr txBox="1"/>
+          <p:nvPr/>
+        </p:nvSpPr>
+        <p:spPr>
+          <a:xfrm>
+            <a:off x="457200" y="1371600"/>
+            <a:ext cx="8229600" cy="769441"/>
+          </a:xfrm>
+          <a:prstGeom prst="rect">
+            <a:avLst/>
+          </a:prstGeom>
+          <a:noFill/>
+        </p:spPr>
+        <p:txBody>
+          <a:bodyPr wrap="square">
+            <a:spAutoFit/>
+          </a:bodyPr>
+          <a:lstStyle/>
+          <a:p>
+            <a:pPr>
+              <a:defRPr sz="2200">
+                <a:solidFill>
+                  <a:srgbClr val="333333"/>
+                </a:solidFill>
+              </a:defRPr>
+            </a:pPr>
+            <a:r>
+              <a:rPr dirty="0"/>
+              <a:t>RJ2506 </a:t>
+            </a:r>
+            <a:r>
+              <a:rPr dirty="0" err="1"/>
+              <a:t>是一款双臂轮式复合机器人，旨在解决工厂半结构化环境下的高精度堆垛与搬运问题</a:t>
+            </a:r>
+            <a:r>
+              <a:rPr dirty="0"/>
+              <a:t>。</a:t>
+            </a:r>
+          </a:p>
+        </p:txBody>
+      </p:sp>
+      <p:pic>
+        <p:nvPicPr>
+          <p:cNvPr id="1032" name="Picture 8">
+            <a:extLst>
+              <a:ext uri="{FF2B5EF4-FFF2-40B4-BE49-F238E27FC236}">
+                <a16:creationId xmlns:a16="http://schemas.microsoft.com/office/drawing/2014/main" id="{D83148EB-2844-C544-0C71-2590BE87210D}"/>
+              </a:ext>
+            </a:extLst>
+          </p:cNvPr>
+          <p:cNvPicPr>
+            <a:picLocks noChangeAspect="1" noChangeArrowheads="1"/>
+          </p:cNvPicPr>
+          <p:nvPr/>
+        </p:nvPicPr>
+        <p:blipFill rotWithShape="1">
+          <a:blip r:embed="rId2">
+            <a:extLst>
+              <a:ext uri="{28A0092B-C50C-407E-A947-70E740481C1C}">
+                <a14:useLocalDpi xmlns:a14="http://schemas.microsoft.com/office/drawing/2010/main" val="0"/>
+              </a:ext>
+            </a:extLst>
+          </a:blip>
+          <a:srcRect l="-1" r="29223" b="23463"/>
+          <a:stretch>
+            <a:fillRect/>
+          </a:stretch>
+        </p:blipFill>
+        <p:spPr bwMode="auto">
+          <a:xfrm>
+            <a:off x="1336089" y="2348294"/>
+            <a:ext cx="6471821" cy="3936692"/>
+          </a:xfrm>
+          <a:prstGeom prst="rect">
+            <a:avLst/>
+          </a:prstGeom>
+          <a:noFill/>
+          <a:extLst>
+            <a:ext uri="{909E8E84-426E-40DD-AFC4-6F175D3DCCD1}">
+              <a14:hiddenFill xmlns:a14="http://schemas.microsoft.com/office/drawing/2010/main">
+                <a:solidFill>
+                  <a:srgbClr val="FFFFFF"/>
+                </a:solidFill>
+              </a14:hiddenFill>
+            </a:ext>
+          </a:extLst>
+        </p:spPr>
+      </p:pic>
+    </p:spTree>
+  </p:cSld>
+  <p:clrMapOvr>
+    <a:masterClrMapping/>
+  </p:clrMapOvr>
+</p:sld>
+</file>
+
+<file path=ppt/slides/slide3.xml><?xml version="1.0" encoding="utf-8"?>
+<p:sld xmlns:a="http://schemas.openxmlformats.org/drawingml/2006/main" xmlns:r="http://schemas.openxmlformats.org/officeDocument/2006/relationships" xmlns:p="http://schemas.openxmlformats.org/presentationml/2006/main">
+  <p:cSld>
+    <p:spTree>
+      <p:nvGrpSpPr>
+        <p:cNvPr id="1" name="">
+          <a:extLst>
+            <a:ext uri="{FF2B5EF4-FFF2-40B4-BE49-F238E27FC236}">
+              <a16:creationId xmlns:a16="http://schemas.microsoft.com/office/drawing/2014/main" id="{C2814EC1-9DBA-512E-E81E-49BC31E84D1A}"/>
+            </a:ext>
+          </a:extLst>
+        </p:cNvPr>
+        <p:cNvGrpSpPr/>
+        <p:nvPr/>
+      </p:nvGrpSpPr>
+      <p:grpSpPr>
+        <a:xfrm>
+          <a:off x="0" y="0"/>
+          <a:ext cx="0" cy="0"/>
+          <a:chOff x="0" y="0"/>
+          <a:chExt cx="0" cy="0"/>
+        </a:xfrm>
+      </p:grpSpPr>
+      <p:sp>
+        <p:nvSpPr>
+          <p:cNvPr id="2" name="Title 1">
+            <a:extLst>
+              <a:ext uri="{FF2B5EF4-FFF2-40B4-BE49-F238E27FC236}">
+                <a16:creationId xmlns:a16="http://schemas.microsoft.com/office/drawing/2014/main" id="{08428CBF-D76B-7240-3093-BE112B0079F0}"/>
+              </a:ext>
+            </a:extLst>
+          </p:cNvPr>
+          <p:cNvSpPr>
+            <a:spLocks noGrp="1"/>
+          </p:cNvSpPr>
+          <p:nvPr>
+            <p:ph type="title"/>
+          </p:nvPr>
+        </p:nvSpPr>
+        <p:spPr/>
+        <p:txBody>
+          <a:bodyPr>
+            <a:normAutofit/>
+          </a:bodyPr>
+          <a:lstStyle/>
+          <a:p>
+            <a:pPr>
+              <a:defRPr sz="2000" b="1">
+                <a:solidFill>
+                  <a:srgbClr val="0066CC"/>
+                </a:solidFill>
+              </a:defRPr>
+            </a:pPr>
+            <a:r>
+              <a:rPr lang="zh-CN" altLang="en-US" sz="2400" dirty="0">
+                <a:latin typeface="Microsoft YaHei" panose="020B0503020204020204" pitchFamily="34" charset="-122"/>
+                <a:ea typeface="Microsoft YaHei" panose="020B0503020204020204" pitchFamily="34" charset="-122"/>
+              </a:rPr>
+              <a:t>场景 </a:t>
+            </a:r>
+            <a:r>
+              <a:rPr lang="en-US" altLang="zh-CN" sz="2400" dirty="0">
+                <a:latin typeface="Microsoft YaHei" panose="020B0503020204020204" pitchFamily="34" charset="-122"/>
+                <a:ea typeface="Microsoft YaHei" panose="020B0503020204020204" pitchFamily="34" charset="-122"/>
+              </a:rPr>
+              <a:t>1</a:t>
+            </a:r>
+            <a:r>
+              <a:rPr lang="zh-CN" altLang="en-US" sz="2400" dirty="0">
+                <a:latin typeface="Microsoft YaHei" panose="020B0503020204020204" pitchFamily="34" charset="-122"/>
+                <a:ea typeface="Microsoft YaHei" panose="020B0503020204020204" pitchFamily="34" charset="-122"/>
+              </a:rPr>
+              <a:t>：大框码料</a:t>
+            </a:r>
+          </a:p>
+        </p:txBody>
+      </p:sp>
+      <p:sp>
+        <p:nvSpPr>
+          <p:cNvPr id="3" name="Rectangle 2">
+            <a:extLst>
+              <a:ext uri="{FF2B5EF4-FFF2-40B4-BE49-F238E27FC236}">
+                <a16:creationId xmlns:a16="http://schemas.microsoft.com/office/drawing/2014/main" id="{F037D51E-164B-5864-EA44-6A2AB4FE1951}"/>
+              </a:ext>
+            </a:extLst>
+          </p:cNvPr>
+          <p:cNvSpPr/>
+          <p:nvPr/>
+        </p:nvSpPr>
+        <p:spPr>
+          <a:xfrm>
+            <a:off x="0" y="0"/>
+            <a:ext cx="9144000" cy="137160"/>
+          </a:xfrm>
+          <a:prstGeom prst="rect">
+            <a:avLst/>
+          </a:prstGeom>
+          <a:solidFill>
+            <a:srgbClr val="003366"/>
+          </a:solidFill>
+          <a:ln>
+            <a:noFill/>
+          </a:ln>
+        </p:spPr>
+        <p:style>
+          <a:lnRef idx="1">
+            <a:schemeClr val="accent1"/>
+          </a:lnRef>
+          <a:fillRef idx="3">
+            <a:schemeClr val="accent1"/>
+          </a:fillRef>
+          <a:effectRef idx="2">
+            <a:schemeClr val="accent1"/>
+          </a:effectRef>
+          <a:fontRef idx="minor">
+            <a:schemeClr val="lt1"/>
+          </a:fontRef>
+        </p:style>
+        <p:txBody>
+          <a:bodyPr rtlCol="0" anchor="ctr"/>
+          <a:lstStyle/>
+          <a:p>
+            <a:pPr algn="ctr"/>
+            <a:endParaRPr/>
+          </a:p>
+        </p:txBody>
+      </p:sp>
+      <p:sp>
+        <p:nvSpPr>
+          <p:cNvPr id="4" name="TextBox 3">
+            <a:extLst>
+              <a:ext uri="{FF2B5EF4-FFF2-40B4-BE49-F238E27FC236}">
+                <a16:creationId xmlns:a16="http://schemas.microsoft.com/office/drawing/2014/main" id="{805D578B-79F3-25E9-D45F-BF0FDC4F3065}"/>
+              </a:ext>
+            </a:extLst>
+          </p:cNvPr>
+          <p:cNvSpPr txBox="1"/>
+          <p:nvPr/>
+        </p:nvSpPr>
+        <p:spPr>
+          <a:xfrm>
+            <a:off x="457200" y="6492240"/>
+            <a:ext cx="8229600" cy="365760"/>
+          </a:xfrm>
+          <a:prstGeom prst="rect">
+            <a:avLst/>
+          </a:prstGeom>
+          <a:noFill/>
+        </p:spPr>
+        <p:txBody>
+          <a:bodyPr wrap="none">
+            <a:spAutoFit/>
+          </a:bodyPr>
+          <a:lstStyle/>
+          <a:p>
+            <a:pPr>
+              <a:defRPr sz="1200" b="1">
+                <a:solidFill>
+                  <a:srgbClr val="787878"/>
+                </a:solidFill>
+                <a:latin typeface="Microsoft YaHei"/>
+              </a:defRPr>
+            </a:pPr>
+            <a:r>
+              <a:t>RJ2506 双臂轮式复合机器人 | 核心技术攻坚与系统架构</a:t>
+            </a:r>
+          </a:p>
+        </p:txBody>
+      </p:sp>
+      <p:sp>
+        <p:nvSpPr>
+          <p:cNvPr id="6" name="Rounded Rectangle 5">
+            <a:extLst>
+              <a:ext uri="{FF2B5EF4-FFF2-40B4-BE49-F238E27FC236}">
+                <a16:creationId xmlns:a16="http://schemas.microsoft.com/office/drawing/2014/main" id="{0FCBD532-C04B-E6FB-78EC-512D42D33C25}"/>
+              </a:ext>
+            </a:extLst>
+          </p:cNvPr>
+          <p:cNvSpPr/>
+          <p:nvPr/>
+        </p:nvSpPr>
+        <p:spPr>
+          <a:xfrm>
+            <a:off x="1631271" y="1417638"/>
+            <a:ext cx="5881457" cy="713003"/>
+          </a:xfrm>
+          <a:prstGeom prst="roundRect">
+            <a:avLst/>
+          </a:prstGeom>
+          <a:solidFill>
+            <a:srgbClr val="FFFFFF"/>
+          </a:solidFill>
+          <a:ln>
+            <a:solidFill>
+              <a:srgbClr val="0066CC"/>
+            </a:solidFill>
+          </a:ln>
+        </p:spPr>
+        <p:style>
+          <a:lnRef idx="1">
+            <a:schemeClr val="accent1"/>
+          </a:lnRef>
+          <a:fillRef idx="3">
+            <a:schemeClr val="accent1"/>
+          </a:fillRef>
+          <a:effectRef idx="2">
+            <a:schemeClr val="accent1"/>
+          </a:effectRef>
+          <a:fontRef idx="minor">
+            <a:schemeClr val="lt1"/>
+          </a:fontRef>
+        </p:style>
+        <p:txBody>
+          <a:bodyPr wrap="square" rtlCol="0" anchor="ctr"/>
+          <a:lstStyle/>
+          <a:p>
+            <a:pPr>
+              <a:defRPr sz="1400">
+                <a:solidFill>
+                  <a:srgbClr val="333333"/>
+                </a:solidFill>
+              </a:defRPr>
+            </a:pPr>
+            <a:r>
+              <a:rPr dirty="0"/>
+              <a:t>• </a:t>
+            </a:r>
+            <a:r>
+              <a:rPr dirty="0" err="1"/>
+              <a:t>目标</a:t>
+            </a:r>
+            <a:r>
+              <a:rPr dirty="0"/>
+              <a:t>: </a:t>
+            </a:r>
+            <a:r>
+              <a:rPr dirty="0" err="1"/>
+              <a:t>双手从下料平台同时抓取大料片，搬运并精准码放到大框中</a:t>
+            </a:r>
+            <a:br>
+              <a:rPr dirty="0"/>
+            </a:br>
+            <a:r>
+              <a:rPr dirty="0"/>
+              <a:t>• </a:t>
+            </a:r>
+            <a:r>
+              <a:rPr dirty="0" err="1"/>
+              <a:t>难点</a:t>
+            </a:r>
+            <a:r>
+              <a:rPr dirty="0"/>
+              <a:t>: </a:t>
+            </a:r>
+            <a:r>
+              <a:rPr dirty="0" err="1"/>
+              <a:t>大框边缘限制，放置必须极度平稳精准，杜绝磕碰</a:t>
+            </a:r>
+            <a:endParaRPr dirty="0"/>
+          </a:p>
+        </p:txBody>
+      </p:sp>
+      <p:pic>
+        <p:nvPicPr>
+          <p:cNvPr id="1026" name="Picture 2">
+            <a:extLst>
+              <a:ext uri="{FF2B5EF4-FFF2-40B4-BE49-F238E27FC236}">
+                <a16:creationId xmlns:a16="http://schemas.microsoft.com/office/drawing/2014/main" id="{0FE011B1-2440-1559-5CC4-5A6DAB2403A6}"/>
+              </a:ext>
+            </a:extLst>
+          </p:cNvPr>
+          <p:cNvPicPr>
+            <a:picLocks noChangeAspect="1" noChangeArrowheads="1"/>
+          </p:cNvPicPr>
+          <p:nvPr/>
+        </p:nvPicPr>
+        <p:blipFill>
+          <a:blip r:embed="rId2">
+            <a:extLst>
+              <a:ext uri="{28A0092B-C50C-407E-A947-70E740481C1C}">
+                <a14:useLocalDpi xmlns:a14="http://schemas.microsoft.com/office/drawing/2010/main" val="0"/>
+              </a:ext>
+            </a:extLst>
+          </a:blip>
+          <a:srcRect/>
+          <a:stretch>
+            <a:fillRect/>
+          </a:stretch>
+        </p:blipFill>
+        <p:spPr bwMode="auto">
+          <a:xfrm>
+            <a:off x="457199" y="2230452"/>
+            <a:ext cx="8229600" cy="4251960"/>
+          </a:xfrm>
+          <a:prstGeom prst="rect">
+            <a:avLst/>
+          </a:prstGeom>
+          <a:noFill/>
+          <a:extLst>
+            <a:ext uri="{909E8E84-426E-40DD-AFC4-6F175D3DCCD1}">
+              <a14:hiddenFill xmlns:a14="http://schemas.microsoft.com/office/drawing/2010/main">
+                <a:solidFill>
+                  <a:srgbClr val="FFFFFF"/>
+                </a:solidFill>
+              </a14:hiddenFill>
+            </a:ext>
+          </a:extLst>
+        </p:spPr>
+      </p:pic>
+    </p:spTree>
+    <p:extLst>
+      <p:ext uri="{BB962C8B-B14F-4D97-AF65-F5344CB8AC3E}">
+        <p14:creationId xmlns:p14="http://schemas.microsoft.com/office/powerpoint/2010/main" val="1479045103"/>
+      </p:ext>
+    </p:extLst>
+  </p:cSld>
+  <p:clrMapOvr>
+    <a:masterClrMapping/>
+  </p:clrMapOvr>
+</p:sld>
+</file>
+
+<file path=ppt/slides/slide4.xml><?xml version="1.0" encoding="utf-8"?>
+<p:sld xmlns:a="http://schemas.openxmlformats.org/drawingml/2006/main" xmlns:r="http://schemas.openxmlformats.org/officeDocument/2006/relationships" xmlns:p="http://schemas.openxmlformats.org/presentationml/2006/main">
+  <p:cSld>
+    <p:spTree>
+      <p:nvGrpSpPr>
+        <p:cNvPr id="1" name="">
+          <a:extLst>
+            <a:ext uri="{FF2B5EF4-FFF2-40B4-BE49-F238E27FC236}">
+              <a16:creationId xmlns:a16="http://schemas.microsoft.com/office/drawing/2014/main" id="{A09982B6-DDCB-493D-58CE-43AE7CCEF6D6}"/>
+            </a:ext>
+          </a:extLst>
+        </p:cNvPr>
+        <p:cNvGrpSpPr/>
+        <p:nvPr/>
+      </p:nvGrpSpPr>
+      <p:grpSpPr>
+        <a:xfrm>
+          <a:off x="0" y="0"/>
+          <a:ext cx="0" cy="0"/>
+          <a:chOff x="0" y="0"/>
+          <a:chExt cx="0" cy="0"/>
+        </a:xfrm>
+      </p:grpSpPr>
+      <p:sp>
+        <p:nvSpPr>
+          <p:cNvPr id="2" name="Title 1">
+            <a:extLst>
+              <a:ext uri="{FF2B5EF4-FFF2-40B4-BE49-F238E27FC236}">
+                <a16:creationId xmlns:a16="http://schemas.microsoft.com/office/drawing/2014/main" id="{3566AD28-2988-BF37-83A1-55B5DD004E87}"/>
+              </a:ext>
+            </a:extLst>
+          </p:cNvPr>
+          <p:cNvSpPr>
+            <a:spLocks noGrp="1"/>
+          </p:cNvSpPr>
+          <p:nvPr>
+            <p:ph type="title"/>
+          </p:nvPr>
+        </p:nvSpPr>
+        <p:spPr/>
+        <p:txBody>
+          <a:bodyPr>
+            <a:normAutofit/>
+          </a:bodyPr>
+          <a:lstStyle/>
+          <a:p>
+            <a:pPr>
+              <a:defRPr sz="2000" b="1">
+                <a:solidFill>
+                  <a:srgbClr val="FF6600"/>
+                </a:solidFill>
+              </a:defRPr>
+            </a:pPr>
+            <a:r>
+              <a:rPr lang="zh-CN" altLang="en-US" sz="2400" dirty="0">
+                <a:latin typeface="Microsoft YaHei" panose="020B0503020204020204" pitchFamily="34" charset="-122"/>
+                <a:ea typeface="Microsoft YaHei" panose="020B0503020204020204" pitchFamily="34" charset="-122"/>
+              </a:rPr>
+              <a:t>场景 </a:t>
+            </a:r>
+            <a:r>
+              <a:rPr lang="en-US" altLang="zh-CN" sz="2400" dirty="0">
+                <a:latin typeface="Microsoft YaHei" panose="020B0503020204020204" pitchFamily="34" charset="-122"/>
+                <a:ea typeface="Microsoft YaHei" panose="020B0503020204020204" pitchFamily="34" charset="-122"/>
+              </a:rPr>
+              <a:t>2</a:t>
+            </a:r>
+            <a:r>
+              <a:rPr lang="zh-CN" altLang="en-US" sz="2400" dirty="0">
+                <a:latin typeface="Microsoft YaHei" panose="020B0503020204020204" pitchFamily="34" charset="-122"/>
+                <a:ea typeface="Microsoft YaHei" panose="020B0503020204020204" pitchFamily="34" charset="-122"/>
+              </a:rPr>
+              <a:t>：小框换框与码垛</a:t>
+            </a:r>
+          </a:p>
+        </p:txBody>
+      </p:sp>
+      <p:sp>
+        <p:nvSpPr>
+          <p:cNvPr id="3" name="Rectangle 2">
+            <a:extLst>
+              <a:ext uri="{FF2B5EF4-FFF2-40B4-BE49-F238E27FC236}">
+                <a16:creationId xmlns:a16="http://schemas.microsoft.com/office/drawing/2014/main" id="{274ED97C-B8D8-F569-8A73-CFE7BEFBD012}"/>
+              </a:ext>
+            </a:extLst>
+          </p:cNvPr>
+          <p:cNvSpPr/>
+          <p:nvPr/>
+        </p:nvSpPr>
+        <p:spPr>
+          <a:xfrm>
+            <a:off x="0" y="0"/>
+            <a:ext cx="9144000" cy="137160"/>
+          </a:xfrm>
+          <a:prstGeom prst="rect">
+            <a:avLst/>
+          </a:prstGeom>
+          <a:solidFill>
+            <a:srgbClr val="003366"/>
+          </a:solidFill>
+          <a:ln>
+            <a:noFill/>
+          </a:ln>
+        </p:spPr>
+        <p:style>
+          <a:lnRef idx="1">
+            <a:schemeClr val="accent1"/>
+          </a:lnRef>
+          <a:fillRef idx="3">
+            <a:schemeClr val="accent1"/>
+          </a:fillRef>
+          <a:effectRef idx="2">
+            <a:schemeClr val="accent1"/>
+          </a:effectRef>
+          <a:fontRef idx="minor">
+            <a:schemeClr val="lt1"/>
+          </a:fontRef>
+        </p:style>
+        <p:txBody>
+          <a:bodyPr rtlCol="0" anchor="ctr"/>
+          <a:lstStyle/>
+          <a:p>
+            <a:pPr algn="ctr"/>
+            <a:endParaRPr/>
+          </a:p>
+        </p:txBody>
+      </p:sp>
+      <p:sp>
+        <p:nvSpPr>
+          <p:cNvPr id="4" name="TextBox 3">
+            <a:extLst>
+              <a:ext uri="{FF2B5EF4-FFF2-40B4-BE49-F238E27FC236}">
+                <a16:creationId xmlns:a16="http://schemas.microsoft.com/office/drawing/2014/main" id="{D9DA0FF0-E1CD-9003-11C7-50E98E9474CC}"/>
+              </a:ext>
+            </a:extLst>
+          </p:cNvPr>
+          <p:cNvSpPr txBox="1"/>
+          <p:nvPr/>
+        </p:nvSpPr>
+        <p:spPr>
+          <a:xfrm>
+            <a:off x="457200" y="6492240"/>
+            <a:ext cx="8229600" cy="365760"/>
+          </a:xfrm>
+          <a:prstGeom prst="rect">
+            <a:avLst/>
+          </a:prstGeom>
+          <a:noFill/>
+        </p:spPr>
+        <p:txBody>
+          <a:bodyPr wrap="none">
+            <a:spAutoFit/>
+          </a:bodyPr>
+          <a:lstStyle/>
+          <a:p>
+            <a:pPr>
+              <a:defRPr sz="1200" b="1">
+                <a:solidFill>
+                  <a:srgbClr val="787878"/>
+                </a:solidFill>
+                <a:latin typeface="Microsoft YaHei"/>
+              </a:defRPr>
+            </a:pPr>
+            <a:r>
+              <a:t>RJ2506 双臂轮式复合机器人 | 核心技术攻坚与系统架构</a:t>
+            </a:r>
+          </a:p>
+        </p:txBody>
+      </p:sp>
+      <p:sp>
+        <p:nvSpPr>
+          <p:cNvPr id="7" name="Rounded Rectangle 6">
+            <a:extLst>
+              <a:ext uri="{FF2B5EF4-FFF2-40B4-BE49-F238E27FC236}">
+                <a16:creationId xmlns:a16="http://schemas.microsoft.com/office/drawing/2014/main" id="{93AC0FC6-0F55-EFC8-F258-3F6297A7E6C7}"/>
+              </a:ext>
+            </a:extLst>
+          </p:cNvPr>
+          <p:cNvSpPr/>
+          <p:nvPr/>
+        </p:nvSpPr>
+        <p:spPr>
+          <a:xfrm>
+            <a:off x="1468810" y="1195867"/>
+            <a:ext cx="6206379" cy="934648"/>
+          </a:xfrm>
+          <a:prstGeom prst="roundRect">
+            <a:avLst/>
+          </a:prstGeom>
+          <a:solidFill>
+            <a:srgbClr val="FFFFFF"/>
+          </a:solidFill>
+          <a:ln>
+            <a:solidFill>
+              <a:srgbClr val="FF6600"/>
+            </a:solidFill>
+          </a:ln>
+        </p:spPr>
+        <p:style>
+          <a:lnRef idx="1">
+            <a:schemeClr val="accent1"/>
+          </a:lnRef>
+          <a:fillRef idx="3">
+            <a:schemeClr val="accent1"/>
+          </a:fillRef>
+          <a:effectRef idx="2">
+            <a:schemeClr val="accent1"/>
+          </a:effectRef>
+          <a:fontRef idx="minor">
+            <a:schemeClr val="lt1"/>
+          </a:fontRef>
+        </p:style>
+        <p:txBody>
+          <a:bodyPr wrap="square" rtlCol="0" anchor="ctr"/>
+          <a:lstStyle/>
+          <a:p>
+            <a:pPr>
+              <a:defRPr sz="1400">
+                <a:solidFill>
+                  <a:srgbClr val="333333"/>
+                </a:solidFill>
+              </a:defRPr>
+            </a:pPr>
+            <a:r>
+              <a:rPr dirty="0"/>
+              <a:t>• </a:t>
+            </a:r>
+            <a:r>
+              <a:rPr dirty="0" err="1"/>
+              <a:t>目标</a:t>
+            </a:r>
+            <a:r>
+              <a:rPr dirty="0"/>
+              <a:t>: </a:t>
+            </a:r>
+            <a:r>
+              <a:rPr dirty="0" err="1"/>
+              <a:t>推动空框替换满框，并将满框双手搬运至中转站进行高精度码垛</a:t>
+            </a:r>
+            <a:br>
+              <a:rPr dirty="0"/>
+            </a:br>
+            <a:r>
+              <a:rPr dirty="0"/>
+              <a:t>• </a:t>
+            </a:r>
+            <a:r>
+              <a:rPr dirty="0" err="1"/>
+              <a:t>难点</a:t>
+            </a:r>
+            <a:r>
+              <a:rPr dirty="0"/>
+              <a:t>: </a:t>
+            </a:r>
+            <a:r>
+              <a:rPr dirty="0" err="1"/>
+              <a:t>视线完全遮挡，码垛极易重心偏移倒塌，需抗盲插和倾斜修正</a:t>
+            </a:r>
+            <a:endParaRPr dirty="0"/>
+          </a:p>
+        </p:txBody>
+      </p:sp>
+      <p:pic>
+        <p:nvPicPr>
+          <p:cNvPr id="1028" name="Picture 4">
+            <a:extLst>
+              <a:ext uri="{FF2B5EF4-FFF2-40B4-BE49-F238E27FC236}">
+                <a16:creationId xmlns:a16="http://schemas.microsoft.com/office/drawing/2014/main" id="{8568EC93-F0A3-1E6E-AD68-91CB0C057C58}"/>
+              </a:ext>
+            </a:extLst>
+          </p:cNvPr>
+          <p:cNvPicPr>
+            <a:picLocks noChangeAspect="1" noChangeArrowheads="1"/>
+          </p:cNvPicPr>
+          <p:nvPr/>
+        </p:nvPicPr>
+        <p:blipFill>
+          <a:blip r:embed="rId2">
+            <a:extLst>
+              <a:ext uri="{28A0092B-C50C-407E-A947-70E740481C1C}">
+                <a14:useLocalDpi xmlns:a14="http://schemas.microsoft.com/office/drawing/2010/main" val="0"/>
+              </a:ext>
+            </a:extLst>
+          </a:blip>
+          <a:srcRect/>
+          <a:stretch>
+            <a:fillRect/>
+          </a:stretch>
+        </p:blipFill>
+        <p:spPr bwMode="auto">
+          <a:xfrm>
+            <a:off x="457201" y="2185398"/>
+            <a:ext cx="8229599" cy="4251959"/>
+          </a:xfrm>
+          <a:prstGeom prst="rect">
+            <a:avLst/>
+          </a:prstGeom>
+          <a:noFill/>
+          <a:extLst>
+            <a:ext uri="{909E8E84-426E-40DD-AFC4-6F175D3DCCD1}">
+              <a14:hiddenFill xmlns:a14="http://schemas.microsoft.com/office/drawing/2010/main">
+                <a:solidFill>
+                  <a:srgbClr val="FFFFFF"/>
+                </a:solidFill>
+              </a14:hiddenFill>
+            </a:ext>
+          </a:extLst>
+        </p:spPr>
+      </p:pic>
+    </p:spTree>
+    <p:extLst>
+      <p:ext uri="{BB962C8B-B14F-4D97-AF65-F5344CB8AC3E}">
+        <p14:creationId xmlns:p14="http://schemas.microsoft.com/office/powerpoint/2010/main" val="2306201377"/>
+      </p:ext>
+    </p:extLst>
+  </p:cSld>
+  <p:clrMapOvr>
+    <a:masterClrMapping/>
+  </p:clrMapOvr>
+</p:sld>
+</file>
+
+<file path=ppt/slides/slide5.xml><?xml version="1.0" encoding="utf-8"?>
+<p:sld xmlns:a="http://schemas.openxmlformats.org/drawingml/2006/main" xmlns:r="http://schemas.openxmlformats.org/officeDocument/2006/relationships" xmlns:p="http://schemas.openxmlformats.org/presentationml/2006/main" show="0">
+  <p:cSld>
+    <p:bg>
+      <p:bgPr>
+        <a:solidFill>
+          <a:srgbClr val="F5F7FA"/>
+        </a:solidFill>
+        <a:effectLst/>
+      </p:bgPr>
+    </p:bg>
+    <p:spTree>
+      <p:nvGrpSpPr>
+        <p:cNvPr id="1" name=""/>
+        <p:cNvGrpSpPr/>
+        <p:nvPr/>
+      </p:nvGrpSpPr>
+      <p:grpSpPr>
+        <a:xfrm>
+          <a:off x="0" y="0"/>
+          <a:ext cx="0" cy="0"/>
+          <a:chOff x="0" y="0"/>
+          <a:chExt cx="0" cy="0"/>
+        </a:xfrm>
+      </p:grpSpPr>
+      <p:sp>
+        <p:nvSpPr>
+          <p:cNvPr id="2" name="Title 1"/>
+          <p:cNvSpPr>
+            <a:spLocks noGrp="1"/>
+          </p:cNvSpPr>
+          <p:nvPr>
+            <p:ph type="title"/>
+          </p:nvPr>
+        </p:nvSpPr>
+        <p:spPr/>
+        <p:txBody>
+          <a:bodyPr/>
+          <a:lstStyle/>
+          <a:p>
+            <a:pPr>
+              <a:defRPr b="1">
+                <a:solidFill>
+                  <a:srgbClr val="003366"/>
+                </a:solidFill>
+                <a:latin typeface="Microsoft YaHei"/>
+              </a:defRPr>
+            </a:pPr>
+            <a:r>
+              <a:rPr dirty="0" err="1"/>
+              <a:t>硬件载体与底层通信</a:t>
+            </a:r>
+            <a:endParaRPr dirty="0"/>
+          </a:p>
+        </p:txBody>
+      </p:sp>
+      <p:sp>
+        <p:nvSpPr>
+          <p:cNvPr id="3" name="Rectangle 2"/>
+          <p:cNvSpPr/>
+          <p:nvPr/>
+        </p:nvSpPr>
+        <p:spPr>
+          <a:xfrm>
+            <a:off x="0" y="0"/>
+            <a:ext cx="9144000" cy="137160"/>
+          </a:xfrm>
+          <a:prstGeom prst="rect">
+            <a:avLst/>
+          </a:prstGeom>
+          <a:solidFill>
+            <a:srgbClr val="003366"/>
+          </a:solidFill>
+          <a:ln>
+            <a:noFill/>
+          </a:ln>
+        </p:spPr>
+        <p:style>
+          <a:lnRef idx="1">
+            <a:schemeClr val="accent1"/>
+          </a:lnRef>
+          <a:fillRef idx="3">
+            <a:schemeClr val="accent1"/>
+          </a:fillRef>
+          <a:effectRef idx="2">
+            <a:schemeClr val="accent1"/>
+          </a:effectRef>
+          <a:fontRef idx="minor">
+            <a:schemeClr val="lt1"/>
+          </a:fontRef>
+        </p:style>
+        <p:txBody>
+          <a:bodyPr rtlCol="0" anchor="ctr"/>
+          <a:lstStyle/>
+          <a:p>
+            <a:pPr algn="ctr"/>
+            <a:endParaRPr/>
+          </a:p>
+        </p:txBody>
+      </p:sp>
+      <p:sp>
+        <p:nvSpPr>
+          <p:cNvPr id="4" name="TextBox 3"/>
+          <p:cNvSpPr txBox="1"/>
+          <p:nvPr/>
+        </p:nvSpPr>
+        <p:spPr>
+          <a:xfrm>
+            <a:off x="457200" y="6492240"/>
+            <a:ext cx="8229600" cy="365760"/>
+          </a:xfrm>
+          <a:prstGeom prst="rect">
+            <a:avLst/>
+          </a:prstGeom>
+          <a:noFill/>
+        </p:spPr>
+        <p:txBody>
+          <a:bodyPr wrap="none">
+            <a:spAutoFit/>
+          </a:bodyPr>
+          <a:lstStyle/>
+          <a:p>
+            <a:pPr>
+              <a:defRPr sz="1200" b="1">
+                <a:solidFill>
+                  <a:srgbClr val="787878"/>
+                </a:solidFill>
+                <a:latin typeface="Microsoft YaHei"/>
+              </a:defRPr>
+            </a:pPr>
+            <a:r>
+              <a:t>RJ2506 双臂轮式复合机器人 | 核心技术攻坚与系统架构</a:t>
+            </a:r>
+          </a:p>
+        </p:txBody>
+      </p:sp>
+      <p:sp>
+        <p:nvSpPr>
+          <p:cNvPr id="5" name="TextBox 4"/>
+          <p:cNvSpPr txBox="1"/>
+          <p:nvPr/>
+        </p:nvSpPr>
+        <p:spPr>
+          <a:xfrm>
+            <a:off x="914400" y="1585063"/>
+            <a:ext cx="7315200" cy="4116704"/>
+          </a:xfrm>
+          <a:prstGeom prst="rect">
+            <a:avLst/>
+          </a:prstGeom>
+          <a:noFill/>
+        </p:spPr>
+        <p:txBody>
+          <a:bodyPr wrap="square">
+            <a:spAutoFit/>
+          </a:bodyPr>
+          <a:lstStyle/>
+          <a:p>
+            <a:endParaRPr sz="900" dirty="0"/>
+          </a:p>
+          <a:p>
+            <a:pPr>
+              <a:lnSpc>
+                <a:spcPct val="110000"/>
+              </a:lnSpc>
+              <a:spcBef>
+                <a:spcPts val="500"/>
+              </a:spcBef>
+              <a:defRPr sz="2200" b="1">
+                <a:solidFill>
+                  <a:srgbClr val="003366"/>
+                </a:solidFill>
+                <a:latin typeface="Microsoft YaHei"/>
+              </a:defRPr>
+            </a:pPr>
+            <a:r>
+              <a:rPr sz="2000" dirty="0" err="1"/>
+              <a:t>核心硬件平台</a:t>
+            </a:r>
+            <a:endParaRPr sz="2000" dirty="0"/>
+          </a:p>
+          <a:p>
+            <a:pPr lvl="1">
+              <a:lnSpc>
+                <a:spcPct val="110000"/>
+              </a:lnSpc>
+              <a:spcBef>
+                <a:spcPts val="500"/>
+              </a:spcBef>
+              <a:defRPr sz="1900" b="0">
+                <a:solidFill>
+                  <a:srgbClr val="333333"/>
+                </a:solidFill>
+                <a:latin typeface="Microsoft YaHei"/>
+              </a:defRPr>
+            </a:pPr>
+            <a:r>
+              <a:rPr dirty="0"/>
+              <a:t>RJ2506 </a:t>
+            </a:r>
+            <a:r>
+              <a:rPr dirty="0" err="1"/>
+              <a:t>差速底盘</a:t>
+            </a:r>
+            <a:r>
+              <a:rPr dirty="0"/>
+              <a:t> + </a:t>
+            </a:r>
+            <a:r>
+              <a:rPr dirty="0" err="1"/>
+              <a:t>躯干控制器</a:t>
+            </a:r>
+            <a:endParaRPr dirty="0"/>
+          </a:p>
+          <a:p>
+            <a:pPr lvl="1">
+              <a:lnSpc>
+                <a:spcPct val="110000"/>
+              </a:lnSpc>
+              <a:spcBef>
+                <a:spcPts val="500"/>
+              </a:spcBef>
+              <a:defRPr sz="1900" b="0">
+                <a:solidFill>
+                  <a:srgbClr val="333333"/>
+                </a:solidFill>
+                <a:latin typeface="Microsoft YaHei"/>
+              </a:defRPr>
+            </a:pPr>
+            <a:r>
+              <a:rPr dirty="0" err="1"/>
+              <a:t>双机械臂</a:t>
+            </a:r>
+            <a:r>
+              <a:rPr dirty="0"/>
+              <a:t> (</a:t>
+            </a:r>
+            <a:r>
+              <a:rPr dirty="0" err="1"/>
+              <a:t>单臂负载</a:t>
+            </a:r>
+            <a:r>
+              <a:rPr dirty="0"/>
+              <a:t> 15kg，协同 30kg)</a:t>
+            </a:r>
+          </a:p>
+          <a:p>
+            <a:pPr lvl="1">
+              <a:lnSpc>
+                <a:spcPct val="110000"/>
+              </a:lnSpc>
+              <a:spcBef>
+                <a:spcPts val="500"/>
+              </a:spcBef>
+              <a:defRPr sz="1900" b="0">
+                <a:solidFill>
+                  <a:srgbClr val="333333"/>
+                </a:solidFill>
+                <a:latin typeface="Microsoft YaHei"/>
+              </a:defRPr>
+            </a:pPr>
+            <a:r>
+              <a:rPr dirty="0" err="1"/>
+              <a:t>左右平行夹爪</a:t>
+            </a:r>
+            <a:endParaRPr dirty="0"/>
+          </a:p>
+          <a:p>
+            <a:pPr lvl="1">
+              <a:lnSpc>
+                <a:spcPct val="110000"/>
+              </a:lnSpc>
+              <a:spcBef>
+                <a:spcPts val="500"/>
+              </a:spcBef>
+              <a:defRPr sz="1900" b="0">
+                <a:solidFill>
+                  <a:srgbClr val="333333"/>
+                </a:solidFill>
+                <a:latin typeface="Microsoft YaHei"/>
+              </a:defRPr>
+            </a:pPr>
+            <a:r>
+              <a:rPr dirty="0" err="1"/>
+              <a:t>头部全局相机</a:t>
+            </a:r>
+            <a:r>
+              <a:rPr dirty="0"/>
+              <a:t>(OAK-D) + </a:t>
+            </a:r>
+            <a:r>
+              <a:rPr dirty="0" err="1"/>
+              <a:t>手腕局部相机</a:t>
+            </a:r>
+            <a:endParaRPr dirty="0"/>
+          </a:p>
+          <a:p>
+            <a:pPr>
+              <a:lnSpc>
+                <a:spcPct val="110000"/>
+              </a:lnSpc>
+              <a:spcBef>
+                <a:spcPts val="500"/>
+              </a:spcBef>
+              <a:defRPr sz="2200" b="1">
+                <a:solidFill>
+                  <a:srgbClr val="003366"/>
+                </a:solidFill>
+                <a:latin typeface="Microsoft YaHei"/>
+              </a:defRPr>
+            </a:pPr>
+            <a:r>
+              <a:rPr sz="2000" dirty="0" err="1"/>
+              <a:t>计算平台与系统</a:t>
+            </a:r>
+            <a:endParaRPr sz="2000" dirty="0"/>
+          </a:p>
+          <a:p>
+            <a:pPr lvl="1">
+              <a:lnSpc>
+                <a:spcPct val="110000"/>
+              </a:lnSpc>
+              <a:spcBef>
+                <a:spcPts val="500"/>
+              </a:spcBef>
+              <a:defRPr sz="1900" b="0">
+                <a:solidFill>
+                  <a:srgbClr val="333333"/>
+                </a:solidFill>
+                <a:latin typeface="Microsoft YaHei"/>
+              </a:defRPr>
+            </a:pPr>
+            <a:r>
+              <a:rPr dirty="0"/>
+              <a:t>NVIDIA Jetson Orin</a:t>
+            </a:r>
+          </a:p>
+          <a:p>
+            <a:pPr>
+              <a:lnSpc>
+                <a:spcPct val="110000"/>
+              </a:lnSpc>
+              <a:spcBef>
+                <a:spcPts val="500"/>
+              </a:spcBef>
+              <a:defRPr sz="2200" b="1">
+                <a:solidFill>
+                  <a:srgbClr val="FF6600"/>
+                </a:solidFill>
+                <a:latin typeface="Microsoft YaHei"/>
+              </a:defRPr>
+            </a:pPr>
+            <a:r>
+              <a:rPr sz="2000" dirty="0" err="1"/>
+              <a:t>底层通信总线</a:t>
+            </a:r>
+            <a:endParaRPr sz="2000" dirty="0"/>
+          </a:p>
+          <a:p>
+            <a:pPr lvl="1">
+              <a:lnSpc>
+                <a:spcPct val="110000"/>
+              </a:lnSpc>
+              <a:spcBef>
+                <a:spcPts val="500"/>
+              </a:spcBef>
+              <a:defRPr sz="1900" b="0">
+                <a:solidFill>
+                  <a:srgbClr val="333333"/>
+                </a:solidFill>
+                <a:latin typeface="Microsoft YaHei"/>
+              </a:defRPr>
+            </a:pPr>
+            <a:r>
+              <a:rPr dirty="0" err="1"/>
+              <a:t>CANopen</a:t>
+            </a:r>
+            <a:r>
+              <a:rPr dirty="0"/>
+              <a:t> (1000Hz) - </a:t>
+            </a:r>
+            <a:r>
+              <a:rPr dirty="0" err="1"/>
+              <a:t>控制</a:t>
+            </a:r>
+            <a:r>
+              <a:rPr dirty="0"/>
+              <a:t> 14 </a:t>
+            </a:r>
+            <a:r>
+              <a:rPr dirty="0" err="1"/>
+              <a:t>轴电机</a:t>
+            </a:r>
+            <a:endParaRPr dirty="0"/>
+          </a:p>
+          <a:p>
+            <a:pPr lvl="1">
+              <a:lnSpc>
+                <a:spcPct val="110000"/>
+              </a:lnSpc>
+              <a:spcBef>
+                <a:spcPts val="500"/>
+              </a:spcBef>
+              <a:defRPr sz="1900" b="0">
+                <a:solidFill>
+                  <a:srgbClr val="333333"/>
+                </a:solidFill>
+                <a:latin typeface="Microsoft YaHei"/>
+              </a:defRPr>
+            </a:pPr>
+            <a:r>
+              <a:rPr dirty="0"/>
+              <a:t>RS-485 (50Hz) - </a:t>
+            </a:r>
+            <a:r>
+              <a:rPr dirty="0" err="1"/>
+              <a:t>控制双侧夹爪</a:t>
+            </a:r>
+            <a:endParaRPr dirty="0"/>
+          </a:p>
+        </p:txBody>
+      </p:sp>
+    </p:spTree>
+  </p:cSld>
+  <p:clrMapOvr>
+    <a:masterClrMapping/>
+  </p:clrMapOvr>
+</p:sld>
+</file>
+
+<file path=ppt/slides/slide6.xml><?xml version="1.0" encoding="utf-8"?>
+<p:sld xmlns:a="http://schemas.openxmlformats.org/drawingml/2006/main" xmlns:r="http://schemas.openxmlformats.org/officeDocument/2006/relationships" xmlns:p="http://schemas.openxmlformats.org/presentationml/2006/main">
+  <p:cSld>
+    <p:bg>
+      <p:bgPr>
+        <a:solidFill>
+          <a:srgbClr val="F5F7FA"/>
+        </a:solidFill>
+        <a:effectLst/>
+      </p:bgPr>
+    </p:bg>
+    <p:spTree>
+      <p:nvGrpSpPr>
+        <p:cNvPr id="1" name=""/>
+        <p:cNvGrpSpPr/>
+        <p:nvPr/>
+      </p:nvGrpSpPr>
+      <p:grpSpPr>
+        <a:xfrm>
+          <a:off x="0" y="0"/>
+          <a:ext cx="0" cy="0"/>
+          <a:chOff x="0" y="0"/>
+          <a:chExt cx="0" cy="0"/>
+        </a:xfrm>
+      </p:grpSpPr>
+      <p:sp>
+        <p:nvSpPr>
+          <p:cNvPr id="2" name="Title 1"/>
+          <p:cNvSpPr>
+            <a:spLocks noGrp="1"/>
+          </p:cNvSpPr>
+          <p:nvPr>
+            <p:ph type="title"/>
+          </p:nvPr>
+        </p:nvSpPr>
+        <p:spPr/>
+        <p:txBody>
+          <a:bodyPr>
+            <a:normAutofit/>
+          </a:bodyPr>
+          <a:lstStyle/>
+          <a:p>
+            <a:pPr>
+              <a:defRPr b="1">
+                <a:solidFill>
+                  <a:srgbClr val="003366"/>
+                </a:solidFill>
+                <a:latin typeface="Microsoft YaHei"/>
+              </a:defRPr>
+            </a:pPr>
+            <a:r>
+              <a:rPr sz="4000" dirty="0" err="1"/>
+              <a:t>全局软件架构：八段式控制管线</a:t>
+            </a:r>
+            <a:endParaRPr sz="4000" dirty="0"/>
+          </a:p>
+        </p:txBody>
+      </p:sp>
+      <p:sp>
+        <p:nvSpPr>
+          <p:cNvPr id="3" name="Rectangle 2"/>
+          <p:cNvSpPr/>
+          <p:nvPr/>
+        </p:nvSpPr>
+        <p:spPr>
+          <a:xfrm>
+            <a:off x="0" y="0"/>
+            <a:ext cx="9144000" cy="137160"/>
+          </a:xfrm>
+          <a:prstGeom prst="rect">
+            <a:avLst/>
+          </a:prstGeom>
+          <a:solidFill>
+            <a:srgbClr val="003366"/>
+          </a:solidFill>
+          <a:ln>
+            <a:noFill/>
+          </a:ln>
+        </p:spPr>
+        <p:style>
+          <a:lnRef idx="1">
+            <a:schemeClr val="accent1"/>
+          </a:lnRef>
+          <a:fillRef idx="3">
+            <a:schemeClr val="accent1"/>
+          </a:fillRef>
+          <a:effectRef idx="2">
+            <a:schemeClr val="accent1"/>
+          </a:effectRef>
+          <a:fontRef idx="minor">
+            <a:schemeClr val="lt1"/>
+          </a:fontRef>
+        </p:style>
+        <p:txBody>
+          <a:bodyPr rtlCol="0" anchor="ctr"/>
+          <a:lstStyle/>
+          <a:p>
+            <a:pPr algn="ctr"/>
+            <a:endParaRPr/>
           </a:p>
         </p:txBody>
       </p:sp>
@@ -4586,7 +6067,7 @@
           <a:lstStyle/>
           <a:p>
             <a:pPr>
-              <a:defRPr b="1" sz="1600">
+              <a:defRPr sz="1600" b="1">
                 <a:solidFill>
                   <a:srgbClr val="FFFFFF"/>
                 </a:solidFill>
@@ -4631,7 +6112,7 @@
           </a:fontRef>
         </p:style>
         <p:txBody>
-          <a:bodyPr rtlCol="0" anchor="ctr" wrap="square"/>
+          <a:bodyPr wrap="square" rtlCol="0" anchor="ctr"/>
           <a:lstStyle/>
           <a:p>
             <a:pPr algn="ctr">
@@ -4682,6 +6163,7 @@
           <a:lstStyle/>
           <a:p>
             <a:pPr algn="ctr"/>
+            <a:endParaRPr/>
           </a:p>
         </p:txBody>
       </p:sp>
@@ -4718,7 +6200,7 @@
           </a:fontRef>
         </p:style>
         <p:txBody>
-          <a:bodyPr rtlCol="0" anchor="ctr" wrap="square"/>
+          <a:bodyPr wrap="square" rtlCol="0" anchor="ctr"/>
           <a:lstStyle/>
           <a:p>
             <a:pPr algn="ctr">
@@ -4769,6 +6251,7 @@
           <a:lstStyle/>
           <a:p>
             <a:pPr algn="ctr"/>
+            <a:endParaRPr/>
           </a:p>
         </p:txBody>
       </p:sp>
@@ -4805,7 +6288,7 @@
           </a:fontRef>
         </p:style>
         <p:txBody>
-          <a:bodyPr rtlCol="0" anchor="ctr" wrap="square"/>
+          <a:bodyPr wrap="square" rtlCol="0" anchor="ctr"/>
           <a:lstStyle/>
           <a:p>
             <a:pPr algn="ctr">
@@ -4856,6 +6339,7 @@
           <a:lstStyle/>
           <a:p>
             <a:pPr algn="ctr"/>
+            <a:endParaRPr/>
           </a:p>
         </p:txBody>
       </p:sp>
@@ -4892,7 +6376,7 @@
           </a:fontRef>
         </p:style>
         <p:txBody>
-          <a:bodyPr rtlCol="0" anchor="ctr" wrap="square"/>
+          <a:bodyPr wrap="square" rtlCol="0" anchor="ctr"/>
           <a:lstStyle/>
           <a:p>
             <a:pPr algn="ctr">
@@ -4946,7 +6430,7 @@
           </a:fontRef>
         </p:style>
         <p:txBody>
-          <a:bodyPr rtlCol="0" anchor="ctr" wrap="square"/>
+          <a:bodyPr wrap="square" rtlCol="0" anchor="ctr"/>
           <a:lstStyle/>
           <a:p>
             <a:pPr algn="ctr">
@@ -4997,6 +6481,7 @@
           <a:lstStyle/>
           <a:p>
             <a:pPr algn="ctr"/>
+            <a:endParaRPr/>
           </a:p>
         </p:txBody>
       </p:sp>
@@ -5038,7 +6523,7 @@
           </a:fontRef>
         </p:style>
         <p:txBody>
-          <a:bodyPr rtlCol="0" anchor="ctr" wrap="square"/>
+          <a:bodyPr wrap="square" rtlCol="0" anchor="ctr"/>
           <a:lstStyle/>
           <a:p>
             <a:pPr algn="ctr">
@@ -5089,6 +6574,7 @@
           <a:lstStyle/>
           <a:p>
             <a:pPr algn="ctr"/>
+            <a:endParaRPr/>
           </a:p>
         </p:txBody>
       </p:sp>
@@ -5125,7 +6611,7 @@
           </a:fontRef>
         </p:style>
         <p:txBody>
-          <a:bodyPr rtlCol="0" anchor="ctr" wrap="square"/>
+          <a:bodyPr wrap="square" rtlCol="0" anchor="ctr"/>
           <a:lstStyle/>
           <a:p>
             <a:pPr algn="ctr">
@@ -5176,6 +6662,7 @@
           <a:lstStyle/>
           <a:p>
             <a:pPr algn="ctr"/>
+            <a:endParaRPr/>
           </a:p>
         </p:txBody>
       </p:sp>
@@ -5212,7 +6699,7 @@
           </a:fontRef>
         </p:style>
         <p:txBody>
-          <a:bodyPr rtlCol="0" anchor="ctr" wrap="square"/>
+          <a:bodyPr wrap="square" rtlCol="0" anchor="ctr"/>
           <a:lstStyle/>
           <a:p>
             <a:pPr algn="ctr">
@@ -5236,8 +6723,8 @@
 </p:sld>
 </file>
 
-<file path=ppt/slides/slide5.xml><?xml version="1.0" encoding="utf-8"?>
-<p:sld xmlns:a="http://schemas.openxmlformats.org/drawingml/2006/main" xmlns:p="http://schemas.openxmlformats.org/presentationml/2006/main" xmlns:r="http://schemas.openxmlformats.org/officeDocument/2006/relationships">
+<file path=ppt/slides/slide7.xml><?xml version="1.0" encoding="utf-8"?>
+<p:sld xmlns:a="http://schemas.openxmlformats.org/drawingml/2006/main" xmlns:r="http://schemas.openxmlformats.org/officeDocument/2006/relationships" xmlns:p="http://schemas.openxmlformats.org/presentationml/2006/main">
   <p:cSld>
     <p:bg>
       <p:bgPr>
@@ -5253,7 +6740,14 @@
         <p:cNvGrpSpPr/>
         <p:nvPr/>
       </p:nvGrpSpPr>
-      <p:grpSpPr/>
+      <p:grpSpPr>
+        <a:xfrm>
+          <a:off x="0" y="0"/>
+          <a:ext cx="0" cy="0"/>
+          <a:chOff x="0" y="0"/>
+          <a:chExt cx="0" cy="0"/>
+        </a:xfrm>
+      </p:grpSpPr>
       <p:sp>
         <p:nvSpPr>
           <p:cNvPr id="2" name="Title 1"/>
@@ -5266,7 +6760,9 @@
         </p:nvSpPr>
         <p:spPr/>
         <p:txBody>
-          <a:bodyPr/>
+          <a:bodyPr>
+            <a:normAutofit/>
+          </a:bodyPr>
           <a:lstStyle/>
           <a:p>
             <a:pPr>
@@ -5278,7 +6774,12 @@
               </a:defRPr>
             </a:pPr>
             <a:r>
-              <a:t>为什么采用这套管线设计？</a:t>
+              <a:rPr sz="4000" dirty="0" err="1"/>
+              <a:t>为什么采用这套管线设计</a:t>
+            </a:r>
+            <a:r>
+              <a:rPr sz="4000" dirty="0"/>
+              <a:t>？</a:t>
             </a:r>
           </a:p>
         </p:txBody>
@@ -5323,6 +6824,7 @@
           <a:lstStyle/>
           <a:p>
             <a:pPr algn="ctr"/>
+            <a:endParaRPr/>
           </a:p>
         </p:txBody>
       </p:sp>
@@ -5400,11 +6902,11 @@
           </a:fontRef>
         </p:style>
         <p:txBody>
-          <a:bodyPr rtlCol="0" anchor="ctr" wrap="square"/>
+          <a:bodyPr wrap="square" rtlCol="0" anchor="ctr"/>
           <a:lstStyle/>
           <a:p>
             <a:pPr algn="ctr">
-              <a:defRPr b="1" sz="2600">
+              <a:defRPr sz="2600" b="1">
                 <a:solidFill>
                   <a:srgbClr val="C80000"/>
                 </a:solidFill>
@@ -5429,6 +6931,7 @@
                 <a:latin typeface="Microsoft YaHei"/>
               </a:defRPr>
             </a:pPr>
+            <a:endParaRPr/>
           </a:p>
           <a:p>
             <a:pPr lvl="1">
@@ -5581,6 +7084,7 @@
           <a:lstStyle/>
           <a:p>
             <a:pPr algn="ctr"/>
+            <a:endParaRPr/>
           </a:p>
         </p:txBody>
       </p:sp>
@@ -5622,11 +7126,11 @@
           </a:fontRef>
         </p:style>
         <p:txBody>
-          <a:bodyPr rtlCol="0" anchor="ctr" wrap="square"/>
+          <a:bodyPr wrap="square" rtlCol="0" anchor="ctr"/>
           <a:lstStyle/>
           <a:p>
             <a:pPr algn="ctr">
-              <a:defRPr b="1" sz="2600">
+              <a:defRPr sz="2600" b="1">
                 <a:solidFill>
                   <a:srgbClr val="009600"/>
                 </a:solidFill>
@@ -5651,6 +7155,7 @@
                 <a:latin typeface="Microsoft YaHei"/>
               </a:defRPr>
             </a:pPr>
+            <a:endParaRPr/>
           </a:p>
           <a:p>
             <a:pPr lvl="1">
@@ -5776,8 +7281,8 @@
 </p:sld>
 </file>
 
-<file path=ppt/slides/slide6.xml><?xml version="1.0" encoding="utf-8"?>
-<p:sld xmlns:a="http://schemas.openxmlformats.org/drawingml/2006/main" xmlns:p="http://schemas.openxmlformats.org/presentationml/2006/main" xmlns:r="http://schemas.openxmlformats.org/officeDocument/2006/relationships">
+<file path=ppt/slides/slide8.xml><?xml version="1.0" encoding="utf-8"?>
+<p:sld xmlns:a="http://schemas.openxmlformats.org/drawingml/2006/main" xmlns:r="http://schemas.openxmlformats.org/officeDocument/2006/relationships" xmlns:p="http://schemas.openxmlformats.org/presentationml/2006/main">
   <p:cSld>
     <p:bg>
       <p:bgPr>
@@ -5793,7 +7298,14 @@
         <p:cNvGrpSpPr/>
         <p:nvPr/>
       </p:nvGrpSpPr>
-      <p:grpSpPr/>
+      <p:grpSpPr>
+        <a:xfrm>
+          <a:off x="0" y="0"/>
+          <a:ext cx="0" cy="0"/>
+          <a:chOff x="0" y="0"/>
+          <a:chExt cx="0" cy="0"/>
+        </a:xfrm>
+      </p:grpSpPr>
       <p:sp>
         <p:nvSpPr>
           <p:cNvPr id="2" name="Title 1"/>
@@ -5806,7 +7318,9 @@
         </p:nvSpPr>
         <p:spPr/>
         <p:txBody>
-          <a:bodyPr/>
+          <a:bodyPr>
+            <a:normAutofit/>
+          </a:bodyPr>
           <a:lstStyle/>
           <a:p>
             <a:pPr>
@@ -5818,8 +7332,10 @@
               </a:defRPr>
             </a:pPr>
             <a:r>
+              <a:rPr sz="4000" dirty="0" err="1"/>
               <a:t>场景一：大框码料流程分析</a:t>
             </a:r>
+            <a:endParaRPr sz="4000" dirty="0"/>
           </a:p>
         </p:txBody>
       </p:sp>
@@ -5863,6 +7379,7 @@
           <a:lstStyle/>
           <a:p>
             <a:pPr algn="ctr"/>
+            <a:endParaRPr/>
           </a:p>
         </p:txBody>
       </p:sp>
@@ -5911,7 +7428,7 @@
         <p:spPr>
           <a:xfrm>
             <a:off x="457200" y="1371600"/>
-            <a:ext cx="8229600" cy="5029200"/>
+            <a:ext cx="8229600" cy="4205638"/>
           </a:xfrm>
           <a:prstGeom prst="rect">
             <a:avLst/>
@@ -5923,7 +7440,9 @@
             <a:spAutoFit/>
           </a:bodyPr>
           <a:lstStyle/>
-          <a:p/>
+          <a:p>
+            <a:endParaRPr sz="1400" dirty="0"/>
+          </a:p>
           <a:p>
             <a:pPr>
               <a:lnSpc>
@@ -5940,8 +7459,18 @@
               </a:defRPr>
             </a:pPr>
             <a:r>
-              <a:t>动作 1-3: 寻位与对齐</a:t>
-            </a:r>
+              <a:rPr sz="1400" dirty="0" err="1"/>
+              <a:t>动作</a:t>
+            </a:r>
+            <a:r>
+              <a:rPr sz="1400" dirty="0"/>
+              <a:t> 1-3: </a:t>
+            </a:r>
+            <a:r>
+              <a:rPr sz="1400" dirty="0" err="1"/>
+              <a:t>寻位与对齐</a:t>
+            </a:r>
+            <a:endParaRPr sz="1400" dirty="0"/>
           </a:p>
           <a:p>
             <a:pPr lvl="1">
@@ -5959,8 +7488,22 @@
               </a:defRPr>
             </a:pPr>
             <a:r>
-              <a:t>[1] 触发备料: 从待机休眠模式唤醒，确认双臂处于安全行车姿态</a:t>
-            </a:r>
+              <a:rPr sz="1400" dirty="0"/>
+              <a:t>[1] </a:t>
+            </a:r>
+            <a:r>
+              <a:rPr sz="1400" dirty="0" err="1"/>
+              <a:t>触发备料</a:t>
+            </a:r>
+            <a:r>
+              <a:rPr sz="1400" dirty="0"/>
+              <a:t>: </a:t>
+            </a:r>
+            <a:r>
+              <a:rPr sz="1400" dirty="0" err="1"/>
+              <a:t>从待机休眠模式唤醒，确认双臂处于安全行车姿态</a:t>
+            </a:r>
+            <a:endParaRPr sz="1400" dirty="0"/>
           </a:p>
           <a:p>
             <a:pPr lvl="1">
@@ -5978,8 +7521,22 @@
               </a:defRPr>
             </a:pPr>
             <a:r>
-              <a:t>[2] 宏观导航: 底盘导航并宽容停靠在冲压下料平台前</a:t>
-            </a:r>
+              <a:rPr sz="1400" dirty="0"/>
+              <a:t>[2] </a:t>
+            </a:r>
+            <a:r>
+              <a:rPr sz="1400" dirty="0" err="1"/>
+              <a:t>宏观导航</a:t>
+            </a:r>
+            <a:r>
+              <a:rPr sz="1400" dirty="0"/>
+              <a:t>: </a:t>
+            </a:r>
+            <a:r>
+              <a:rPr sz="1400" dirty="0" err="1"/>
+              <a:t>底盘导航并宽容停靠在冲压下料平台前</a:t>
+            </a:r>
+            <a:endParaRPr sz="1400" dirty="0"/>
           </a:p>
           <a:p>
             <a:pPr lvl="1">
@@ -5997,8 +7554,22 @@
               </a:defRPr>
             </a:pPr>
             <a:r>
-              <a:t>[3] 物理顺应: 双手伸出抵住下料平台边缘，利用阻抗控制将自身位姿卡死对齐</a:t>
-            </a:r>
+              <a:rPr sz="1400" dirty="0"/>
+              <a:t>[3] </a:t>
+            </a:r>
+            <a:r>
+              <a:rPr sz="1400" dirty="0" err="1"/>
+              <a:t>物理顺应</a:t>
+            </a:r>
+            <a:r>
+              <a:rPr sz="1400" dirty="0"/>
+              <a:t>: </a:t>
+            </a:r>
+            <a:r>
+              <a:rPr sz="1400" dirty="0" err="1"/>
+              <a:t>双手伸出抵住下料平台边缘，利用阻抗控制将自身位姿卡死对齐</a:t>
+            </a:r>
+            <a:endParaRPr sz="1400" dirty="0"/>
           </a:p>
           <a:p>
             <a:pPr>
@@ -6015,6 +7586,7 @@
                 <a:latin typeface="Microsoft YaHei"/>
               </a:defRPr>
             </a:pPr>
+            <a:endParaRPr sz="1400" dirty="0"/>
           </a:p>
           <a:p>
             <a:pPr>
@@ -6032,8 +7604,18 @@
               </a:defRPr>
             </a:pPr>
             <a:r>
-              <a:t>动作 4-6: 抓取与放置</a:t>
-            </a:r>
+              <a:rPr sz="1400" dirty="0" err="1"/>
+              <a:t>动作</a:t>
+            </a:r>
+            <a:r>
+              <a:rPr sz="1400" dirty="0"/>
+              <a:t> 4-6: </a:t>
+            </a:r>
+            <a:r>
+              <a:rPr sz="1400" dirty="0" err="1"/>
+              <a:t>抓取与放置</a:t>
+            </a:r>
+            <a:endParaRPr sz="1400" dirty="0"/>
           </a:p>
           <a:p>
             <a:pPr lvl="1">
@@ -6051,8 +7633,30 @@
               </a:defRPr>
             </a:pPr>
             <a:r>
-              <a:t>[4] 大尺度抓取: 视觉输出协作轨迹，双手准确抓取 5-6 片大料片</a:t>
-            </a:r>
+              <a:rPr sz="1400" dirty="0"/>
+              <a:t>[4] </a:t>
+            </a:r>
+            <a:r>
+              <a:rPr sz="1400" dirty="0" err="1"/>
+              <a:t>大尺度抓取</a:t>
+            </a:r>
+            <a:r>
+              <a:rPr sz="1400" dirty="0"/>
+              <a:t>: </a:t>
+            </a:r>
+            <a:r>
+              <a:rPr sz="1400" dirty="0" err="1"/>
+              <a:t>视觉输出协作轨迹，双手准确抓取</a:t>
+            </a:r>
+            <a:r>
+              <a:rPr sz="1400" dirty="0"/>
+              <a:t> 5-6 </a:t>
+            </a:r>
+            <a:r>
+              <a:rPr sz="1400" dirty="0" err="1"/>
+              <a:t>片大料片</a:t>
+            </a:r>
+            <a:endParaRPr sz="1400" dirty="0"/>
           </a:p>
           <a:p>
             <a:pPr lvl="1">
@@ -6070,7 +7674,16 @@
               </a:defRPr>
             </a:pPr>
             <a:r>
-              <a:t>[5] 高空记忆: 转身移动到大框旁边，在大框上方15cm处悬停，记录边角特征</a:t>
+              <a:rPr sz="1400" dirty="0"/>
+              <a:t>[5] </a:t>
+            </a:r>
+            <a:r>
+              <a:rPr sz="1400" dirty="0" err="1"/>
+              <a:t>高空记忆</a:t>
+            </a:r>
+            <a:r>
+              <a:rPr sz="1400" dirty="0"/>
+              <a:t>: 转身移动到大框旁边，在大框上方15cm处悬停，记录边角特征</a:t>
             </a:r>
           </a:p>
           <a:p>
@@ -6089,8 +7702,22 @@
               </a:defRPr>
             </a:pPr>
             <a:r>
-              <a:t>[6] 微插闭环: 带着宽大的料片往下放，视线全盲，切入虚拟算法实时修正姿态</a:t>
-            </a:r>
+              <a:rPr sz="1400" dirty="0"/>
+              <a:t>[6] </a:t>
+            </a:r>
+            <a:r>
+              <a:rPr sz="1400" dirty="0" err="1"/>
+              <a:t>微插闭环</a:t>
+            </a:r>
+            <a:r>
+              <a:rPr sz="1400" dirty="0"/>
+              <a:t>: </a:t>
+            </a:r>
+            <a:r>
+              <a:rPr sz="1400" dirty="0" err="1"/>
+              <a:t>带着宽大的料片往下放，视线全盲，切入虚拟算法实时修正姿态</a:t>
+            </a:r>
+            <a:endParaRPr sz="1400" dirty="0"/>
           </a:p>
           <a:p>
             <a:pPr>
@@ -6107,6 +7734,7 @@
                 <a:latin typeface="Microsoft YaHei"/>
               </a:defRPr>
             </a:pPr>
+            <a:endParaRPr sz="1400" dirty="0"/>
           </a:p>
           <a:p>
             <a:pPr>
@@ -6124,8 +7752,18 @@
               </a:defRPr>
             </a:pPr>
             <a:r>
-              <a:t>动作 7-8: 完成与复位</a:t>
-            </a:r>
+              <a:rPr sz="1400" dirty="0" err="1"/>
+              <a:t>动作</a:t>
+            </a:r>
+            <a:r>
+              <a:rPr sz="1400" dirty="0"/>
+              <a:t> 7-8: </a:t>
+            </a:r>
+            <a:r>
+              <a:rPr sz="1400" dirty="0" err="1"/>
+              <a:t>完成与复位</a:t>
+            </a:r>
+            <a:endParaRPr sz="1400" dirty="0"/>
           </a:p>
           <a:p>
             <a:pPr lvl="1">
@@ -6143,8 +7781,22 @@
               </a:defRPr>
             </a:pPr>
             <a:r>
-              <a:t>[7] 触底释放: 监听Z轴电流突变感知放到底部，双侧夹爪同步松手</a:t>
-            </a:r>
+              <a:rPr sz="1400" dirty="0"/>
+              <a:t>[7] </a:t>
+            </a:r>
+            <a:r>
+              <a:rPr sz="1400" dirty="0" err="1"/>
+              <a:t>触底释放</a:t>
+            </a:r>
+            <a:r>
+              <a:rPr sz="1400" dirty="0"/>
+              <a:t>: </a:t>
+            </a:r>
+            <a:r>
+              <a:rPr sz="1400" dirty="0" err="1"/>
+              <a:t>监听Z轴电流突变感知放到底部，双侧夹爪同步松手</a:t>
+            </a:r>
+            <a:endParaRPr sz="1400" dirty="0"/>
           </a:p>
           <a:p>
             <a:pPr lvl="1">
@@ -6162,8 +7814,22 @@
               </a:defRPr>
             </a:pPr>
             <a:r>
-              <a:t>[8] 复位回程: 双臂退回安全姿态，完成一次循环，系统复位</a:t>
-            </a:r>
+              <a:rPr sz="1400" dirty="0"/>
+              <a:t>[8] </a:t>
+            </a:r>
+            <a:r>
+              <a:rPr sz="1400" dirty="0" err="1"/>
+              <a:t>复位回程</a:t>
+            </a:r>
+            <a:r>
+              <a:rPr sz="1400" dirty="0"/>
+              <a:t>: </a:t>
+            </a:r>
+            <a:r>
+              <a:rPr sz="1400" dirty="0" err="1"/>
+              <a:t>双臂退回安全姿态，完成一次循环，系统复位</a:t>
+            </a:r>
+            <a:endParaRPr sz="1400" dirty="0"/>
           </a:p>
         </p:txBody>
       </p:sp>
@@ -6175,8 +7841,8 @@
 </p:sld>
 </file>
 
-<file path=ppt/slides/slide7.xml><?xml version="1.0" encoding="utf-8"?>
-<p:sld xmlns:a="http://schemas.openxmlformats.org/drawingml/2006/main" xmlns:p="http://schemas.openxmlformats.org/presentationml/2006/main" xmlns:r="http://schemas.openxmlformats.org/officeDocument/2006/relationships">
+<file path=ppt/slides/slide9.xml><?xml version="1.0" encoding="utf-8"?>
+<p:sld xmlns:a="http://schemas.openxmlformats.org/drawingml/2006/main" xmlns:r="http://schemas.openxmlformats.org/officeDocument/2006/relationships" xmlns:p="http://schemas.openxmlformats.org/presentationml/2006/main">
   <p:cSld>
     <p:bg>
       <p:bgPr>
@@ -6192,7 +7858,14 @@
         <p:cNvGrpSpPr/>
         <p:nvPr/>
       </p:nvGrpSpPr>
-      <p:grpSpPr/>
+      <p:grpSpPr>
+        <a:xfrm>
+          <a:off x="0" y="0"/>
+          <a:ext cx="0" cy="0"/>
+          <a:chOff x="0" y="0"/>
+          <a:chExt cx="0" cy="0"/>
+        </a:xfrm>
+      </p:grpSpPr>
       <p:sp>
         <p:nvSpPr>
           <p:cNvPr id="2" name="Title 1"/>
@@ -6205,7 +7878,9 @@
         </p:nvSpPr>
         <p:spPr/>
         <p:txBody>
-          <a:bodyPr/>
+          <a:bodyPr>
+            <a:noAutofit/>
+          </a:bodyPr>
           <a:lstStyle/>
           <a:p>
             <a:pPr>
@@ -6217,8 +7892,10 @@
               </a:defRPr>
             </a:pPr>
             <a:r>
+              <a:rPr sz="4000" dirty="0" err="1"/>
               <a:t>场景二：小框换框与码垛流程分析</a:t>
             </a:r>
+            <a:endParaRPr sz="4000" dirty="0"/>
           </a:p>
         </p:txBody>
       </p:sp>
@@ -6262,6 +7939,7 @@
           <a:lstStyle/>
           <a:p>
             <a:pPr algn="ctr"/>
+            <a:endParaRPr/>
           </a:p>
         </p:txBody>
       </p:sp>
@@ -6310,7 +7988,7 @@
         <p:spPr>
           <a:xfrm>
             <a:off x="457200" y="1371600"/>
-            <a:ext cx="8229600" cy="5029200"/>
+            <a:ext cx="8229600" cy="4205638"/>
           </a:xfrm>
           <a:prstGeom prst="rect">
             <a:avLst/>
@@ -6322,7 +8000,9 @@
             <a:spAutoFit/>
           </a:bodyPr>
           <a:lstStyle/>
-          <a:p/>
+          <a:p>
+            <a:endParaRPr sz="1400" dirty="0"/>
+          </a:p>
           <a:p>
             <a:pPr>
               <a:lnSpc>
@@ -6339,8 +8019,18 @@
               </a:defRPr>
             </a:pPr>
             <a:r>
-              <a:t>动作 1-3: 物理替换</a:t>
-            </a:r>
+              <a:rPr sz="1400" dirty="0" err="1"/>
+              <a:t>动作</a:t>
+            </a:r>
+            <a:r>
+              <a:rPr sz="1400" dirty="0"/>
+              <a:t> 1-3: </a:t>
+            </a:r>
+            <a:r>
+              <a:rPr sz="1400" dirty="0" err="1"/>
+              <a:t>物理替换</a:t>
+            </a:r>
+            <a:endParaRPr sz="1400" dirty="0"/>
           </a:p>
           <a:p>
             <a:pPr lvl="1">
@@ -6358,8 +8048,22 @@
               </a:defRPr>
             </a:pPr>
             <a:r>
-              <a:t>[1] 触发备料: 唤醒后，指引底盘先前往空框区，抓取一个空框作为替换弹药</a:t>
-            </a:r>
+              <a:rPr sz="1400" dirty="0"/>
+              <a:t>[1] </a:t>
+            </a:r>
+            <a:r>
+              <a:rPr sz="1400" dirty="0" err="1"/>
+              <a:t>触发备料</a:t>
+            </a:r>
+            <a:r>
+              <a:rPr sz="1400" dirty="0"/>
+              <a:t>: </a:t>
+            </a:r>
+            <a:r>
+              <a:rPr sz="1400" dirty="0" err="1"/>
+              <a:t>唤醒后，指引底盘先前往空框区，抓取一个空框作为替换弹药</a:t>
+            </a:r>
+            <a:endParaRPr sz="1400" dirty="0"/>
           </a:p>
           <a:p>
             <a:pPr lvl="1">
@@ -6377,8 +8081,22 @@
               </a:defRPr>
             </a:pPr>
             <a:r>
-              <a:t>[2] 宏观导航: 带着空框移动到冲压机台下料口停靠</a:t>
-            </a:r>
+              <a:rPr sz="1400" dirty="0"/>
+              <a:t>[2] </a:t>
+            </a:r>
+            <a:r>
+              <a:rPr sz="1400" dirty="0" err="1"/>
+              <a:t>宏观导航</a:t>
+            </a:r>
+            <a:r>
+              <a:rPr sz="1400" dirty="0"/>
+              <a:t>: </a:t>
+            </a:r>
+            <a:r>
+              <a:rPr sz="1400" dirty="0" err="1"/>
+              <a:t>带着空框移动到冲压机台下料口停靠</a:t>
+            </a:r>
+            <a:endParaRPr sz="1400" dirty="0"/>
           </a:p>
           <a:p>
             <a:pPr lvl="1">
@@ -6396,8 +8114,22 @@
               </a:defRPr>
             </a:pPr>
             <a:r>
-              <a:t>[3] 物理顺应: 用手里的空框顺着机台导轨往里推，顺势把满框顶出来</a:t>
-            </a:r>
+              <a:rPr sz="1400" dirty="0"/>
+              <a:t>[3] </a:t>
+            </a:r>
+            <a:r>
+              <a:rPr sz="1400" dirty="0" err="1"/>
+              <a:t>物理顺应</a:t>
+            </a:r>
+            <a:r>
+              <a:rPr sz="1400" dirty="0"/>
+              <a:t>: </a:t>
+            </a:r>
+            <a:r>
+              <a:rPr sz="1400" dirty="0" err="1"/>
+              <a:t>用手里的空框顺着机台导轨往里推，顺势把满框顶出来</a:t>
+            </a:r>
+            <a:endParaRPr sz="1400" dirty="0"/>
           </a:p>
           <a:p>
             <a:pPr>
@@ -6414,6 +8146,7 @@
                 <a:latin typeface="Microsoft YaHei"/>
               </a:defRPr>
             </a:pPr>
+            <a:endParaRPr sz="1400" dirty="0"/>
           </a:p>
           <a:p>
             <a:pPr>
@@ -6431,8 +8164,18 @@
               </a:defRPr>
             </a:pPr>
             <a:r>
-              <a:t>动作 4-6: 搬运与高精度码垛</a:t>
-            </a:r>
+              <a:rPr sz="1400" dirty="0" err="1"/>
+              <a:t>动作</a:t>
+            </a:r>
+            <a:r>
+              <a:rPr sz="1400" dirty="0"/>
+              <a:t> 4-6: </a:t>
+            </a:r>
+            <a:r>
+              <a:rPr sz="1400" dirty="0" err="1"/>
+              <a:t>搬运与高精度码垛</a:t>
+            </a:r>
+            <a:endParaRPr sz="1400" dirty="0"/>
           </a:p>
           <a:p>
             <a:pPr lvl="1">
@@ -6450,8 +8193,22 @@
               </a:defRPr>
             </a:pPr>
             <a:r>
-              <a:t>[4] 大尺度抓取: 模型感知顶出的满框位姿，双手从两侧牢牢抱起满框</a:t>
-            </a:r>
+              <a:rPr sz="1400" dirty="0"/>
+              <a:t>[4] </a:t>
+            </a:r>
+            <a:r>
+              <a:rPr sz="1400" dirty="0" err="1"/>
+              <a:t>大尺度抓取</a:t>
+            </a:r>
+            <a:r>
+              <a:rPr sz="1400" dirty="0"/>
+              <a:t>: </a:t>
+            </a:r>
+            <a:r>
+              <a:rPr sz="1400" dirty="0" err="1"/>
+              <a:t>模型感知顶出的满框位姿，双手从两侧牢牢抱起满框</a:t>
+            </a:r>
+            <a:endParaRPr sz="1400" dirty="0"/>
           </a:p>
           <a:p>
             <a:pPr lvl="1">
@@ -6469,8 +8226,22 @@
               </a:defRPr>
             </a:pPr>
             <a:r>
-              <a:t>[5] 高空记忆: 搬运满框前往中转站，在当前堆叠层上方悬停提取下方榫卯特征</a:t>
-            </a:r>
+              <a:rPr sz="1400" dirty="0"/>
+              <a:t>[5] </a:t>
+            </a:r>
+            <a:r>
+              <a:rPr sz="1400" dirty="0" err="1"/>
+              <a:t>高空记忆</a:t>
+            </a:r>
+            <a:r>
+              <a:rPr sz="1400" dirty="0"/>
+              <a:t>: </a:t>
+            </a:r>
+            <a:r>
+              <a:rPr sz="1400" dirty="0" err="1"/>
+              <a:t>搬运满框前往中转站，在当前堆叠层上方悬停提取下方榫卯特征</a:t>
+            </a:r>
+            <a:endParaRPr sz="1400" dirty="0"/>
           </a:p>
           <a:p>
             <a:pPr lvl="1">
@@ -6488,8 +8259,33 @@
               </a:defRPr>
             </a:pPr>
             <a:r>
-              <a:t>[6] 微插闭环: 往下放置时满框挡住视线，依靠矩阵修正倾斜，防止 5层码垛倒塌</a:t>
-            </a:r>
+              <a:rPr sz="1400" dirty="0"/>
+              <a:t>[6] </a:t>
+            </a:r>
+            <a:r>
+              <a:rPr sz="1400" dirty="0" err="1"/>
+              <a:t>微插闭环</a:t>
+            </a:r>
+            <a:r>
+              <a:rPr sz="1400" dirty="0"/>
+              <a:t>: </a:t>
+            </a:r>
+            <a:r>
+              <a:rPr sz="1400" dirty="0" err="1"/>
+              <a:t>往下放置时满框挡住视线，依靠</a:t>
+            </a:r>
+            <a:r>
+              <a:rPr lang="zh-CN" altLang="en-US" sz="1400" dirty="0">
+                <a:latin typeface="Microsoft YaHei" panose="020B0503020204020204" pitchFamily="34" charset="-122"/>
+                <a:ea typeface="Microsoft YaHei" panose="020B0503020204020204" pitchFamily="34" charset="-122"/>
+              </a:rPr>
+              <a:t>惯导</a:t>
+            </a:r>
+            <a:r>
+              <a:rPr sz="1400" dirty="0" err="1"/>
+              <a:t>修正倾斜，防止码垛倒塌</a:t>
+            </a:r>
+            <a:endParaRPr sz="1400" dirty="0"/>
           </a:p>
           <a:p>
             <a:pPr>
@@ -6506,6 +8302,7 @@
                 <a:latin typeface="Microsoft YaHei"/>
               </a:defRPr>
             </a:pPr>
+            <a:endParaRPr sz="1400" dirty="0"/>
           </a:p>
           <a:p>
             <a:pPr>
@@ -6523,8 +8320,18 @@
               </a:defRPr>
             </a:pPr>
             <a:r>
-              <a:t>动作 7-8: 完成与复位</a:t>
-            </a:r>
+              <a:rPr sz="1400" dirty="0" err="1"/>
+              <a:t>动作</a:t>
+            </a:r>
+            <a:r>
+              <a:rPr sz="1400" dirty="0"/>
+              <a:t> 7-8: </a:t>
+            </a:r>
+            <a:r>
+              <a:rPr sz="1400" dirty="0" err="1"/>
+              <a:t>完成与复位</a:t>
+            </a:r>
+            <a:endParaRPr sz="1400" dirty="0"/>
           </a:p>
           <a:p>
             <a:pPr lvl="1">
@@ -6542,8 +8349,22 @@
               </a:defRPr>
             </a:pPr>
             <a:r>
-              <a:t>[7] 触底释放: 接触力矩达到峰值判定码放稳固，松开双臂</a:t>
-            </a:r>
+              <a:rPr sz="1400" dirty="0"/>
+              <a:t>[7] </a:t>
+            </a:r>
+            <a:r>
+              <a:rPr sz="1400" dirty="0" err="1"/>
+              <a:t>触底释放</a:t>
+            </a:r>
+            <a:r>
+              <a:rPr sz="1400" dirty="0"/>
+              <a:t>: </a:t>
+            </a:r>
+            <a:r>
+              <a:rPr sz="1400" dirty="0" err="1"/>
+              <a:t>接触力矩达到峰值判定码放稳固，松开双臂</a:t>
+            </a:r>
+            <a:endParaRPr sz="1400" dirty="0"/>
           </a:p>
           <a:p>
             <a:pPr lvl="1">
@@ -6561,552 +8382,22 @@
               </a:defRPr>
             </a:pPr>
             <a:r>
-              <a:t>[8] 复位回程: 退回行车姿态，准备下一次换框任务</a:t>
-            </a:r>
-          </a:p>
-        </p:txBody>
-      </p:sp>
-    </p:spTree>
-  </p:cSld>
-  <p:clrMapOvr>
-    <a:masterClrMapping/>
-  </p:clrMapOvr>
-</p:sld>
-</file>
-
-<file path=ppt/slides/slide8.xml><?xml version="1.0" encoding="utf-8"?>
-<p:sld xmlns:a="http://schemas.openxmlformats.org/drawingml/2006/main" xmlns:p="http://schemas.openxmlformats.org/presentationml/2006/main" xmlns:r="http://schemas.openxmlformats.org/officeDocument/2006/relationships">
-  <p:cSld>
-    <p:bg>
-      <p:bgPr>
-        <a:solidFill>
-          <a:srgbClr val="F5F7FA"/>
-        </a:solidFill>
-        <a:effectLst/>
-      </p:bgPr>
-    </p:bg>
-    <p:spTree>
-      <p:nvGrpSpPr>
-        <p:cNvPr id="1" name=""/>
-        <p:cNvGrpSpPr/>
-        <p:nvPr/>
-      </p:nvGrpSpPr>
-      <p:grpSpPr/>
-      <p:sp>
-        <p:nvSpPr>
-          <p:cNvPr id="2" name="Title 1"/>
-          <p:cNvSpPr>
-            <a:spLocks noGrp="1"/>
-          </p:cNvSpPr>
-          <p:nvPr>
-            <p:ph type="title"/>
-          </p:nvPr>
-        </p:nvSpPr>
-        <p:spPr/>
-        <p:txBody>
-          <a:bodyPr/>
-          <a:lstStyle/>
-          <a:p>
-            <a:pPr>
-              <a:defRPr b="1">
-                <a:solidFill>
-                  <a:srgbClr val="003366"/>
-                </a:solidFill>
-                <a:latin typeface="Microsoft YaHei"/>
-              </a:defRPr>
-            </a:pPr>
-            <a:r>
-              <a:t>系统开发与任务拆解: Phase 0</a:t>
-            </a:r>
-          </a:p>
-        </p:txBody>
-      </p:sp>
-      <p:sp>
-        <p:nvSpPr>
-          <p:cNvPr id="3" name="Rectangle 2"/>
-          <p:cNvSpPr/>
-          <p:nvPr/>
-        </p:nvSpPr>
-        <p:spPr>
-          <a:xfrm>
-            <a:off x="0" y="0"/>
-            <a:ext cx="9144000" cy="137160"/>
-          </a:xfrm>
-          <a:prstGeom prst="rect">
-            <a:avLst/>
-          </a:prstGeom>
-          <a:solidFill>
-            <a:srgbClr val="003366"/>
-          </a:solidFill>
-          <a:ln>
-            <a:noFill/>
-          </a:ln>
-        </p:spPr>
-        <p:style>
-          <a:lnRef idx="1">
-            <a:schemeClr val="accent1"/>
-          </a:lnRef>
-          <a:fillRef idx="3">
-            <a:schemeClr val="accent1"/>
-          </a:fillRef>
-          <a:effectRef idx="2">
-            <a:schemeClr val="accent1"/>
-          </a:effectRef>
-          <a:fontRef idx="minor">
-            <a:schemeClr val="lt1"/>
-          </a:fontRef>
-        </p:style>
-        <p:txBody>
-          <a:bodyPr rtlCol="0" anchor="ctr"/>
-          <a:lstStyle/>
-          <a:p>
-            <a:pPr algn="ctr"/>
-          </a:p>
-        </p:txBody>
-      </p:sp>
-      <p:sp>
-        <p:nvSpPr>
-          <p:cNvPr id="4" name="TextBox 3"/>
-          <p:cNvSpPr txBox="1"/>
-          <p:nvPr/>
-        </p:nvSpPr>
-        <p:spPr>
-          <a:xfrm>
-            <a:off x="457200" y="6492240"/>
-            <a:ext cx="8229600" cy="365760"/>
-          </a:xfrm>
-          <a:prstGeom prst="rect">
-            <a:avLst/>
-          </a:prstGeom>
-          <a:noFill/>
-        </p:spPr>
-        <p:txBody>
-          <a:bodyPr wrap="none">
-            <a:spAutoFit/>
-          </a:bodyPr>
-          <a:lstStyle/>
-          <a:p>
-            <a:pPr>
-              <a:defRPr sz="1200" b="1">
-                <a:solidFill>
-                  <a:srgbClr val="787878"/>
-                </a:solidFill>
-                <a:latin typeface="Microsoft YaHei"/>
-              </a:defRPr>
-            </a:pPr>
-            <a:r>
-              <a:t>RJ2506 双臂轮式复合机器人 | 核心技术攻坚与系统架构</a:t>
-            </a:r>
-          </a:p>
-        </p:txBody>
-      </p:sp>
-      <p:sp>
-        <p:nvSpPr>
-          <p:cNvPr id="5" name="TextBox 4"/>
-          <p:cNvSpPr txBox="1"/>
-          <p:nvPr/>
-        </p:nvSpPr>
-        <p:spPr>
-          <a:xfrm>
-            <a:off x="457200" y="1371600"/>
-            <a:ext cx="8229600" cy="5029200"/>
-          </a:xfrm>
-          <a:prstGeom prst="rect">
-            <a:avLst/>
-          </a:prstGeom>
-          <a:noFill/>
-        </p:spPr>
-        <p:txBody>
-          <a:bodyPr wrap="square">
-            <a:spAutoFit/>
-          </a:bodyPr>
-          <a:lstStyle/>
-          <a:p/>
-          <a:p>
-            <a:pPr>
-              <a:lnSpc>
-                <a:spcPct val="110000"/>
-              </a:lnSpc>
-              <a:spcBef>
-                <a:spcPts val="500"/>
-              </a:spcBef>
-              <a:defRPr sz="2200" b="1">
-                <a:solidFill>
-                  <a:srgbClr val="0066CC"/>
-                </a:solidFill>
-                <a:latin typeface="Microsoft YaHei"/>
-              </a:defRPr>
-            </a:pPr>
-            <a:r>
-              <a:t>Phase 0: 基础设施与物理真值采集</a:t>
-            </a:r>
-          </a:p>
-          <a:p>
-            <a:pPr lvl="1">
-              <a:lnSpc>
-                <a:spcPct val="110000"/>
-              </a:lnSpc>
-              <a:spcBef>
-                <a:spcPts val="500"/>
-              </a:spcBef>
-              <a:defRPr sz="1900" b="1">
-                <a:solidFill>
-                  <a:srgbClr val="FF6600"/>
-                </a:solidFill>
-                <a:latin typeface="Microsoft YaHei"/>
-              </a:defRPr>
-            </a:pPr>
-            <a:r>
-              <a:t>时间: 2周</a:t>
-            </a:r>
-          </a:p>
-          <a:p>
-            <a:pPr lvl="1">
-              <a:lnSpc>
-                <a:spcPct val="110000"/>
-              </a:lnSpc>
-              <a:spcBef>
-                <a:spcPts val="500"/>
-              </a:spcBef>
-              <a:defRPr sz="1900" b="0">
-                <a:solidFill>
-                  <a:srgbClr val="333333"/>
-                </a:solidFill>
-                <a:latin typeface="Microsoft YaHei"/>
-              </a:defRPr>
-            </a:pPr>
-            <a:r>
-              <a:t>任务: ROS 2环境安装、相机外参标定、探针制作与Ground Truth采集、特征图金标准采集</a:t>
-            </a:r>
-          </a:p>
-          <a:p>
-            <a:pPr lvl="1">
-              <a:lnSpc>
-                <a:spcPct val="110000"/>
-              </a:lnSpc>
-              <a:spcBef>
-                <a:spcPts val="500"/>
-              </a:spcBef>
-              <a:defRPr sz="1900" b="0">
-                <a:solidFill>
-                  <a:srgbClr val="333333"/>
-                </a:solidFill>
-                <a:latin typeface="Microsoft YaHei"/>
-              </a:defRPr>
-            </a:pPr>
-            <a:r>
-              <a:t>指标: 软时间插值抖动 &lt; 10ms, 重投影误差 RMSE &lt; 1.5像素</a:t>
-            </a:r>
-          </a:p>
-        </p:txBody>
-      </p:sp>
-    </p:spTree>
-  </p:cSld>
-  <p:clrMapOvr>
-    <a:masterClrMapping/>
-  </p:clrMapOvr>
-</p:sld>
-</file>
-
-<file path=ppt/slides/slide9.xml><?xml version="1.0" encoding="utf-8"?>
-<p:sld xmlns:a="http://schemas.openxmlformats.org/drawingml/2006/main" xmlns:p="http://schemas.openxmlformats.org/presentationml/2006/main" xmlns:r="http://schemas.openxmlformats.org/officeDocument/2006/relationships">
-  <p:cSld>
-    <p:bg>
-      <p:bgPr>
-        <a:solidFill>
-          <a:srgbClr val="F5F7FA"/>
-        </a:solidFill>
-        <a:effectLst/>
-      </p:bgPr>
-    </p:bg>
-    <p:spTree>
-      <p:nvGrpSpPr>
-        <p:cNvPr id="1" name=""/>
-        <p:cNvGrpSpPr/>
-        <p:nvPr/>
-      </p:nvGrpSpPr>
-      <p:grpSpPr/>
-      <p:sp>
-        <p:nvSpPr>
-          <p:cNvPr id="2" name="Title 1"/>
-          <p:cNvSpPr>
-            <a:spLocks noGrp="1"/>
-          </p:cNvSpPr>
-          <p:nvPr>
-            <p:ph type="title"/>
-          </p:nvPr>
-        </p:nvSpPr>
-        <p:spPr/>
-        <p:txBody>
-          <a:bodyPr/>
-          <a:lstStyle/>
-          <a:p>
-            <a:pPr>
-              <a:defRPr b="1">
-                <a:solidFill>
-                  <a:srgbClr val="003366"/>
-                </a:solidFill>
-                <a:latin typeface="Microsoft YaHei"/>
-              </a:defRPr>
-            </a:pPr>
-            <a:r>
-              <a:t>系统开发与任务拆解: Phase 1</a:t>
-            </a:r>
-          </a:p>
-        </p:txBody>
-      </p:sp>
-      <p:sp>
-        <p:nvSpPr>
-          <p:cNvPr id="3" name="Rectangle 2"/>
-          <p:cNvSpPr/>
-          <p:nvPr/>
-        </p:nvSpPr>
-        <p:spPr>
-          <a:xfrm>
-            <a:off x="0" y="0"/>
-            <a:ext cx="9144000" cy="137160"/>
-          </a:xfrm>
-          <a:prstGeom prst="rect">
-            <a:avLst/>
-          </a:prstGeom>
-          <a:solidFill>
-            <a:srgbClr val="003366"/>
-          </a:solidFill>
-          <a:ln>
-            <a:noFill/>
-          </a:ln>
-        </p:spPr>
-        <p:style>
-          <a:lnRef idx="1">
-            <a:schemeClr val="accent1"/>
-          </a:lnRef>
-          <a:fillRef idx="3">
-            <a:schemeClr val="accent1"/>
-          </a:fillRef>
-          <a:effectRef idx="2">
-            <a:schemeClr val="accent1"/>
-          </a:effectRef>
-          <a:fontRef idx="minor">
-            <a:schemeClr val="lt1"/>
-          </a:fontRef>
-        </p:style>
-        <p:txBody>
-          <a:bodyPr rtlCol="0" anchor="ctr"/>
-          <a:lstStyle/>
-          <a:p>
-            <a:pPr algn="ctr"/>
-          </a:p>
-        </p:txBody>
-      </p:sp>
-      <p:sp>
-        <p:nvSpPr>
-          <p:cNvPr id="4" name="TextBox 3"/>
-          <p:cNvSpPr txBox="1"/>
-          <p:nvPr/>
-        </p:nvSpPr>
-        <p:spPr>
-          <a:xfrm>
-            <a:off x="457200" y="6492240"/>
-            <a:ext cx="8229600" cy="365760"/>
-          </a:xfrm>
-          <a:prstGeom prst="rect">
-            <a:avLst/>
-          </a:prstGeom>
-          <a:noFill/>
-        </p:spPr>
-        <p:txBody>
-          <a:bodyPr wrap="none">
-            <a:spAutoFit/>
-          </a:bodyPr>
-          <a:lstStyle/>
-          <a:p>
-            <a:pPr>
-              <a:defRPr sz="1200" b="1">
-                <a:solidFill>
-                  <a:srgbClr val="787878"/>
-                </a:solidFill>
-                <a:latin typeface="Microsoft YaHei"/>
-              </a:defRPr>
-            </a:pPr>
-            <a:r>
-              <a:t>RJ2506 双臂轮式复合机器人 | 核心技术攻坚与系统架构</a:t>
-            </a:r>
-          </a:p>
-        </p:txBody>
-      </p:sp>
-      <p:sp>
-        <p:nvSpPr>
-          <p:cNvPr id="5" name="TextBox 4"/>
-          <p:cNvSpPr txBox="1"/>
-          <p:nvPr/>
-        </p:nvSpPr>
-        <p:spPr>
-          <a:xfrm>
-            <a:off x="457200" y="1371600"/>
-            <a:ext cx="8229600" cy="5029200"/>
-          </a:xfrm>
-          <a:prstGeom prst="rect">
-            <a:avLst/>
-          </a:prstGeom>
-          <a:noFill/>
-        </p:spPr>
-        <p:txBody>
-          <a:bodyPr wrap="square">
-            <a:spAutoFit/>
-          </a:bodyPr>
-          <a:lstStyle/>
-          <a:p/>
-          <a:p>
-            <a:pPr>
-              <a:lnSpc>
-                <a:spcPct val="110000"/>
-              </a:lnSpc>
-              <a:spcBef>
-                <a:spcPts val="500"/>
-              </a:spcBef>
-              <a:defRPr sz="2200" b="1">
-                <a:solidFill>
-                  <a:srgbClr val="0066CC"/>
-                </a:solidFill>
-                <a:latin typeface="Microsoft YaHei"/>
-              </a:defRPr>
-            </a:pPr>
-            <a:r>
-              <a:t>Phase 1: 核心硬骨头算法模块攻坚 (研发重点)</a:t>
-            </a:r>
-          </a:p>
-          <a:p>
-            <a:pPr lvl="1">
-              <a:lnSpc>
-                <a:spcPct val="110000"/>
-              </a:lnSpc>
-              <a:spcBef>
-                <a:spcPts val="500"/>
-              </a:spcBef>
-              <a:defRPr sz="1900" b="1">
-                <a:solidFill>
-                  <a:srgbClr val="FF6600"/>
-                </a:solidFill>
-                <a:latin typeface="Microsoft YaHei"/>
-              </a:defRPr>
-            </a:pPr>
-            <a:r>
-              <a:t>时间: 6周</a:t>
-            </a:r>
-          </a:p>
-          <a:p>
-            <a:pPr lvl="1">
-              <a:lnSpc>
-                <a:spcPct val="110000"/>
-              </a:lnSpc>
-              <a:spcBef>
-                <a:spcPts val="500"/>
-              </a:spcBef>
-              <a:defRPr sz="1900" b="0">
-                <a:solidFill>
-                  <a:srgbClr val="333333"/>
-                </a:solidFill>
-                <a:latin typeface="Microsoft YaHei"/>
-              </a:defRPr>
-            </a:pPr>
-            <a:r>
-              <a:t>任务:</a:t>
-            </a:r>
-          </a:p>
-          <a:p>
-            <a:pPr lvl="2">
-              <a:lnSpc>
-                <a:spcPct val="110000"/>
-              </a:lnSpc>
-              <a:spcBef>
-                <a:spcPts val="500"/>
-              </a:spcBef>
-              <a:defRPr sz="1600" b="0">
-                <a:solidFill>
-                  <a:srgbClr val="333333"/>
-                </a:solidFill>
-                <a:latin typeface="Microsoft YaHei"/>
-              </a:defRPr>
-            </a:pPr>
-            <a:r>
-              <a:t>• 双臂全身协调控制(WBC)</a:t>
-            </a:r>
-          </a:p>
-          <a:p>
-            <a:pPr lvl="2">
-              <a:lnSpc>
-                <a:spcPct val="110000"/>
-              </a:lnSpc>
-              <a:spcBef>
-                <a:spcPts val="500"/>
-              </a:spcBef>
-              <a:defRPr sz="1600" b="0">
-                <a:solidFill>
-                  <a:srgbClr val="333333"/>
-                </a:solidFill>
-                <a:latin typeface="Microsoft YaHei"/>
-              </a:defRPr>
-            </a:pPr>
-            <a:r>
-              <a:t>• 顶层状态机</a:t>
-            </a:r>
-          </a:p>
-          <a:p>
-            <a:pPr lvl="2">
-              <a:lnSpc>
-                <a:spcPct val="110000"/>
-              </a:lnSpc>
-              <a:spcBef>
-                <a:spcPts val="500"/>
-              </a:spcBef>
-              <a:defRPr sz="1600" b="0">
-                <a:solidFill>
-                  <a:srgbClr val="333333"/>
-                </a:solidFill>
-                <a:latin typeface="Microsoft YaHei"/>
-              </a:defRPr>
-            </a:pPr>
-            <a:r>
-              <a:t>• 双目特征提取</a:t>
-            </a:r>
-          </a:p>
-          <a:p>
-            <a:pPr lvl="2">
-              <a:lnSpc>
-                <a:spcPct val="110000"/>
-              </a:lnSpc>
-              <a:spcBef>
-                <a:spcPts val="500"/>
-              </a:spcBef>
-              <a:defRPr sz="1600" b="0">
-                <a:solidFill>
-                  <a:srgbClr val="333333"/>
-                </a:solidFill>
-                <a:latin typeface="Microsoft YaHei"/>
-              </a:defRPr>
-            </a:pPr>
-            <a:r>
-              <a:t>• 虚拟IBVS视觉伺服</a:t>
-            </a:r>
-          </a:p>
-          <a:p>
-            <a:pPr lvl="2">
-              <a:lnSpc>
-                <a:spcPct val="110000"/>
-              </a:lnSpc>
-              <a:spcBef>
-                <a:spcPts val="500"/>
-              </a:spcBef>
-              <a:defRPr sz="1600" b="0">
-                <a:solidFill>
-                  <a:srgbClr val="333333"/>
-                </a:solidFill>
-                <a:latin typeface="Microsoft YaHei"/>
-              </a:defRPr>
-            </a:pPr>
-            <a:r>
-              <a:t>• C++守护进程、阻抗控制</a:t>
-            </a:r>
+              <a:rPr sz="1400" dirty="0"/>
+              <a:t>[8] </a:t>
+            </a:r>
+            <a:r>
+              <a:rPr sz="1400" dirty="0" err="1"/>
+              <a:t>复位回程</a:t>
+            </a:r>
+            <a:r>
+              <a:rPr sz="1400" dirty="0"/>
+              <a:t>: </a:t>
+            </a:r>
+            <a:r>
+              <a:rPr sz="1400" dirty="0" err="1"/>
+              <a:t>退回行车姿态，准备下一次换框任务</a:t>
+            </a:r>
+            <a:endParaRPr sz="1400" dirty="0"/>
           </a:p>
         </p:txBody>
       </p:sp>
